--- a/Planning docs/Slides/lesson-13-2-teacher-slides.pptx
+++ b/Planning docs/Slides/lesson-13-2-teacher-slides.pptx
@@ -21,9 +21,12 @@
     <p:sldId id="269" r:id="rId15"/>
     <p:sldId id="270" r:id="rId16"/>
     <p:sldId id="271" r:id="rId17"/>
+    <p:sldId id="272" r:id="rId18"/>
+    <p:sldId id="273" r:id="rId19"/>
+    <p:sldId id="274" r:id="rId20"/>
   </p:sldIdLst>
   <p:notesMasterIdLst>
-    <p:notesMasterId r:id="rId18"/>
+    <p:notesMasterId r:id="rId21"/>
   </p:notesMasterIdLst>
   <p:sldSz cx="9144000" cy="5143500"/>
   <p:notesSz cx="5143500" cy="9144000"/>
@@ -605,7 +608,7 @@
           <a:p>
             <a:r>
               <a:rPr lang="en-US" dirty="0"/>
-              <a:t>Each word appears in the chapters read this week, in the author’s own sentence.</a:t>
+              <a:t>Break the word into base + word part. Ask what the part adds to the meaning.</a:t>
             </a:r>
             <a:endParaRPr lang="en-US" dirty="0"/>
           </a:p>
@@ -693,7 +696,7 @@
           <a:p>
             <a:r>
               <a:rPr lang="en-US" dirty="0"/>
-              <a:t>Answers: she?”, “Gone,”, shouted,, go,”</a:t>
+              <a:t>Each word appears in the chapters read this week, in the author’s own sentence.</a:t>
             </a:r>
             <a:endParaRPr lang="en-US" dirty="0"/>
           </a:p>
@@ -781,7 +784,8 @@
           <a:p>
             <a:r>
               <a:rPr lang="en-US" dirty="0"/>
-              <a:t>Answers: she?”, “Gone,”, shouted,, go,”</a:t>
+              <a:t>Let students talk through the questions before revealing the pattern.
+Two adjectives: small describes the mouse, golden describes the thread. A sentence can carry as many adjectives as the writer needs.</a:t>
             </a:r>
             <a:endParaRPr lang="en-US" dirty="0"/>
           </a:p>
@@ -869,7 +873,8 @@
           <a:p>
             <a:r>
               <a:rPr lang="en-US" dirty="0"/>
-              <a:t>Soft (/s/ or /j/): mice, prince, magic, gentle | Hard (/k/ or /g/): Cook, candle, gold, garlic</a:t>
+              <a:t>Let students talk through the questions before revealing the pattern.
+Two adjectives: small describes the mouse, golden describes the thread. A sentence can carry as many adjectives as the writer needs.</a:t>
             </a:r>
             <a:endParaRPr lang="en-US" dirty="0"/>
           </a:p>
@@ -957,7 +962,7 @@
           <a:p>
             <a:r>
               <a:rPr lang="en-US" dirty="0"/>
-              <a:t>Soft (/s/ or /j/): mice, prince, magic, gentle | Hard (/k/ or /g/): Cook, candle, gold, garlic</a:t>
+              <a:t>Answers: small, golden, sweet,, low, dark, deep, brave, sad</a:t>
             </a:r>
             <a:endParaRPr lang="en-US" dirty="0"/>
           </a:p>
@@ -1045,7 +1050,7 @@
           <a:p>
             <a:r>
               <a:rPr lang="en-US" dirty="0"/>
-              <a:t>Read the chapters, then return to the pause questions.</a:t>
+              <a:t>Answers: small, golden, sweet,, low, dark, deep, brave, sad</a:t>
             </a:r>
             <a:endParaRPr lang="en-US" dirty="0"/>
           </a:p>
@@ -1133,7 +1138,8 @@
           <a:p>
             <a:r>
               <a:rPr lang="en-US" dirty="0"/>
-              <a:t>Writer’s Workshop stage for the week.</a:t>
+              <a:t>Rule: A closed syllable ends in a consonant, and that consonant shuts the vowel in so it stays short: nap, kin. Long words are often just two closed syllables stuck together: nap·kin.
+Answers: napkin, rabbit, basket, contest</a:t>
             </a:r>
             <a:endParaRPr lang="en-US" dirty="0"/>
           </a:p>
@@ -1157,6 +1163,271 @@
             <a:fld id="{F7021451-1387-4CA6-816F-3879F97B5CBC}" type="slidenum">
               <a:rPr lang="en-US"/>
               <a:t>16</a:t>
+            </a:fld>
+            <a:endParaRPr lang="en-US"/>
+          </a:p>
+        </p:txBody>
+      </p:sp>
+    </p:spTree>
+    <p:extLst>
+      <p:ext uri="{BB962C8B-B14F-4D97-AF65-F5344CB8AC3E}">
+        <p14:creationId xmlns:p14="http://schemas.microsoft.com/office/powerpoint/2010/main" val="1024086991"/>
+      </p:ext>
+    </p:extLst>
+  </p:cSld>
+  <p:clrMapOvr>
+    <a:masterClrMapping/>
+  </p:clrMapOvr>
+</p:notes>
+</file>
+
+<file path=ppt/notesSlides/notesSlide17.xml><?xml version="1.0" encoding="utf-8"?>
+<p:notes xmlns:a="http://schemas.openxmlformats.org/drawingml/2006/main" xmlns:r="http://schemas.openxmlformats.org/officeDocument/2006/relationships" xmlns:p="http://schemas.openxmlformats.org/presentationml/2006/main">
+  <p:cSld>
+    <p:spTree>
+      <p:nvGrpSpPr>
+        <p:cNvPr id="1" name=""/>
+        <p:cNvGrpSpPr/>
+        <p:nvPr/>
+      </p:nvGrpSpPr>
+      <p:grpSpPr>
+        <a:xfrm>
+          <a:off x="0" y="0"/>
+          <a:ext cx="0" cy="0"/>
+          <a:chOff x="0" y="0"/>
+          <a:chExt cx="0" cy="0"/>
+        </a:xfrm>
+      </p:grpSpPr>
+      <p:sp>
+        <p:nvSpPr>
+          <p:cNvPr id="2" name="Slide Image Placeholder 1"/>
+          <p:cNvSpPr>
+            <a:spLocks noGrp="1" noRot="1" noChangeAspect="1"/>
+          </p:cNvSpPr>
+          <p:nvPr>
+            <p:ph type="sldImg"/>
+          </p:nvPr>
+        </p:nvSpPr>
+        <p:spPr/>
+      </p:sp>
+      <p:sp>
+        <p:nvSpPr>
+          <p:cNvPr id="3" name="Notes Placeholder 2"/>
+          <p:cNvSpPr>
+            <a:spLocks noGrp="1"/>
+          </p:cNvSpPr>
+          <p:nvPr>
+            <p:ph type="body" idx="1"/>
+          </p:nvPr>
+        </p:nvSpPr>
+        <p:spPr/>
+        <p:txBody>
+          <a:bodyPr/>
+          <a:lstStyle/>
+          <a:p>
+            <a:r>
+              <a:rPr lang="en-US" dirty="0"/>
+              <a:t>Rule: A closed syllable ends in a consonant, and that consonant shuts the vowel in so it stays short: nap, kin. Long words are often just two closed syllables stuck together: nap·kin.
+Answers: napkin, rabbit, basket, contest</a:t>
+            </a:r>
+            <a:endParaRPr lang="en-US" dirty="0"/>
+          </a:p>
+        </p:txBody>
+      </p:sp>
+      <p:sp>
+        <p:nvSpPr>
+          <p:cNvPr id="4" name="Slide Number Placeholder 3"/>
+          <p:cNvSpPr>
+            <a:spLocks noGrp="1"/>
+          </p:cNvSpPr>
+          <p:nvPr>
+            <p:ph type="sldNum" sz="quarter" idx="10"/>
+          </p:nvPr>
+        </p:nvSpPr>
+        <p:spPr/>
+        <p:txBody>
+          <a:bodyPr/>
+          <a:lstStyle/>
+          <a:p>
+            <a:fld id="{F7021451-1387-4CA6-816F-3879F97B5CBC}" type="slidenum">
+              <a:rPr lang="en-US"/>
+              <a:t>17</a:t>
+            </a:fld>
+            <a:endParaRPr lang="en-US"/>
+          </a:p>
+        </p:txBody>
+      </p:sp>
+    </p:spTree>
+    <p:extLst>
+      <p:ext uri="{BB962C8B-B14F-4D97-AF65-F5344CB8AC3E}">
+        <p14:creationId xmlns:p14="http://schemas.microsoft.com/office/powerpoint/2010/main" val="1024086991"/>
+      </p:ext>
+    </p:extLst>
+  </p:cSld>
+  <p:clrMapOvr>
+    <a:masterClrMapping/>
+  </p:clrMapOvr>
+</p:notes>
+</file>
+
+<file path=ppt/notesSlides/notesSlide18.xml><?xml version="1.0" encoding="utf-8"?>
+<p:notes xmlns:a="http://schemas.openxmlformats.org/drawingml/2006/main" xmlns:r="http://schemas.openxmlformats.org/officeDocument/2006/relationships" xmlns:p="http://schemas.openxmlformats.org/presentationml/2006/main">
+  <p:cSld>
+    <p:spTree>
+      <p:nvGrpSpPr>
+        <p:cNvPr id="1" name=""/>
+        <p:cNvGrpSpPr/>
+        <p:nvPr/>
+      </p:nvGrpSpPr>
+      <p:grpSpPr>
+        <a:xfrm>
+          <a:off x="0" y="0"/>
+          <a:ext cx="0" cy="0"/>
+          <a:chOff x="0" y="0"/>
+          <a:chExt cx="0" cy="0"/>
+        </a:xfrm>
+      </p:grpSpPr>
+      <p:sp>
+        <p:nvSpPr>
+          <p:cNvPr id="2" name="Slide Image Placeholder 1"/>
+          <p:cNvSpPr>
+            <a:spLocks noGrp="1" noRot="1" noChangeAspect="1"/>
+          </p:cNvSpPr>
+          <p:nvPr>
+            <p:ph type="sldImg"/>
+          </p:nvPr>
+        </p:nvSpPr>
+        <p:spPr/>
+      </p:sp>
+      <p:sp>
+        <p:nvSpPr>
+          <p:cNvPr id="3" name="Notes Placeholder 2"/>
+          <p:cNvSpPr>
+            <a:spLocks noGrp="1"/>
+          </p:cNvSpPr>
+          <p:nvPr>
+            <p:ph type="body" idx="1"/>
+          </p:nvPr>
+        </p:nvSpPr>
+        <p:spPr/>
+        <p:txBody>
+          <a:bodyPr/>
+          <a:lstStyle/>
+          <a:p>
+            <a:r>
+              <a:rPr lang="en-US" dirty="0"/>
+              <a:t>Read the chapters, then return to the pause questions.</a:t>
+            </a:r>
+            <a:endParaRPr lang="en-US" dirty="0"/>
+          </a:p>
+        </p:txBody>
+      </p:sp>
+      <p:sp>
+        <p:nvSpPr>
+          <p:cNvPr id="4" name="Slide Number Placeholder 3"/>
+          <p:cNvSpPr>
+            <a:spLocks noGrp="1"/>
+          </p:cNvSpPr>
+          <p:nvPr>
+            <p:ph type="sldNum" sz="quarter" idx="10"/>
+          </p:nvPr>
+        </p:nvSpPr>
+        <p:spPr/>
+        <p:txBody>
+          <a:bodyPr/>
+          <a:lstStyle/>
+          <a:p>
+            <a:fld id="{F7021451-1387-4CA6-816F-3879F97B5CBC}" type="slidenum">
+              <a:rPr lang="en-US"/>
+              <a:t>18</a:t>
+            </a:fld>
+            <a:endParaRPr lang="en-US"/>
+          </a:p>
+        </p:txBody>
+      </p:sp>
+    </p:spTree>
+    <p:extLst>
+      <p:ext uri="{BB962C8B-B14F-4D97-AF65-F5344CB8AC3E}">
+        <p14:creationId xmlns:p14="http://schemas.microsoft.com/office/powerpoint/2010/main" val="1024086991"/>
+      </p:ext>
+    </p:extLst>
+  </p:cSld>
+  <p:clrMapOvr>
+    <a:masterClrMapping/>
+  </p:clrMapOvr>
+</p:notes>
+</file>
+
+<file path=ppt/notesSlides/notesSlide19.xml><?xml version="1.0" encoding="utf-8"?>
+<p:notes xmlns:a="http://schemas.openxmlformats.org/drawingml/2006/main" xmlns:r="http://schemas.openxmlformats.org/officeDocument/2006/relationships" xmlns:p="http://schemas.openxmlformats.org/presentationml/2006/main">
+  <p:cSld>
+    <p:spTree>
+      <p:nvGrpSpPr>
+        <p:cNvPr id="1" name=""/>
+        <p:cNvGrpSpPr/>
+        <p:nvPr/>
+      </p:nvGrpSpPr>
+      <p:grpSpPr>
+        <a:xfrm>
+          <a:off x="0" y="0"/>
+          <a:ext cx="0" cy="0"/>
+          <a:chOff x="0" y="0"/>
+          <a:chExt cx="0" cy="0"/>
+        </a:xfrm>
+      </p:grpSpPr>
+      <p:sp>
+        <p:nvSpPr>
+          <p:cNvPr id="2" name="Slide Image Placeholder 1"/>
+          <p:cNvSpPr>
+            <a:spLocks noGrp="1" noRot="1" noChangeAspect="1"/>
+          </p:cNvSpPr>
+          <p:nvPr>
+            <p:ph type="sldImg"/>
+          </p:nvPr>
+        </p:nvSpPr>
+        <p:spPr/>
+      </p:sp>
+      <p:sp>
+        <p:nvSpPr>
+          <p:cNvPr id="3" name="Notes Placeholder 2"/>
+          <p:cNvSpPr>
+            <a:spLocks noGrp="1"/>
+          </p:cNvSpPr>
+          <p:nvPr>
+            <p:ph type="body" idx="1"/>
+          </p:nvPr>
+        </p:nvSpPr>
+        <p:spPr/>
+        <p:txBody>
+          <a:bodyPr/>
+          <a:lstStyle/>
+          <a:p>
+            <a:r>
+              <a:rPr lang="en-US" dirty="0"/>
+              <a:t>Writer’s Workshop stage for the week.</a:t>
+            </a:r>
+            <a:endParaRPr lang="en-US" dirty="0"/>
+          </a:p>
+        </p:txBody>
+      </p:sp>
+      <p:sp>
+        <p:nvSpPr>
+          <p:cNvPr id="4" name="Slide Number Placeholder 3"/>
+          <p:cNvSpPr>
+            <a:spLocks noGrp="1"/>
+          </p:cNvSpPr>
+          <p:nvPr>
+            <p:ph type="sldNum" sz="quarter" idx="10"/>
+          </p:nvPr>
+        </p:nvSpPr>
+        <p:spPr/>
+        <p:txBody>
+          <a:bodyPr/>
+          <a:lstStyle/>
+          <a:p>
+            <a:fld id="{F7021451-1387-4CA6-816F-3879F97B5CBC}" type="slidenum">
+              <a:rPr lang="en-US"/>
+              <a:t>19</a:t>
             </a:fld>
             <a:endParaRPr lang="en-US"/>
           </a:p>
@@ -1573,7 +1844,7 @@
           <a:p>
             <a:r>
               <a:rPr lang="en-US" dirty="0"/>
-              <a:t>Reading lens: Good readers look for theme clues . A theme is a lesson the whole story teaches.</a:t>
+              <a:t>Reading lens: Good readers look for theme clues. A theme is a lesson the whole story teaches.</a:t>
             </a:r>
             <a:endParaRPr lang="en-US" dirty="0"/>
           </a:p>
@@ -1661,8 +1932,7 @@
           <a:p>
             <a:r>
               <a:rPr lang="en-US" dirty="0"/>
-              <a:t>Corrected:  1. Roscuro finally got what he had wanted most in the world , but it tasted different than he expected.
-Look for: Did you catch the proper nouns (Roscuro, princess), the -ly adverbs (quietly, graciously), the comma before "but," and capital letters?</a:t>
+              <a:t>Tap through each highlighted word in the lesson and name what it does right before moving to the fix-it.</a:t>
             </a:r>
             <a:endParaRPr lang="en-US" dirty="0"/>
           </a:p>
@@ -1750,8 +2020,8 @@
           <a:p>
             <a:r>
               <a:rPr lang="en-US" dirty="0"/>
-              <a:t>Corrected:  1. Roscuro finally got what he had wanted most in the world , but it tasted different than he expected.
-Look for: Did you catch the proper nouns (Roscuro, princess), the -ly adverbs (quietly, graciously), the comma before "but," and capital letters?</a:t>
+              <a:t>Corrected: Roscuro finally got what he had wanted most in the world, but it tasted different than he expected. 
+Look for: </a:t>
             </a:r>
             <a:endParaRPr lang="en-US" dirty="0"/>
           </a:p>
@@ -1839,7 +2109,8 @@
           <a:p>
             <a:r>
               <a:rPr lang="en-US" dirty="0"/>
-              <a:t>Break the word into base + word part. Ask what the part adds to the meaning.</a:t>
+              <a:t>Corrected: Roscuro finally got what he had wanted most in the world, but it tasted different than he expected. 
+Look for: </a:t>
             </a:r>
             <a:endParaRPr lang="en-US" dirty="0"/>
           </a:p>
@@ -2412,7 +2683,7 @@
             <a:avLst/>
           </a:prstGeom>
           <a:solidFill>
-            <a:srgbClr val="55C8E8"/>
+            <a:srgbClr val="8B6FC0"/>
           </a:solidFill>
           <a:ln/>
         </p:spPr>
@@ -2450,7 +2721,7 @@
                 <a:ea typeface="Calibri" pitchFamily="34" charset="-122"/>
                 <a:cs typeface="Calibri" pitchFamily="34" charset="-120"/>
               </a:rPr>
-              <a:t>🔤  Vocabulary</a:t>
+              <a:t>🌱  Morphology</a:t>
             </a:r>
             <a:endParaRPr lang="en-US" sz="2200" dirty="0"/>
           </a:p>
@@ -2483,13 +2754,13 @@
             <a:r>
               <a:rPr lang="en-US" sz="1100" b="1" spc="100" kern="0" dirty="0">
                 <a:solidFill>
-                  <a:srgbClr val="55C8E8"/>
-                </a:solidFill>
-                <a:latin typeface="Calibri" pitchFamily="34" charset="0"/>
-                <a:ea typeface="Calibri" pitchFamily="34" charset="-122"/>
-                <a:cs typeface="Calibri" pitchFamily="34" charset="-120"/>
-              </a:rPr>
-              <a:t>VOCABULARY</a:t>
+                  <a:srgbClr val="8B6FC0"/>
+                </a:solidFill>
+                <a:latin typeface="Calibri" pitchFamily="34" charset="0"/>
+                <a:ea typeface="Calibri" pitchFamily="34" charset="-122"/>
+                <a:cs typeface="Calibri" pitchFamily="34" charset="-120"/>
+              </a:rPr>
+              <a:t>NON-</a:t>
             </a:r>
             <a:endParaRPr lang="en-US" sz="1100" dirty="0"/>
           </a:p>
@@ -2504,15 +2775,15 @@
         <p:spPr>
           <a:xfrm>
             <a:off x="365760" y="1097280"/>
-            <a:ext cx="8412480" cy="658368"/>
+            <a:ext cx="8412480" cy="621792"/>
           </a:xfrm>
           <a:prstGeom prst="roundRect">
             <a:avLst>
-              <a:gd name="adj" fmla="val 13889"/>
+              <a:gd name="adj" fmla="val 14706"/>
             </a:avLst>
           </a:prstGeom>
           <a:solidFill>
-            <a:srgbClr val="E5F7FC"/>
+            <a:srgbClr val="F0E8FF"/>
           </a:solidFill>
           <a:ln/>
           <a:effectLst>
@@ -2532,38 +2803,24 @@
         </p:nvSpPr>
         <p:spPr>
           <a:xfrm>
-            <a:off x="594360" y="1225296"/>
-            <a:ext cx="7863840" cy="420624"/>
-          </a:xfrm>
-          <a:prstGeom prst="rect">
-            <a:avLst/>
-          </a:prstGeom>
-          <a:noFill/>
-          <a:ln/>
-        </p:spPr>
-        <p:txBody>
-          <a:bodyPr wrap="square" lIns="0" tIns="0" rIns="0" bIns="0" rtlCol="0" anchor="ctr"/>
-          <a:lstStyle/>
-          <a:p>
-            <a:pPr indent="0" marL="0">
-              <a:buNone/>
-            </a:pPr>
-            <a:r>
-              <a:rPr lang="en-US" sz="1700" b="1" dirty="0">
-                <a:solidFill>
-                  <a:srgbClr val="0E1C42"/>
-                </a:solidFill>
-                <a:latin typeface="Calibri" pitchFamily="34" charset="0"/>
-                <a:ea typeface="Calibri" pitchFamily="34" charset="-122"/>
-                <a:cs typeface="Calibri" pitchFamily="34" charset="-120"/>
-              </a:rPr>
-              <a:t>needle  </a:t>
-            </a:r>
-            <a:pPr indent="0" marL="0">
-              <a:buNone/>
-            </a:pPr>
-            <a:r>
-              <a:rPr lang="en-US" sz="1400" dirty="0">
+            <a:off x="594360" y="1216152"/>
+            <a:ext cx="7863840" cy="384048"/>
+          </a:xfrm>
+          <a:prstGeom prst="rect">
+            <a:avLst/>
+          </a:prstGeom>
+          <a:noFill/>
+          <a:ln/>
+        </p:spPr>
+        <p:txBody>
+          <a:bodyPr wrap="square" lIns="0" tIns="0" rIns="0" bIns="0" rtlCol="0" anchor="ctr"/>
+          <a:lstStyle/>
+          <a:p>
+            <a:pPr indent="0" marL="0">
+              <a:buNone/>
+            </a:pPr>
+            <a:r>
+              <a:rPr lang="en-US" sz="1500" dirty="0">
                 <a:solidFill>
                   <a:srgbClr val="1E293B"/>
                 </a:solidFill>
@@ -2571,9 +2828,9 @@
                 <a:ea typeface="Calibri" pitchFamily="34" charset="-122"/>
                 <a:cs typeface="Calibri" pitchFamily="34" charset="-120"/>
               </a:rPr>
-              <a:t>A thin, sharp metal tool for sewing — here, a mouse's sword.</a:t>
-            </a:r>
-            <a:endParaRPr lang="en-US" sz="1700" dirty="0"/>
+              <a:t>🌱  non- means not.</a:t>
+            </a:r>
+            <a:endParaRPr lang="en-US" sz="1500" dirty="0"/>
           </a:p>
         </p:txBody>
       </p:sp>
@@ -2585,16 +2842,16 @@
         </p:nvSpPr>
         <p:spPr>
           <a:xfrm>
-            <a:off x="365760" y="1828800"/>
-            <a:ext cx="8412480" cy="658368"/>
+            <a:off x="365760" y="1792224"/>
+            <a:ext cx="8412480" cy="621792"/>
           </a:xfrm>
           <a:prstGeom prst="roundRect">
             <a:avLst>
-              <a:gd name="adj" fmla="val 13889"/>
+              <a:gd name="adj" fmla="val 14706"/>
             </a:avLst>
           </a:prstGeom>
           <a:solidFill>
-            <a:srgbClr val="FFFFFF"/>
+            <a:srgbClr val="F8F4FF"/>
           </a:solidFill>
           <a:ln/>
           <a:effectLst>
@@ -2614,38 +2871,24 @@
         </p:nvSpPr>
         <p:spPr>
           <a:xfrm>
-            <a:off x="594360" y="1956816"/>
-            <a:ext cx="7863840" cy="420624"/>
-          </a:xfrm>
-          <a:prstGeom prst="rect">
-            <a:avLst/>
-          </a:prstGeom>
-          <a:noFill/>
-          <a:ln/>
-        </p:spPr>
-        <p:txBody>
-          <a:bodyPr wrap="square" lIns="0" tIns="0" rIns="0" bIns="0" rtlCol="0" anchor="ctr"/>
-          <a:lstStyle/>
-          <a:p>
-            <a:pPr indent="0" marL="0">
-              <a:buNone/>
-            </a:pPr>
-            <a:r>
-              <a:rPr lang="en-US" sz="1700" b="1" dirty="0">
-                <a:solidFill>
-                  <a:srgbClr val="0E1C42"/>
-                </a:solidFill>
-                <a:latin typeface="Calibri" pitchFamily="34" charset="0"/>
-                <a:ea typeface="Calibri" pitchFamily="34" charset="-122"/>
-                <a:cs typeface="Calibri" pitchFamily="34" charset="-120"/>
-              </a:rPr>
-              <a:t>forgiven  </a:t>
-            </a:r>
-            <a:pPr indent="0" marL="0">
-              <a:buNone/>
-            </a:pPr>
-            <a:r>
-              <a:rPr lang="en-US" sz="1400" dirty="0">
+            <a:off x="594360" y="1911096"/>
+            <a:ext cx="7863840" cy="384048"/>
+          </a:xfrm>
+          <a:prstGeom prst="rect">
+            <a:avLst/>
+          </a:prstGeom>
+          <a:noFill/>
+          <a:ln/>
+        </p:spPr>
+        <p:txBody>
+          <a:bodyPr wrap="square" lIns="0" tIns="0" rIns="0" bIns="0" rtlCol="0" anchor="ctr"/>
+          <a:lstStyle/>
+          <a:p>
+            <a:pPr indent="0" marL="0">
+              <a:buNone/>
+            </a:pPr>
+            <a:r>
+              <a:rPr lang="en-US" sz="1500" dirty="0">
                 <a:solidFill>
                   <a:srgbClr val="1E293B"/>
                 </a:solidFill>
@@ -2653,9 +2896,9 @@
                 <a:ea typeface="Calibri" pitchFamily="34" charset="-122"/>
                 <a:cs typeface="Calibri" pitchFamily="34" charset="-120"/>
               </a:rPr>
-              <a:t>No longer blamed for something you did wrong.</a:t>
-            </a:r>
-            <a:endParaRPr lang="en-US" sz="1700" dirty="0"/>
+              <a:t>🌱  nonfiction = writing that is not made up · nonsense = words that do not make sense · nonstop = without stopping</a:t>
+            </a:r>
+            <a:endParaRPr lang="en-US" sz="1500" dirty="0"/>
           </a:p>
         </p:txBody>
       </p:sp>
@@ -2667,16 +2910,16 @@
         </p:nvSpPr>
         <p:spPr>
           <a:xfrm>
-            <a:off x="365760" y="2560320"/>
-            <a:ext cx="8412480" cy="658368"/>
+            <a:off x="365760" y="2487168"/>
+            <a:ext cx="8412480" cy="621792"/>
           </a:xfrm>
           <a:prstGeom prst="roundRect">
             <a:avLst>
-              <a:gd name="adj" fmla="val 13889"/>
+              <a:gd name="adj" fmla="val 14706"/>
             </a:avLst>
           </a:prstGeom>
           <a:solidFill>
-            <a:srgbClr val="E5F7FC"/>
+            <a:srgbClr val="F0E8FF"/>
           </a:solidFill>
           <a:ln/>
           <a:effectLst>
@@ -2696,38 +2939,24 @@
         </p:nvSpPr>
         <p:spPr>
           <a:xfrm>
-            <a:off x="594360" y="2688336"/>
-            <a:ext cx="7863840" cy="420624"/>
-          </a:xfrm>
-          <a:prstGeom prst="rect">
-            <a:avLst/>
-          </a:prstGeom>
-          <a:noFill/>
-          <a:ln/>
-        </p:spPr>
-        <p:txBody>
-          <a:bodyPr wrap="square" lIns="0" tIns="0" rIns="0" bIns="0" rtlCol="0" anchor="ctr"/>
-          <a:lstStyle/>
-          <a:p>
-            <a:pPr indent="0" marL="0">
-              <a:buNone/>
-            </a:pPr>
-            <a:r>
-              <a:rPr lang="en-US" sz="1700" b="1" dirty="0">
-                <a:solidFill>
-                  <a:srgbClr val="0E1C42"/>
-                </a:solidFill>
-                <a:latin typeface="Calibri" pitchFamily="34" charset="0"/>
-                <a:ea typeface="Calibri" pitchFamily="34" charset="-122"/>
-                <a:cs typeface="Calibri" pitchFamily="34" charset="-120"/>
-              </a:rPr>
-              <a:t>braver  </a:t>
-            </a:r>
-            <a:pPr indent="0" marL="0">
-              <a:buNone/>
-            </a:pPr>
-            <a:r>
-              <a:rPr lang="en-US" sz="1400" dirty="0">
+            <a:off x="594360" y="2606040"/>
+            <a:ext cx="7863840" cy="384048"/>
+          </a:xfrm>
+          <a:prstGeom prst="rect">
+            <a:avLst/>
+          </a:prstGeom>
+          <a:noFill/>
+          <a:ln/>
+        </p:spPr>
+        <p:txBody>
+          <a:bodyPr wrap="square" lIns="0" tIns="0" rIns="0" bIns="0" rtlCol="0" anchor="ctr"/>
+          <a:lstStyle/>
+          <a:p>
+            <a:pPr indent="0" marL="0">
+              <a:buNone/>
+            </a:pPr>
+            <a:r>
+              <a:rPr lang="en-US" sz="1500" dirty="0">
                 <a:solidFill>
                   <a:srgbClr val="1E293B"/>
                 </a:solidFill>
@@ -2735,91 +2964,9 @@
                 <a:ea typeface="Calibri" pitchFamily="34" charset="-122"/>
                 <a:cs typeface="Calibri" pitchFamily="34" charset="-120"/>
               </a:rPr>
-              <a:t>More willing to face something frightening.</a:t>
-            </a:r>
-            <a:endParaRPr lang="en-US" sz="1700" dirty="0"/>
-          </a:p>
-        </p:txBody>
-      </p:sp>
-      <p:sp>
-        <p:nvSpPr>
-          <p:cNvPr id="11" name="Shape 9"/>
-          <p:cNvSpPr/>
-          <p:nvPr/>
-        </p:nvSpPr>
-        <p:spPr>
-          <a:xfrm>
-            <a:off x="365760" y="3291840"/>
-            <a:ext cx="8412480" cy="658368"/>
-          </a:xfrm>
-          <a:prstGeom prst="roundRect">
-            <a:avLst>
-              <a:gd name="adj" fmla="val 13889"/>
-            </a:avLst>
-          </a:prstGeom>
-          <a:solidFill>
-            <a:srgbClr val="FFFFFF"/>
-          </a:solidFill>
-          <a:ln/>
-          <a:effectLst>
-            <a:outerShdw sx="100000" sy="100000" kx="0" ky="0" algn="bl" rotWithShape="0" blurRad="101600" dist="38100" dir="2700000">
-              <a:srgbClr val="000000">
-                <a:alpha val="12000"/>
-              </a:srgbClr>
-            </a:outerShdw>
-          </a:effectLst>
-        </p:spPr>
-      </p:sp>
-      <p:sp>
-        <p:nvSpPr>
-          <p:cNvPr id="12" name="Text 10"/>
-          <p:cNvSpPr/>
-          <p:nvPr/>
-        </p:nvSpPr>
-        <p:spPr>
-          <a:xfrm>
-            <a:off x="594360" y="3419856"/>
-            <a:ext cx="7863840" cy="420624"/>
-          </a:xfrm>
-          <a:prstGeom prst="rect">
-            <a:avLst/>
-          </a:prstGeom>
-          <a:noFill/>
-          <a:ln/>
-        </p:spPr>
-        <p:txBody>
-          <a:bodyPr wrap="square" lIns="0" tIns="0" rIns="0" bIns="0" rtlCol="0" anchor="ctr"/>
-          <a:lstStyle/>
-          <a:p>
-            <a:pPr indent="0" marL="0">
-              <a:buNone/>
-            </a:pPr>
-            <a:r>
-              <a:rPr lang="en-US" sz="1700" b="1" dirty="0">
-                <a:solidFill>
-                  <a:srgbClr val="0E1C42"/>
-                </a:solidFill>
-                <a:latin typeface="Calibri" pitchFamily="34" charset="0"/>
-                <a:ea typeface="Calibri" pitchFamily="34" charset="-122"/>
-                <a:cs typeface="Calibri" pitchFamily="34" charset="-120"/>
-              </a:rPr>
-              <a:t>crown  </a:t>
-            </a:r>
-            <a:pPr indent="0" marL="0">
-              <a:buNone/>
-            </a:pPr>
-            <a:r>
-              <a:rPr lang="en-US" sz="1400" dirty="0">
-                <a:solidFill>
-                  <a:srgbClr val="1E293B"/>
-                </a:solidFill>
-                <a:latin typeface="Calibri" pitchFamily="34" charset="0"/>
-                <a:ea typeface="Calibri" pitchFamily="34" charset="-122"/>
-                <a:cs typeface="Calibri" pitchFamily="34" charset="-120"/>
-              </a:rPr>
-              <a:t>The circle of gold and jewels a king or queen wears.</a:t>
-            </a:r>
-            <a:endParaRPr lang="en-US" sz="1700" dirty="0"/>
+              <a:t>🌱  Practice: Match the Word to Its Meaning! Tap a word, then tap what it means.</a:t>
+            </a:r>
+            <a:endParaRPr lang="en-US" sz="1500" dirty="0"/>
           </a:p>
         </p:txBody>
       </p:sp>
@@ -2837,7 +2984,7 @@
     <p:bg>
       <p:bgPr>
         <a:solidFill>
-          <a:srgbClr val="F8FAFC"/>
+          <a:srgbClr val="FFFFFF"/>
         </a:solidFill>
       </p:bgPr>
     </p:bg>
@@ -2870,7 +3017,7 @@
             <a:avLst/>
           </a:prstGeom>
           <a:solidFill>
-            <a:srgbClr val="C7922C"/>
+            <a:srgbClr val="55C8E8"/>
           </a:solidFill>
           <a:ln/>
         </p:spPr>
@@ -2908,7 +3055,7 @@
                 <a:ea typeface="Calibri" pitchFamily="34" charset="-122"/>
                 <a:cs typeface="Calibri" pitchFamily="34" charset="-120"/>
               </a:rPr>
-              <a:t>✏️  Grammar</a:t>
+              <a:t>🔤  Vocabulary</a:t>
             </a:r>
             <a:endParaRPr lang="en-US" sz="2200" dirty="0"/>
           </a:p>
@@ -2922,7 +3069,7 @@
         </p:nvSpPr>
         <p:spPr>
           <a:xfrm>
-            <a:off x="365760" y="777240"/>
+            <a:off x="365760" y="804672"/>
             <a:ext cx="8229600" cy="237744"/>
           </a:xfrm>
           <a:prstGeom prst="rect">
@@ -2941,13 +3088,13 @@
             <a:r>
               <a:rPr lang="en-US" sz="1100" b="1" spc="100" kern="0" dirty="0">
                 <a:solidFill>
-                  <a:srgbClr val="C7922C"/>
-                </a:solidFill>
-                <a:latin typeface="Calibri" pitchFamily="34" charset="0"/>
-                <a:ea typeface="Calibri" pitchFamily="34" charset="-122"/>
-                <a:cs typeface="Calibri" pitchFamily="34" charset="-120"/>
-              </a:rPr>
-              <a:t>DIALOGUE: PUTTING IT TO WORK</a:t>
+                  <a:srgbClr val="55C8E8"/>
+                </a:solidFill>
+                <a:latin typeface="Calibri" pitchFamily="34" charset="0"/>
+                <a:ea typeface="Calibri" pitchFamily="34" charset="-122"/>
+                <a:cs typeface="Calibri" pitchFamily="34" charset="-120"/>
+              </a:rPr>
+              <a:t>VOCABULARY</a:t>
             </a:r>
             <a:endParaRPr lang="en-US" sz="1100" dirty="0"/>
           </a:p>
@@ -2961,7 +3108,7 @@
         </p:nvSpPr>
         <p:spPr>
           <a:xfrm>
-            <a:off x="365760" y="1078992"/>
+            <a:off x="365760" y="1097280"/>
             <a:ext cx="8412480" cy="658368"/>
           </a:xfrm>
           <a:prstGeom prst="roundRect">
@@ -2970,7 +3117,7 @@
             </a:avLst>
           </a:prstGeom>
           <a:solidFill>
-            <a:srgbClr val="FEF6E8"/>
+            <a:srgbClr val="E5F7FC"/>
           </a:solidFill>
           <a:ln/>
           <a:effectLst>
@@ -2991,23 +3138,37 @@
         <p:spPr>
           <a:xfrm>
             <a:off x="594360" y="1225296"/>
-            <a:ext cx="7863840" cy="402336"/>
-          </a:xfrm>
-          <a:prstGeom prst="rect">
-            <a:avLst/>
-          </a:prstGeom>
-          <a:noFill/>
-          <a:ln/>
-        </p:spPr>
-        <p:txBody>
-          <a:bodyPr wrap="square" lIns="0" tIns="0" rIns="0" bIns="0" rtlCol="0" anchor="ctr"/>
-          <a:lstStyle/>
-          <a:p>
-            <a:pPr indent="0" marL="0">
-              <a:buNone/>
-            </a:pPr>
-            <a:r>
-              <a:rPr lang="en-US" sz="1600" dirty="0">
+            <a:ext cx="7863840" cy="420624"/>
+          </a:xfrm>
+          <a:prstGeom prst="rect">
+            <a:avLst/>
+          </a:prstGeom>
+          <a:noFill/>
+          <a:ln/>
+        </p:spPr>
+        <p:txBody>
+          <a:bodyPr wrap="square" lIns="0" tIns="0" rIns="0" bIns="0" rtlCol="0" anchor="ctr"/>
+          <a:lstStyle/>
+          <a:p>
+            <a:pPr indent="0" marL="0">
+              <a:buNone/>
+            </a:pPr>
+            <a:r>
+              <a:rPr lang="en-US" sz="1700" b="1" dirty="0">
+                <a:solidFill>
+                  <a:srgbClr val="0E1C42"/>
+                </a:solidFill>
+                <a:latin typeface="Calibri" pitchFamily="34" charset="0"/>
+                <a:ea typeface="Calibri" pitchFamily="34" charset="-122"/>
+                <a:cs typeface="Calibri" pitchFamily="34" charset="-120"/>
+              </a:rPr>
+              <a:t>needle  </a:t>
+            </a:r>
+            <a:pPr indent="0" marL="0">
+              <a:buNone/>
+            </a:pPr>
+            <a:r>
+              <a:rPr lang="en-US" sz="1400" dirty="0">
                 <a:solidFill>
                   <a:srgbClr val="1E293B"/>
                 </a:solidFill>
@@ -3015,9 +3176,9 @@
                 <a:ea typeface="Calibri" pitchFamily="34" charset="-122"/>
                 <a:cs typeface="Calibri" pitchFamily="34" charset="-120"/>
               </a:rPr>
-              <a:t>“Where is she?” asked Despereaux.</a:t>
-            </a:r>
-            <a:endParaRPr lang="en-US" sz="1600" dirty="0"/>
+              <a:t>A thin, sharp metal tool for sewing — here, a mouse's sword.</a:t>
+            </a:r>
+            <a:endParaRPr lang="en-US" sz="1700" dirty="0"/>
           </a:p>
         </p:txBody>
       </p:sp>
@@ -3029,7 +3190,7 @@
         </p:nvSpPr>
         <p:spPr>
           <a:xfrm>
-            <a:off x="365760" y="1810512"/>
+            <a:off x="365760" y="1828800"/>
             <a:ext cx="8412480" cy="658368"/>
           </a:xfrm>
           <a:prstGeom prst="roundRect">
@@ -3059,23 +3220,37 @@
         <p:spPr>
           <a:xfrm>
             <a:off x="594360" y="1956816"/>
-            <a:ext cx="7863840" cy="402336"/>
-          </a:xfrm>
-          <a:prstGeom prst="rect">
-            <a:avLst/>
-          </a:prstGeom>
-          <a:noFill/>
-          <a:ln/>
-        </p:spPr>
-        <p:txBody>
-          <a:bodyPr wrap="square" lIns="0" tIns="0" rIns="0" bIns="0" rtlCol="0" anchor="ctr"/>
-          <a:lstStyle/>
-          <a:p>
-            <a:pPr indent="0" marL="0">
-              <a:buNone/>
-            </a:pPr>
-            <a:r>
-              <a:rPr lang="en-US" sz="1600" dirty="0">
+            <a:ext cx="7863840" cy="420624"/>
+          </a:xfrm>
+          <a:prstGeom prst="rect">
+            <a:avLst/>
+          </a:prstGeom>
+          <a:noFill/>
+          <a:ln/>
+        </p:spPr>
+        <p:txBody>
+          <a:bodyPr wrap="square" lIns="0" tIns="0" rIns="0" bIns="0" rtlCol="0" anchor="ctr"/>
+          <a:lstStyle/>
+          <a:p>
+            <a:pPr indent="0" marL="0">
+              <a:buNone/>
+            </a:pPr>
+            <a:r>
+              <a:rPr lang="en-US" sz="1700" b="1" dirty="0">
+                <a:solidFill>
+                  <a:srgbClr val="0E1C42"/>
+                </a:solidFill>
+                <a:latin typeface="Calibri" pitchFamily="34" charset="0"/>
+                <a:ea typeface="Calibri" pitchFamily="34" charset="-122"/>
+                <a:cs typeface="Calibri" pitchFamily="34" charset="-120"/>
+              </a:rPr>
+              <a:t>forgiven  </a:t>
+            </a:r>
+            <a:pPr indent="0" marL="0">
+              <a:buNone/>
+            </a:pPr>
+            <a:r>
+              <a:rPr lang="en-US" sz="1400" dirty="0">
                 <a:solidFill>
                   <a:srgbClr val="1E293B"/>
                 </a:solidFill>
@@ -3083,9 +3258,9 @@
                 <a:ea typeface="Calibri" pitchFamily="34" charset="-122"/>
                 <a:cs typeface="Calibri" pitchFamily="34" charset="-120"/>
               </a:rPr>
-              <a:t>“Gone,” said Cook quietly.</a:t>
-            </a:r>
-            <a:endParaRPr lang="en-US" sz="1600" dirty="0"/>
+              <a:t>No longer blamed for something you did wrong.</a:t>
+            </a:r>
+            <a:endParaRPr lang="en-US" sz="1700" dirty="0"/>
           </a:p>
         </p:txBody>
       </p:sp>
@@ -3097,7 +3272,7 @@
         </p:nvSpPr>
         <p:spPr>
           <a:xfrm>
-            <a:off x="365760" y="2542032"/>
+            <a:off x="365760" y="2560320"/>
             <a:ext cx="8412480" cy="658368"/>
           </a:xfrm>
           <a:prstGeom prst="roundRect">
@@ -3106,7 +3281,7 @@
             </a:avLst>
           </a:prstGeom>
           <a:solidFill>
-            <a:srgbClr val="FEF6E8"/>
+            <a:srgbClr val="E5F7FC"/>
           </a:solidFill>
           <a:ln/>
           <a:effectLst>
@@ -3127,23 +3302,37 @@
         <p:spPr>
           <a:xfrm>
             <a:off x="594360" y="2688336"/>
-            <a:ext cx="7863840" cy="402336"/>
-          </a:xfrm>
-          <a:prstGeom prst="rect">
-            <a:avLst/>
-          </a:prstGeom>
-          <a:noFill/>
-          <a:ln/>
-        </p:spPr>
-        <p:txBody>
-          <a:bodyPr wrap="square" lIns="0" tIns="0" rIns="0" bIns="0" rtlCol="0" anchor="ctr"/>
-          <a:lstStyle/>
-          <a:p>
-            <a:pPr indent="0" marL="0">
-              <a:buNone/>
-            </a:pPr>
-            <a:r>
-              <a:rPr lang="en-US" sz="1600" dirty="0">
+            <a:ext cx="7863840" cy="420624"/>
+          </a:xfrm>
+          <a:prstGeom prst="rect">
+            <a:avLst/>
+          </a:prstGeom>
+          <a:noFill/>
+          <a:ln/>
+        </p:spPr>
+        <p:txBody>
+          <a:bodyPr wrap="square" lIns="0" tIns="0" rIns="0" bIns="0" rtlCol="0" anchor="ctr"/>
+          <a:lstStyle/>
+          <a:p>
+            <a:pPr indent="0" marL="0">
+              <a:buNone/>
+            </a:pPr>
+            <a:r>
+              <a:rPr lang="en-US" sz="1700" b="1" dirty="0">
+                <a:solidFill>
+                  <a:srgbClr val="0E1C42"/>
+                </a:solidFill>
+                <a:latin typeface="Calibri" pitchFamily="34" charset="0"/>
+                <a:ea typeface="Calibri" pitchFamily="34" charset="-122"/>
+                <a:cs typeface="Calibri" pitchFamily="34" charset="-120"/>
+              </a:rPr>
+              <a:t>braver  </a:t>
+            </a:r>
+            <a:pPr indent="0" marL="0">
+              <a:buNone/>
+            </a:pPr>
+            <a:r>
+              <a:rPr lang="en-US" sz="1400" dirty="0">
                 <a:solidFill>
                   <a:srgbClr val="1E293B"/>
                 </a:solidFill>
@@ -3151,9 +3340,9 @@
                 <a:ea typeface="Calibri" pitchFamily="34" charset="-122"/>
                 <a:cs typeface="Calibri" pitchFamily="34" charset="-120"/>
               </a:rPr>
-              <a:t>The king shouted, “Find her!”</a:t>
-            </a:r>
-            <a:endParaRPr lang="en-US" sz="1600" dirty="0"/>
+              <a:t>More willing to face something frightening.</a:t>
+            </a:r>
+            <a:endParaRPr lang="en-US" sz="1700" dirty="0"/>
           </a:p>
         </p:txBody>
       </p:sp>
@@ -3165,7 +3354,7 @@
         </p:nvSpPr>
         <p:spPr>
           <a:xfrm>
-            <a:off x="365760" y="3273552"/>
+            <a:off x="365760" y="3291840"/>
             <a:ext cx="8412480" cy="658368"/>
           </a:xfrm>
           <a:prstGeom prst="roundRect">
@@ -3195,23 +3384,37 @@
         <p:spPr>
           <a:xfrm>
             <a:off x="594360" y="3419856"/>
-            <a:ext cx="7863840" cy="402336"/>
-          </a:xfrm>
-          <a:prstGeom prst="rect">
-            <a:avLst/>
-          </a:prstGeom>
-          <a:noFill/>
-          <a:ln/>
-        </p:spPr>
-        <p:txBody>
-          <a:bodyPr wrap="square" lIns="0" tIns="0" rIns="0" bIns="0" rtlCol="0" anchor="ctr"/>
-          <a:lstStyle/>
-          <a:p>
-            <a:pPr indent="0" marL="0">
-              <a:buNone/>
-            </a:pPr>
-            <a:r>
-              <a:rPr lang="en-US" sz="1600" dirty="0">
+            <a:ext cx="7863840" cy="420624"/>
+          </a:xfrm>
+          <a:prstGeom prst="rect">
+            <a:avLst/>
+          </a:prstGeom>
+          <a:noFill/>
+          <a:ln/>
+        </p:spPr>
+        <p:txBody>
+          <a:bodyPr wrap="square" lIns="0" tIns="0" rIns="0" bIns="0" rtlCol="0" anchor="ctr"/>
+          <a:lstStyle/>
+          <a:p>
+            <a:pPr indent="0" marL="0">
+              <a:buNone/>
+            </a:pPr>
+            <a:r>
+              <a:rPr lang="en-US" sz="1700" b="1" dirty="0">
+                <a:solidFill>
+                  <a:srgbClr val="0E1C42"/>
+                </a:solidFill>
+                <a:latin typeface="Calibri" pitchFamily="34" charset="0"/>
+                <a:ea typeface="Calibri" pitchFamily="34" charset="-122"/>
+                <a:cs typeface="Calibri" pitchFamily="34" charset="-120"/>
+              </a:rPr>
+              <a:t>crown  </a:t>
+            </a:r>
+            <a:pPr indent="0" marL="0">
+              <a:buNone/>
+            </a:pPr>
+            <a:r>
+              <a:rPr lang="en-US" sz="1400" dirty="0">
                 <a:solidFill>
                   <a:srgbClr val="1E293B"/>
                 </a:solidFill>
@@ -3219,48 +3422,9 @@
                 <a:ea typeface="Calibri" pitchFamily="34" charset="-122"/>
                 <a:cs typeface="Calibri" pitchFamily="34" charset="-120"/>
               </a:rPr>
-              <a:t>“I will go,” said the mouse.</a:t>
-            </a:r>
-            <a:endParaRPr lang="en-US" sz="1600" dirty="0"/>
-          </a:p>
-        </p:txBody>
-      </p:sp>
-      <p:sp>
-        <p:nvSpPr>
-          <p:cNvPr id="13" name="Text 11"/>
-          <p:cNvSpPr/>
-          <p:nvPr/>
-        </p:nvSpPr>
-        <p:spPr>
-          <a:xfrm>
-            <a:off x="365760" y="4050792"/>
-            <a:ext cx="8412480" cy="365760"/>
-          </a:xfrm>
-          <a:prstGeom prst="rect">
-            <a:avLst/>
-          </a:prstGeom>
-          <a:noFill/>
-          <a:ln/>
-        </p:spPr>
-        <p:txBody>
-          <a:bodyPr wrap="square" lIns="0" tIns="0" rIns="0" bIns="0" rtlCol="0" anchor="ctr"/>
-          <a:lstStyle/>
-          <a:p>
-            <a:pPr indent="0" marL="0">
-              <a:buNone/>
-            </a:pPr>
-            <a:r>
-              <a:rPr lang="en-US" sz="1500" i="1" dirty="0">
-                <a:solidFill>
-                  <a:srgbClr val="64748B"/>
-                </a:solidFill>
-                <a:latin typeface="Calibri" pitchFamily="34" charset="0"/>
-                <a:ea typeface="Calibri" pitchFamily="34" charset="-122"/>
-                <a:cs typeface="Calibri" pitchFamily="34" charset="-120"/>
-              </a:rPr>
-              <a:t>Your turn. Find the punctuation mark that ends the spoken words. Tap a word to check — green means you got it.</a:t>
-            </a:r>
-            <a:endParaRPr lang="en-US" sz="1500" dirty="0"/>
+              <a:t>The circle of gold and jewels a king or queen wears.</a:t>
+            </a:r>
+            <a:endParaRPr lang="en-US" sz="1700" dirty="0"/>
           </a:p>
         </p:txBody>
       </p:sp>
@@ -3349,7 +3513,7 @@
                 <a:ea typeface="Calibri" pitchFamily="34" charset="-122"/>
                 <a:cs typeface="Calibri" pitchFamily="34" charset="-120"/>
               </a:rPr>
-              <a:t>✏️  Grammar</a:t>
+              <a:t>✏️  Grammar — What do you notice?</a:t>
             </a:r>
             <a:endParaRPr lang="en-US" sz="2200" dirty="0"/>
           </a:p>
@@ -3363,7 +3527,7 @@
         </p:nvSpPr>
         <p:spPr>
           <a:xfrm>
-            <a:off x="365760" y="777240"/>
+            <a:off x="365760" y="749808"/>
             <a:ext cx="8229600" cy="237744"/>
           </a:xfrm>
           <a:prstGeom prst="rect">
@@ -3388,7 +3552,7 @@
                 <a:ea typeface="Calibri" pitchFamily="34" charset="-122"/>
                 <a:cs typeface="Calibri" pitchFamily="34" charset="-120"/>
               </a:rPr>
-              <a:t>DIALOGUE: PUTTING IT TO WORK</a:t>
+              <a:t>ADJECTIVES AND COMPARING</a:t>
             </a:r>
             <a:endParaRPr lang="en-US" sz="1100" dirty="0"/>
           </a:p>
@@ -3396,13 +3560,52 @@
       </p:sp>
       <p:sp>
         <p:nvSpPr>
-          <p:cNvPr id="5" name="Shape 3"/>
-          <p:cNvSpPr/>
-          <p:nvPr/>
-        </p:nvSpPr>
-        <p:spPr>
-          <a:xfrm>
-            <a:off x="365760" y="1078992"/>
+          <p:cNvPr id="5" name="Text 3"/>
+          <p:cNvSpPr/>
+          <p:nvPr/>
+        </p:nvSpPr>
+        <p:spPr>
+          <a:xfrm>
+            <a:off x="365760" y="987552"/>
+            <a:ext cx="8412480" cy="411480"/>
+          </a:xfrm>
+          <a:prstGeom prst="rect">
+            <a:avLst/>
+          </a:prstGeom>
+          <a:noFill/>
+          <a:ln/>
+        </p:spPr>
+        <p:txBody>
+          <a:bodyPr wrap="square" lIns="0" tIns="0" rIns="0" bIns="0" rtlCol="0" anchor="ctr"/>
+          <a:lstStyle/>
+          <a:p>
+            <a:pPr indent="0" marL="0">
+              <a:buNone/>
+            </a:pPr>
+            <a:r>
+              <a:rPr lang="en-US" sz="1500" i="1" dirty="0">
+                <a:solidFill>
+                  <a:srgbClr val="64748B"/>
+                </a:solidFill>
+                <a:latin typeface="Calibri" pitchFamily="34" charset="0"/>
+                <a:ea typeface="Calibri" pitchFamily="34" charset="-122"/>
+                <a:cs typeface="Calibri" pitchFamily="34" charset="-120"/>
+              </a:rPr>
+              <a:t>Yesterday you named the two groups. Today the describing words are hiding in sentences — and there is never just one.</a:t>
+            </a:r>
+            <a:endParaRPr lang="en-US" sz="1500" dirty="0"/>
+          </a:p>
+        </p:txBody>
+      </p:sp>
+      <p:sp>
+        <p:nvSpPr>
+          <p:cNvPr id="6" name="Shape 4"/>
+          <p:cNvSpPr/>
+          <p:nvPr/>
+        </p:nvSpPr>
+        <p:spPr>
+          <a:xfrm>
+            <a:off x="365760" y="1463040"/>
             <a:ext cx="8412480" cy="658368"/>
           </a:xfrm>
           <a:prstGeom prst="roundRect">
@@ -3413,7 +3616,12 @@
           <a:solidFill>
             <a:srgbClr val="FEF6E8"/>
           </a:solidFill>
-          <a:ln/>
+          <a:ln w="19050">
+            <a:solidFill>
+              <a:srgbClr val="C7922C"/>
+            </a:solidFill>
+            <a:prstDash val="solid"/>
+          </a:ln>
           <a:effectLst>
             <a:outerShdw sx="100000" sy="100000" kx="0" ky="0" algn="bl" rotWithShape="0" blurRad="101600" dist="38100" dir="2700000">
               <a:srgbClr val="000000">
@@ -3425,30 +3633,58 @@
       </p:sp>
       <p:sp>
         <p:nvSpPr>
-          <p:cNvPr id="6" name="Text 4"/>
-          <p:cNvSpPr/>
-          <p:nvPr/>
-        </p:nvSpPr>
-        <p:spPr>
-          <a:xfrm>
-            <a:off x="594360" y="1225296"/>
-            <a:ext cx="7863840" cy="402336"/>
-          </a:xfrm>
-          <a:prstGeom prst="rect">
-            <a:avLst/>
-          </a:prstGeom>
-          <a:noFill/>
-          <a:ln/>
-        </p:spPr>
-        <p:txBody>
-          <a:bodyPr wrap="square" lIns="0" tIns="0" rIns="0" bIns="0" rtlCol="0" anchor="ctr"/>
-          <a:lstStyle/>
-          <a:p>
-            <a:pPr indent="0" marL="0">
-              <a:buNone/>
-            </a:pPr>
-            <a:r>
-              <a:rPr lang="en-US" sz="1600" dirty="0">
+          <p:cNvPr id="7" name="Text 5"/>
+          <p:cNvSpPr/>
+          <p:nvPr/>
+        </p:nvSpPr>
+        <p:spPr>
+          <a:xfrm>
+            <a:off x="594360" y="1591056"/>
+            <a:ext cx="7955280" cy="402336"/>
+          </a:xfrm>
+          <a:prstGeom prst="rect">
+            <a:avLst/>
+          </a:prstGeom>
+          <a:noFill/>
+          <a:ln/>
+        </p:spPr>
+        <p:txBody>
+          <a:bodyPr wrap="square" lIns="0" tIns="0" rIns="0" bIns="0" rtlCol="0" anchor="ctr"/>
+          <a:lstStyle/>
+          <a:p>
+            <a:pPr indent="0" marL="0">
+              <a:buNone/>
+            </a:pPr>
+            <a:endParaRPr lang="en-US" sz="1700" dirty="0"/>
+          </a:p>
+        </p:txBody>
+      </p:sp>
+      <p:sp>
+        <p:nvSpPr>
+          <p:cNvPr id="8" name="Text 6"/>
+          <p:cNvSpPr/>
+          <p:nvPr/>
+        </p:nvSpPr>
+        <p:spPr>
+          <a:xfrm>
+            <a:off x="594360" y="1591056"/>
+            <a:ext cx="7955280" cy="402336"/>
+          </a:xfrm>
+          <a:prstGeom prst="rect">
+            <a:avLst/>
+          </a:prstGeom>
+          <a:noFill/>
+          <a:ln/>
+        </p:spPr>
+        <p:txBody>
+          <a:bodyPr wrap="square" lIns="0" tIns="0" rIns="0" bIns="0" rtlCol="0" anchor="ctr"/>
+          <a:lstStyle/>
+          <a:p>
+            <a:pPr indent="0" marL="0">
+              <a:buNone/>
+            </a:pPr>
+            <a:r>
+              <a:rPr lang="en-US" sz="1700" dirty="0">
                 <a:solidFill>
                   <a:srgbClr val="1E293B"/>
                 </a:solidFill>
@@ -3456,27 +3692,13 @@
                 <a:ea typeface="Calibri" pitchFamily="34" charset="-122"/>
                 <a:cs typeface="Calibri" pitchFamily="34" charset="-120"/>
               </a:rPr>
-              <a:t>“Where is </a:t>
-            </a:r>
-            <a:pPr indent="0" marL="0">
-              <a:buNone/>
-            </a:pPr>
-            <a:r>
-              <a:rPr lang="en-US" sz="1600" b="1" dirty="0">
-                <a:solidFill>
-                  <a:srgbClr val="34B76F"/>
-                </a:solidFill>
-                <a:latin typeface="Calibri" pitchFamily="34" charset="0"/>
-                <a:ea typeface="Calibri" pitchFamily="34" charset="-122"/>
-                <a:cs typeface="Calibri" pitchFamily="34" charset="-120"/>
-              </a:rPr>
-              <a:t>she?”</a:t>
-            </a:r>
-            <a:pPr indent="0" marL="0">
-              <a:buNone/>
-            </a:pPr>
-            <a:r>
-              <a:rPr lang="en-US" sz="1600" dirty="0">
+              <a:t>The</a:t>
+            </a:r>
+            <a:pPr indent="0" marL="0">
+              <a:buNone/>
+            </a:pPr>
+            <a:r>
+              <a:rPr lang="en-US" sz="1700" dirty="0">
                 <a:solidFill>
                   <a:srgbClr val="1E293B"/>
                 </a:solidFill>
@@ -3484,81 +3706,27 @@
                 <a:ea typeface="Calibri" pitchFamily="34" charset="-122"/>
                 <a:cs typeface="Calibri" pitchFamily="34" charset="-120"/>
               </a:rPr>
-              <a:t> asked Despereaux.</a:t>
-            </a:r>
-            <a:endParaRPr lang="en-US" sz="1600" dirty="0"/>
-          </a:p>
-        </p:txBody>
-      </p:sp>
-      <p:sp>
-        <p:nvSpPr>
-          <p:cNvPr id="7" name="Shape 5"/>
-          <p:cNvSpPr/>
-          <p:nvPr/>
-        </p:nvSpPr>
-        <p:spPr>
-          <a:xfrm>
-            <a:off x="365760" y="1810512"/>
-            <a:ext cx="8412480" cy="658368"/>
-          </a:xfrm>
-          <a:prstGeom prst="roundRect">
-            <a:avLst>
-              <a:gd name="adj" fmla="val 13889"/>
-            </a:avLst>
-          </a:prstGeom>
-          <a:solidFill>
-            <a:srgbClr val="FFFFFF"/>
-          </a:solidFill>
-          <a:ln/>
-          <a:effectLst>
-            <a:outerShdw sx="100000" sy="100000" kx="0" ky="0" algn="bl" rotWithShape="0" blurRad="101600" dist="38100" dir="2700000">
-              <a:srgbClr val="000000">
-                <a:alpha val="12000"/>
-              </a:srgbClr>
-            </a:outerShdw>
-          </a:effectLst>
-        </p:spPr>
-      </p:sp>
-      <p:sp>
-        <p:nvSpPr>
-          <p:cNvPr id="8" name="Text 6"/>
-          <p:cNvSpPr/>
-          <p:nvPr/>
-        </p:nvSpPr>
-        <p:spPr>
-          <a:xfrm>
-            <a:off x="594360" y="1956816"/>
-            <a:ext cx="7863840" cy="402336"/>
-          </a:xfrm>
-          <a:prstGeom prst="rect">
-            <a:avLst/>
-          </a:prstGeom>
-          <a:noFill/>
-          <a:ln/>
-        </p:spPr>
-        <p:txBody>
-          <a:bodyPr wrap="square" lIns="0" tIns="0" rIns="0" bIns="0" rtlCol="0" anchor="ctr"/>
-          <a:lstStyle/>
-          <a:p>
-            <a:pPr indent="0" marL="0">
-              <a:buNone/>
-            </a:pPr>
-            <a:r>
-              <a:rPr lang="en-US" sz="1600" b="1" dirty="0">
-                <a:solidFill>
-                  <a:srgbClr val="34B76F"/>
-                </a:solidFill>
-                <a:latin typeface="Calibri" pitchFamily="34" charset="0"/>
-                <a:ea typeface="Calibri" pitchFamily="34" charset="-122"/>
-                <a:cs typeface="Calibri" pitchFamily="34" charset="-120"/>
-              </a:rPr>
-              <a:t>“Gone,”</a:t>
-            </a:r>
-            <a:pPr indent="0" marL="0">
-              <a:buNone/>
-            </a:pPr>
-            <a:r>
-              <a:rPr lang="en-US" sz="1600" dirty="0">
+              <a:t> </a:t>
+            </a:r>
+            <a:pPr indent="0" marL="0">
+              <a:buNone/>
+            </a:pPr>
+            <a:r>
+              <a:rPr lang="en-US" sz="1700" b="1" u="sng" dirty="0">
+                <a:solidFill>
+                  <a:srgbClr val="C7922C"/>
+                </a:solidFill>
+                <a:latin typeface="Calibri" pitchFamily="34" charset="0"/>
+                <a:ea typeface="Calibri" pitchFamily="34" charset="-122"/>
+                <a:cs typeface="Calibri" pitchFamily="34" charset="-120"/>
+              </a:rPr>
+              <a:t>small</a:t>
+            </a:r>
+            <a:pPr indent="0" marL="0">
+              <a:buNone/>
+            </a:pPr>
+            <a:r>
+              <a:rPr lang="en-US" sz="1700" dirty="0">
                 <a:solidFill>
                   <a:srgbClr val="1E293B"/>
                 </a:solidFill>
@@ -3566,40 +3734,176 @@
                 <a:ea typeface="Calibri" pitchFamily="34" charset="-122"/>
                 <a:cs typeface="Calibri" pitchFamily="34" charset="-120"/>
               </a:rPr>
-              <a:t> said Cook quietly.</a:t>
-            </a:r>
-            <a:endParaRPr lang="en-US" sz="1600" dirty="0"/>
-          </a:p>
-        </p:txBody>
-      </p:sp>
-      <p:sp>
-        <p:nvSpPr>
-          <p:cNvPr id="9" name="Shape 7"/>
-          <p:cNvSpPr/>
-          <p:nvPr/>
-        </p:nvSpPr>
-        <p:spPr>
-          <a:xfrm>
-            <a:off x="365760" y="2542032"/>
-            <a:ext cx="8412480" cy="658368"/>
-          </a:xfrm>
-          <a:prstGeom prst="roundRect">
-            <a:avLst>
-              <a:gd name="adj" fmla="val 13889"/>
-            </a:avLst>
-          </a:prstGeom>
-          <a:solidFill>
-            <a:srgbClr val="FEF6E8"/>
-          </a:solidFill>
-          <a:ln/>
-          <a:effectLst>
-            <a:outerShdw sx="100000" sy="100000" kx="0" ky="0" algn="bl" rotWithShape="0" blurRad="101600" dist="38100" dir="2700000">
-              <a:srgbClr val="000000">
-                <a:alpha val="12000"/>
-              </a:srgbClr>
-            </a:outerShdw>
-          </a:effectLst>
-        </p:spPr>
+              <a:t> </a:t>
+            </a:r>
+            <a:pPr indent="0" marL="0">
+              <a:buNone/>
+            </a:pPr>
+            <a:r>
+              <a:rPr lang="en-US" sz="1700" dirty="0">
+                <a:solidFill>
+                  <a:srgbClr val="1E293B"/>
+                </a:solidFill>
+                <a:latin typeface="Calibri" pitchFamily="34" charset="0"/>
+                <a:ea typeface="Calibri" pitchFamily="34" charset="-122"/>
+                <a:cs typeface="Calibri" pitchFamily="34" charset="-120"/>
+              </a:rPr>
+              <a:t>mouse</a:t>
+            </a:r>
+            <a:pPr indent="0" marL="0">
+              <a:buNone/>
+            </a:pPr>
+            <a:r>
+              <a:rPr lang="en-US" sz="1700" dirty="0">
+                <a:solidFill>
+                  <a:srgbClr val="1E293B"/>
+                </a:solidFill>
+                <a:latin typeface="Calibri" pitchFamily="34" charset="0"/>
+                <a:ea typeface="Calibri" pitchFamily="34" charset="-122"/>
+                <a:cs typeface="Calibri" pitchFamily="34" charset="-120"/>
+              </a:rPr>
+              <a:t> </a:t>
+            </a:r>
+            <a:pPr indent="0" marL="0">
+              <a:buNone/>
+            </a:pPr>
+            <a:r>
+              <a:rPr lang="en-US" sz="1700" dirty="0">
+                <a:solidFill>
+                  <a:srgbClr val="1E293B"/>
+                </a:solidFill>
+                <a:latin typeface="Calibri" pitchFamily="34" charset="0"/>
+                <a:ea typeface="Calibri" pitchFamily="34" charset="-122"/>
+                <a:cs typeface="Calibri" pitchFamily="34" charset="-120"/>
+              </a:rPr>
+              <a:t>carried</a:t>
+            </a:r>
+            <a:pPr indent="0" marL="0">
+              <a:buNone/>
+            </a:pPr>
+            <a:r>
+              <a:rPr lang="en-US" sz="1700" dirty="0">
+                <a:solidFill>
+                  <a:srgbClr val="1E293B"/>
+                </a:solidFill>
+                <a:latin typeface="Calibri" pitchFamily="34" charset="0"/>
+                <a:ea typeface="Calibri" pitchFamily="34" charset="-122"/>
+                <a:cs typeface="Calibri" pitchFamily="34" charset="-120"/>
+              </a:rPr>
+              <a:t> </a:t>
+            </a:r>
+            <a:pPr indent="0" marL="0">
+              <a:buNone/>
+            </a:pPr>
+            <a:r>
+              <a:rPr lang="en-US" sz="1700" dirty="0">
+                <a:solidFill>
+                  <a:srgbClr val="1E293B"/>
+                </a:solidFill>
+                <a:latin typeface="Calibri" pitchFamily="34" charset="0"/>
+                <a:ea typeface="Calibri" pitchFamily="34" charset="-122"/>
+                <a:cs typeface="Calibri" pitchFamily="34" charset="-120"/>
+              </a:rPr>
+              <a:t>a</a:t>
+            </a:r>
+            <a:pPr indent="0" marL="0">
+              <a:buNone/>
+            </a:pPr>
+            <a:r>
+              <a:rPr lang="en-US" sz="1700" dirty="0">
+                <a:solidFill>
+                  <a:srgbClr val="1E293B"/>
+                </a:solidFill>
+                <a:latin typeface="Calibri" pitchFamily="34" charset="0"/>
+                <a:ea typeface="Calibri" pitchFamily="34" charset="-122"/>
+                <a:cs typeface="Calibri" pitchFamily="34" charset="-120"/>
+              </a:rPr>
+              <a:t> </a:t>
+            </a:r>
+            <a:pPr indent="0" marL="0">
+              <a:buNone/>
+            </a:pPr>
+            <a:r>
+              <a:rPr lang="en-US" sz="1700" b="1" u="sng" dirty="0">
+                <a:solidFill>
+                  <a:srgbClr val="C7922C"/>
+                </a:solidFill>
+                <a:latin typeface="Calibri" pitchFamily="34" charset="0"/>
+                <a:ea typeface="Calibri" pitchFamily="34" charset="-122"/>
+                <a:cs typeface="Calibri" pitchFamily="34" charset="-120"/>
+              </a:rPr>
+              <a:t>golden</a:t>
+            </a:r>
+            <a:pPr indent="0" marL="0">
+              <a:buNone/>
+            </a:pPr>
+            <a:r>
+              <a:rPr lang="en-US" sz="1700" dirty="0">
+                <a:solidFill>
+                  <a:srgbClr val="1E293B"/>
+                </a:solidFill>
+                <a:latin typeface="Calibri" pitchFamily="34" charset="0"/>
+                <a:ea typeface="Calibri" pitchFamily="34" charset="-122"/>
+                <a:cs typeface="Calibri" pitchFamily="34" charset="-120"/>
+              </a:rPr>
+              <a:t> </a:t>
+            </a:r>
+            <a:pPr indent="0" marL="0">
+              <a:buNone/>
+            </a:pPr>
+            <a:r>
+              <a:rPr lang="en-US" sz="1700" dirty="0">
+                <a:solidFill>
+                  <a:srgbClr val="1E293B"/>
+                </a:solidFill>
+                <a:latin typeface="Calibri" pitchFamily="34" charset="0"/>
+                <a:ea typeface="Calibri" pitchFamily="34" charset="-122"/>
+                <a:cs typeface="Calibri" pitchFamily="34" charset="-120"/>
+              </a:rPr>
+              <a:t>thread.</a:t>
+            </a:r>
+            <a:endParaRPr lang="en-US" sz="1700" dirty="0"/>
+          </a:p>
+        </p:txBody>
+      </p:sp>
+      <p:sp>
+        <p:nvSpPr>
+          <p:cNvPr id="9" name="Text 7"/>
+          <p:cNvSpPr/>
+          <p:nvPr/>
+        </p:nvSpPr>
+        <p:spPr>
+          <a:xfrm>
+            <a:off x="365760" y="2258568"/>
+            <a:ext cx="8229600" cy="237744"/>
+          </a:xfrm>
+          <a:prstGeom prst="rect">
+            <a:avLst/>
+          </a:prstGeom>
+          <a:noFill/>
+          <a:ln/>
+        </p:spPr>
+        <p:txBody>
+          <a:bodyPr wrap="square" lIns="0" tIns="0" rIns="0" bIns="0" rtlCol="0" anchor="ctr"/>
+          <a:lstStyle/>
+          <a:p>
+            <a:pPr indent="0" marL="0">
+              <a:buNone/>
+            </a:pPr>
+            <a:r>
+              <a:rPr lang="en-US" sz="1100" b="1" spc="100" kern="0" dirty="0">
+                <a:solidFill>
+                  <a:srgbClr val="C7922C"/>
+                </a:solidFill>
+                <a:latin typeface="Calibri" pitchFamily="34" charset="0"/>
+                <a:ea typeface="Calibri" pitchFamily="34" charset="-122"/>
+                <a:cs typeface="Calibri" pitchFamily="34" charset="-120"/>
+              </a:rPr>
+              <a:t>THINK IT THROUGH</a:t>
+            </a:r>
+            <a:endParaRPr lang="en-US" sz="1100" dirty="0"/>
+          </a:p>
+        </p:txBody>
       </p:sp>
       <p:sp>
         <p:nvSpPr>
@@ -3609,24 +3913,24 @@
         </p:nvSpPr>
         <p:spPr>
           <a:xfrm>
-            <a:off x="594360" y="2688336"/>
-            <a:ext cx="7863840" cy="402336"/>
-          </a:xfrm>
-          <a:prstGeom prst="rect">
-            <a:avLst/>
-          </a:prstGeom>
-          <a:noFill/>
-          <a:ln/>
-        </p:spPr>
-        <p:txBody>
-          <a:bodyPr wrap="square" lIns="0" tIns="0" rIns="0" bIns="0" rtlCol="0" anchor="ctr"/>
-          <a:lstStyle/>
-          <a:p>
-            <a:pPr indent="0" marL="0">
-              <a:buNone/>
-            </a:pPr>
-            <a:r>
-              <a:rPr lang="en-US" sz="1600" dirty="0">
+            <a:off x="365760" y="2505456"/>
+            <a:ext cx="8412480" cy="2313432"/>
+          </a:xfrm>
+          <a:prstGeom prst="rect">
+            <a:avLst/>
+          </a:prstGeom>
+          <a:noFill/>
+          <a:ln/>
+        </p:spPr>
+        <p:txBody>
+          <a:bodyPr wrap="square" lIns="0" tIns="0" rIns="0" bIns="0" rtlCol="0" anchor="t"/>
+          <a:lstStyle/>
+          <a:p>
+            <a:pPr indent="0" marL="0">
+              <a:buNone/>
+            </a:pPr>
+            <a:r>
+              <a:rPr lang="en-US" sz="1400" dirty="0">
                 <a:solidFill>
                   <a:srgbClr val="1E293B"/>
                 </a:solidFill>
@@ -3634,27 +3938,16 @@
                 <a:ea typeface="Calibri" pitchFamily="34" charset="-122"/>
                 <a:cs typeface="Calibri" pitchFamily="34" charset="-120"/>
               </a:rPr>
-              <a:t>The king </a:t>
-            </a:r>
-            <a:pPr indent="0" marL="0">
-              <a:buNone/>
-            </a:pPr>
-            <a:r>
-              <a:rPr lang="en-US" sz="1600" b="1" dirty="0">
-                <a:solidFill>
-                  <a:srgbClr val="34B76F"/>
-                </a:solidFill>
-                <a:latin typeface="Calibri" pitchFamily="34" charset="0"/>
-                <a:ea typeface="Calibri" pitchFamily="34" charset="-122"/>
-                <a:cs typeface="Calibri" pitchFamily="34" charset="-120"/>
-              </a:rPr>
-              <a:t>shouted,</a:t>
-            </a:r>
-            <a:pPr indent="0" marL="0">
-              <a:buNone/>
-            </a:pPr>
-            <a:r>
-              <a:rPr lang="en-US" sz="1600" dirty="0">
+              <a:t>1.  How many describing words are in the sentence above?</a:t>
+            </a:r>
+            <a:endParaRPr lang="en-US" sz="1400" dirty="0"/>
+          </a:p>
+          <a:p>
+            <a:pPr indent="0" marL="0">
+              <a:buNone/>
+            </a:pPr>
+            <a:r>
+              <a:rPr lang="en-US" sz="1400" dirty="0">
                 <a:solidFill>
                   <a:srgbClr val="1E293B"/>
                 </a:solidFill>
@@ -3662,144 +3955,9 @@
                 <a:ea typeface="Calibri" pitchFamily="34" charset="-122"/>
                 <a:cs typeface="Calibri" pitchFamily="34" charset="-120"/>
               </a:rPr>
-              <a:t> “Find her!”</a:t>
-            </a:r>
-            <a:endParaRPr lang="en-US" sz="1600" dirty="0"/>
-          </a:p>
-        </p:txBody>
-      </p:sp>
-      <p:sp>
-        <p:nvSpPr>
-          <p:cNvPr id="11" name="Shape 9"/>
-          <p:cNvSpPr/>
-          <p:nvPr/>
-        </p:nvSpPr>
-        <p:spPr>
-          <a:xfrm>
-            <a:off x="365760" y="3273552"/>
-            <a:ext cx="8412480" cy="658368"/>
-          </a:xfrm>
-          <a:prstGeom prst="roundRect">
-            <a:avLst>
-              <a:gd name="adj" fmla="val 13889"/>
-            </a:avLst>
-          </a:prstGeom>
-          <a:solidFill>
-            <a:srgbClr val="FFFFFF"/>
-          </a:solidFill>
-          <a:ln/>
-          <a:effectLst>
-            <a:outerShdw sx="100000" sy="100000" kx="0" ky="0" algn="bl" rotWithShape="0" blurRad="101600" dist="38100" dir="2700000">
-              <a:srgbClr val="000000">
-                <a:alpha val="12000"/>
-              </a:srgbClr>
-            </a:outerShdw>
-          </a:effectLst>
-        </p:spPr>
-      </p:sp>
-      <p:sp>
-        <p:nvSpPr>
-          <p:cNvPr id="12" name="Text 10"/>
-          <p:cNvSpPr/>
-          <p:nvPr/>
-        </p:nvSpPr>
-        <p:spPr>
-          <a:xfrm>
-            <a:off x="594360" y="3419856"/>
-            <a:ext cx="7863840" cy="402336"/>
-          </a:xfrm>
-          <a:prstGeom prst="rect">
-            <a:avLst/>
-          </a:prstGeom>
-          <a:noFill/>
-          <a:ln/>
-        </p:spPr>
-        <p:txBody>
-          <a:bodyPr wrap="square" lIns="0" tIns="0" rIns="0" bIns="0" rtlCol="0" anchor="ctr"/>
-          <a:lstStyle/>
-          <a:p>
-            <a:pPr indent="0" marL="0">
-              <a:buNone/>
-            </a:pPr>
-            <a:r>
-              <a:rPr lang="en-US" sz="1600" dirty="0">
-                <a:solidFill>
-                  <a:srgbClr val="1E293B"/>
-                </a:solidFill>
-                <a:latin typeface="Calibri" pitchFamily="34" charset="0"/>
-                <a:ea typeface="Calibri" pitchFamily="34" charset="-122"/>
-                <a:cs typeface="Calibri" pitchFamily="34" charset="-120"/>
-              </a:rPr>
-              <a:t>“I will </a:t>
-            </a:r>
-            <a:pPr indent="0" marL="0">
-              <a:buNone/>
-            </a:pPr>
-            <a:r>
-              <a:rPr lang="en-US" sz="1600" b="1" dirty="0">
-                <a:solidFill>
-                  <a:srgbClr val="34B76F"/>
-                </a:solidFill>
-                <a:latin typeface="Calibri" pitchFamily="34" charset="0"/>
-                <a:ea typeface="Calibri" pitchFamily="34" charset="-122"/>
-                <a:cs typeface="Calibri" pitchFamily="34" charset="-120"/>
-              </a:rPr>
-              <a:t>go,”</a:t>
-            </a:r>
-            <a:pPr indent="0" marL="0">
-              <a:buNone/>
-            </a:pPr>
-            <a:r>
-              <a:rPr lang="en-US" sz="1600" dirty="0">
-                <a:solidFill>
-                  <a:srgbClr val="1E293B"/>
-                </a:solidFill>
-                <a:latin typeface="Calibri" pitchFamily="34" charset="0"/>
-                <a:ea typeface="Calibri" pitchFamily="34" charset="-122"/>
-                <a:cs typeface="Calibri" pitchFamily="34" charset="-120"/>
-              </a:rPr>
-              <a:t> said the mouse.</a:t>
-            </a:r>
-            <a:endParaRPr lang="en-US" sz="1600" dirty="0"/>
-          </a:p>
-        </p:txBody>
-      </p:sp>
-      <p:sp>
-        <p:nvSpPr>
-          <p:cNvPr id="13" name="Text 11"/>
-          <p:cNvSpPr/>
-          <p:nvPr/>
-        </p:nvSpPr>
-        <p:spPr>
-          <a:xfrm>
-            <a:off x="365760" y="4050792"/>
-            <a:ext cx="8412480" cy="365760"/>
-          </a:xfrm>
-          <a:prstGeom prst="rect">
-            <a:avLst/>
-          </a:prstGeom>
-          <a:noFill/>
-          <a:ln/>
-        </p:spPr>
-        <p:txBody>
-          <a:bodyPr wrap="square" lIns="0" tIns="0" rIns="0" bIns="0" rtlCol="0" anchor="ctr"/>
-          <a:lstStyle/>
-          <a:p>
-            <a:pPr indent="0" marL="0">
-              <a:buNone/>
-            </a:pPr>
-            <a:r>
-              <a:rPr lang="en-US" sz="1500" b="1" dirty="0">
-                <a:solidFill>
-                  <a:srgbClr val="34B76F"/>
-                </a:solidFill>
-                <a:latin typeface="Calibri" pitchFamily="34" charset="0"/>
-                <a:ea typeface="Calibri" pitchFamily="34" charset="-122"/>
-                <a:cs typeface="Calibri" pitchFamily="34" charset="-120"/>
-              </a:rPr>
-              <a:t>✅  Answers revealed</a:t>
-            </a:r>
-            <a:endParaRPr lang="en-US" sz="1500" dirty="0"/>
+              <a:t>2.  What noun is each one sitting next to?</a:t>
+            </a:r>
+            <a:endParaRPr lang="en-US" sz="1400" dirty="0"/>
           </a:p>
         </p:txBody>
       </p:sp>
@@ -3850,7 +4008,7 @@
             <a:avLst/>
           </a:prstGeom>
           <a:solidFill>
-            <a:srgbClr val="0E1C42"/>
+            <a:srgbClr val="C7922C"/>
           </a:solidFill>
           <a:ln/>
         </p:spPr>
@@ -3888,7 +4046,7 @@
                 <a:ea typeface="Calibri" pitchFamily="34" charset="-122"/>
                 <a:cs typeface="Calibri" pitchFamily="34" charset="-120"/>
               </a:rPr>
-              <a:t>🔠  Spelling</a:t>
+              <a:t>✏️  Grammar — What do you notice?</a:t>
             </a:r>
             <a:endParaRPr lang="en-US" sz="2200" dirty="0"/>
           </a:p>
@@ -3902,7 +4060,7 @@
         </p:nvSpPr>
         <p:spPr>
           <a:xfrm>
-            <a:off x="365760" y="777240"/>
+            <a:off x="365760" y="749808"/>
             <a:ext cx="8229600" cy="237744"/>
           </a:xfrm>
           <a:prstGeom prst="rect">
@@ -3921,13 +4079,13 @@
             <a:r>
               <a:rPr lang="en-US" sz="1100" b="1" spc="100" kern="0" dirty="0">
                 <a:solidFill>
-                  <a:srgbClr val="0E1C42"/>
-                </a:solidFill>
-                <a:latin typeface="Calibri" pitchFamily="34" charset="0"/>
-                <a:ea typeface="Calibri" pitchFamily="34" charset="-122"/>
-                <a:cs typeface="Calibri" pitchFamily="34" charset="-120"/>
-              </a:rPr>
-              <a:t>SOFT C AND SOFT G</a:t>
+                  <a:srgbClr val="C7922C"/>
+                </a:solidFill>
+                <a:latin typeface="Calibri" pitchFamily="34" charset="0"/>
+                <a:ea typeface="Calibri" pitchFamily="34" charset="-122"/>
+                <a:cs typeface="Calibri" pitchFamily="34" charset="-120"/>
+              </a:rPr>
+              <a:t>ADJECTIVES AND COMPARING</a:t>
             </a:r>
             <a:endParaRPr lang="en-US" sz="1100" dirty="0"/>
           </a:p>
@@ -3941,24 +4099,24 @@
         </p:nvSpPr>
         <p:spPr>
           <a:xfrm>
-            <a:off x="365760" y="1078992"/>
-            <a:ext cx="8229600" cy="237744"/>
-          </a:xfrm>
-          <a:prstGeom prst="rect">
-            <a:avLst/>
-          </a:prstGeom>
-          <a:noFill/>
-          <a:ln/>
-        </p:spPr>
-        <p:txBody>
-          <a:bodyPr wrap="square" lIns="0" tIns="0" rIns="0" bIns="0" rtlCol="0" anchor="ctr"/>
-          <a:lstStyle/>
-          <a:p>
-            <a:pPr indent="0" marL="0">
-              <a:buNone/>
-            </a:pPr>
-            <a:r>
-              <a:rPr lang="en-US" sz="1100" b="1" spc="100" kern="0" dirty="0">
+            <a:off x="365760" y="987552"/>
+            <a:ext cx="8412480" cy="411480"/>
+          </a:xfrm>
+          <a:prstGeom prst="rect">
+            <a:avLst/>
+          </a:prstGeom>
+          <a:noFill/>
+          <a:ln/>
+        </p:spPr>
+        <p:txBody>
+          <a:bodyPr wrap="square" lIns="0" tIns="0" rIns="0" bIns="0" rtlCol="0" anchor="ctr"/>
+          <a:lstStyle/>
+          <a:p>
+            <a:pPr indent="0" marL="0">
+              <a:buNone/>
+            </a:pPr>
+            <a:r>
+              <a:rPr lang="en-US" sz="1500" i="1" dirty="0">
                 <a:solidFill>
                   <a:srgbClr val="64748B"/>
                 </a:solidFill>
@@ -3966,9 +4124,9 @@
                 <a:ea typeface="Calibri" pitchFamily="34" charset="-122"/>
                 <a:cs typeface="Calibri" pitchFamily="34" charset="-120"/>
               </a:rPr>
-              <a:t>WORD BANK</a:t>
-            </a:r>
-            <a:endParaRPr lang="en-US" sz="1100" dirty="0"/>
+              <a:t>Yesterday you named the two groups. Today the describing words are hiding in sentences — and there is never just one.</a:t>
+            </a:r>
+            <a:endParaRPr lang="en-US" sz="1500" dirty="0"/>
           </a:p>
         </p:txBody>
       </p:sp>
@@ -3980,20 +4138,20 @@
         </p:nvSpPr>
         <p:spPr>
           <a:xfrm>
-            <a:off x="365760" y="1353312"/>
-            <a:ext cx="8412480" cy="1005840"/>
+            <a:off x="365760" y="1463040"/>
+            <a:ext cx="8412480" cy="658368"/>
           </a:xfrm>
           <a:prstGeom prst="roundRect">
             <a:avLst>
-              <a:gd name="adj" fmla="val 9091"/>
+              <a:gd name="adj" fmla="val 13889"/>
             </a:avLst>
           </a:prstGeom>
           <a:solidFill>
-            <a:srgbClr val="FFFFFF"/>
+            <a:srgbClr val="FEF6E8"/>
           </a:solidFill>
           <a:ln w="19050">
             <a:solidFill>
-              <a:srgbClr val="0E1C42"/>
+              <a:srgbClr val="C7922C"/>
             </a:solidFill>
             <a:prstDash val="solid"/>
           </a:ln>
@@ -4014,8 +4172,36 @@
         </p:nvSpPr>
         <p:spPr>
           <a:xfrm>
-            <a:off x="594360" y="1481328"/>
-            <a:ext cx="7955280" cy="749808"/>
+            <a:off x="594360" y="1591056"/>
+            <a:ext cx="7955280" cy="402336"/>
+          </a:xfrm>
+          <a:prstGeom prst="rect">
+            <a:avLst/>
+          </a:prstGeom>
+          <a:noFill/>
+          <a:ln/>
+        </p:spPr>
+        <p:txBody>
+          <a:bodyPr wrap="square" lIns="0" tIns="0" rIns="0" bIns="0" rtlCol="0" anchor="ctr"/>
+          <a:lstStyle/>
+          <a:p>
+            <a:pPr indent="0" marL="0">
+              <a:buNone/>
+            </a:pPr>
+            <a:endParaRPr lang="en-US" sz="1700" dirty="0"/>
+          </a:p>
+        </p:txBody>
+      </p:sp>
+      <p:sp>
+        <p:nvSpPr>
+          <p:cNvPr id="8" name="Text 6"/>
+          <p:cNvSpPr/>
+          <p:nvPr/>
+        </p:nvSpPr>
+        <p:spPr>
+          <a:xfrm>
+            <a:off x="594360" y="1591056"/>
+            <a:ext cx="7955280" cy="402336"/>
           </a:xfrm>
           <a:prstGeom prst="rect">
             <a:avLst/>
@@ -4033,13 +4219,181 @@
             <a:r>
               <a:rPr lang="en-US" sz="1700" dirty="0">
                 <a:solidFill>
-                  <a:srgbClr val="0E1C42"/>
-                </a:solidFill>
-                <a:latin typeface="Calibri" pitchFamily="34" charset="0"/>
-                <a:ea typeface="Calibri" pitchFamily="34" charset="-122"/>
-                <a:cs typeface="Calibri" pitchFamily="34" charset="-120"/>
-              </a:rPr>
-              <a:t>mice   ·   prince   ·   magic   ·   gentle   ·   Cook   ·   candle   ·   gold   ·   garlic</a:t>
+                  <a:srgbClr val="1E293B"/>
+                </a:solidFill>
+                <a:latin typeface="Calibri" pitchFamily="34" charset="0"/>
+                <a:ea typeface="Calibri" pitchFamily="34" charset="-122"/>
+                <a:cs typeface="Calibri" pitchFamily="34" charset="-120"/>
+              </a:rPr>
+              <a:t>The</a:t>
+            </a:r>
+            <a:pPr indent="0" marL="0">
+              <a:buNone/>
+            </a:pPr>
+            <a:r>
+              <a:rPr lang="en-US" sz="1700" dirty="0">
+                <a:solidFill>
+                  <a:srgbClr val="1E293B"/>
+                </a:solidFill>
+                <a:latin typeface="Calibri" pitchFamily="34" charset="0"/>
+                <a:ea typeface="Calibri" pitchFamily="34" charset="-122"/>
+                <a:cs typeface="Calibri" pitchFamily="34" charset="-120"/>
+              </a:rPr>
+              <a:t> </a:t>
+            </a:r>
+            <a:pPr indent="0" marL="0">
+              <a:buNone/>
+            </a:pPr>
+            <a:r>
+              <a:rPr lang="en-US" sz="1700" b="1" u="sng" dirty="0">
+                <a:solidFill>
+                  <a:srgbClr val="C7922C"/>
+                </a:solidFill>
+                <a:latin typeface="Calibri" pitchFamily="34" charset="0"/>
+                <a:ea typeface="Calibri" pitchFamily="34" charset="-122"/>
+                <a:cs typeface="Calibri" pitchFamily="34" charset="-120"/>
+              </a:rPr>
+              <a:t>small</a:t>
+            </a:r>
+            <a:pPr indent="0" marL="0">
+              <a:buNone/>
+            </a:pPr>
+            <a:r>
+              <a:rPr lang="en-US" sz="1700" dirty="0">
+                <a:solidFill>
+                  <a:srgbClr val="1E293B"/>
+                </a:solidFill>
+                <a:latin typeface="Calibri" pitchFamily="34" charset="0"/>
+                <a:ea typeface="Calibri" pitchFamily="34" charset="-122"/>
+                <a:cs typeface="Calibri" pitchFamily="34" charset="-120"/>
+              </a:rPr>
+              <a:t> </a:t>
+            </a:r>
+            <a:pPr indent="0" marL="0">
+              <a:buNone/>
+            </a:pPr>
+            <a:r>
+              <a:rPr lang="en-US" sz="1700" dirty="0">
+                <a:solidFill>
+                  <a:srgbClr val="1E293B"/>
+                </a:solidFill>
+                <a:latin typeface="Calibri" pitchFamily="34" charset="0"/>
+                <a:ea typeface="Calibri" pitchFamily="34" charset="-122"/>
+                <a:cs typeface="Calibri" pitchFamily="34" charset="-120"/>
+              </a:rPr>
+              <a:t>mouse</a:t>
+            </a:r>
+            <a:pPr indent="0" marL="0">
+              <a:buNone/>
+            </a:pPr>
+            <a:r>
+              <a:rPr lang="en-US" sz="1700" dirty="0">
+                <a:solidFill>
+                  <a:srgbClr val="1E293B"/>
+                </a:solidFill>
+                <a:latin typeface="Calibri" pitchFamily="34" charset="0"/>
+                <a:ea typeface="Calibri" pitchFamily="34" charset="-122"/>
+                <a:cs typeface="Calibri" pitchFamily="34" charset="-120"/>
+              </a:rPr>
+              <a:t> </a:t>
+            </a:r>
+            <a:pPr indent="0" marL="0">
+              <a:buNone/>
+            </a:pPr>
+            <a:r>
+              <a:rPr lang="en-US" sz="1700" dirty="0">
+                <a:solidFill>
+                  <a:srgbClr val="1E293B"/>
+                </a:solidFill>
+                <a:latin typeface="Calibri" pitchFamily="34" charset="0"/>
+                <a:ea typeface="Calibri" pitchFamily="34" charset="-122"/>
+                <a:cs typeface="Calibri" pitchFamily="34" charset="-120"/>
+              </a:rPr>
+              <a:t>carried</a:t>
+            </a:r>
+            <a:pPr indent="0" marL="0">
+              <a:buNone/>
+            </a:pPr>
+            <a:r>
+              <a:rPr lang="en-US" sz="1700" dirty="0">
+                <a:solidFill>
+                  <a:srgbClr val="1E293B"/>
+                </a:solidFill>
+                <a:latin typeface="Calibri" pitchFamily="34" charset="0"/>
+                <a:ea typeface="Calibri" pitchFamily="34" charset="-122"/>
+                <a:cs typeface="Calibri" pitchFamily="34" charset="-120"/>
+              </a:rPr>
+              <a:t> </a:t>
+            </a:r>
+            <a:pPr indent="0" marL="0">
+              <a:buNone/>
+            </a:pPr>
+            <a:r>
+              <a:rPr lang="en-US" sz="1700" dirty="0">
+                <a:solidFill>
+                  <a:srgbClr val="1E293B"/>
+                </a:solidFill>
+                <a:latin typeface="Calibri" pitchFamily="34" charset="0"/>
+                <a:ea typeface="Calibri" pitchFamily="34" charset="-122"/>
+                <a:cs typeface="Calibri" pitchFamily="34" charset="-120"/>
+              </a:rPr>
+              <a:t>a</a:t>
+            </a:r>
+            <a:pPr indent="0" marL="0">
+              <a:buNone/>
+            </a:pPr>
+            <a:r>
+              <a:rPr lang="en-US" sz="1700" dirty="0">
+                <a:solidFill>
+                  <a:srgbClr val="1E293B"/>
+                </a:solidFill>
+                <a:latin typeface="Calibri" pitchFamily="34" charset="0"/>
+                <a:ea typeface="Calibri" pitchFamily="34" charset="-122"/>
+                <a:cs typeface="Calibri" pitchFamily="34" charset="-120"/>
+              </a:rPr>
+              <a:t> </a:t>
+            </a:r>
+            <a:pPr indent="0" marL="0">
+              <a:buNone/>
+            </a:pPr>
+            <a:r>
+              <a:rPr lang="en-US" sz="1700" b="1" u="sng" dirty="0">
+                <a:solidFill>
+                  <a:srgbClr val="C7922C"/>
+                </a:solidFill>
+                <a:latin typeface="Calibri" pitchFamily="34" charset="0"/>
+                <a:ea typeface="Calibri" pitchFamily="34" charset="-122"/>
+                <a:cs typeface="Calibri" pitchFamily="34" charset="-120"/>
+              </a:rPr>
+              <a:t>golden</a:t>
+            </a:r>
+            <a:pPr indent="0" marL="0">
+              <a:buNone/>
+            </a:pPr>
+            <a:r>
+              <a:rPr lang="en-US" sz="1700" dirty="0">
+                <a:solidFill>
+                  <a:srgbClr val="1E293B"/>
+                </a:solidFill>
+                <a:latin typeface="Calibri" pitchFamily="34" charset="0"/>
+                <a:ea typeface="Calibri" pitchFamily="34" charset="-122"/>
+                <a:cs typeface="Calibri" pitchFamily="34" charset="-120"/>
+              </a:rPr>
+              <a:t> </a:t>
+            </a:r>
+            <a:pPr indent="0" marL="0">
+              <a:buNone/>
+            </a:pPr>
+            <a:r>
+              <a:rPr lang="en-US" sz="1700" dirty="0">
+                <a:solidFill>
+                  <a:srgbClr val="1E293B"/>
+                </a:solidFill>
+                <a:latin typeface="Calibri" pitchFamily="34" charset="0"/>
+                <a:ea typeface="Calibri" pitchFamily="34" charset="-122"/>
+                <a:cs typeface="Calibri" pitchFamily="34" charset="-120"/>
+              </a:rPr>
+              <a:t>thread.</a:t>
             </a:r>
             <a:endParaRPr lang="en-US" sz="1700" dirty="0"/>
           </a:p>
@@ -4047,40 +4401,110 @@
       </p:sp>
       <p:sp>
         <p:nvSpPr>
-          <p:cNvPr id="8" name="Text 6"/>
-          <p:cNvSpPr/>
-          <p:nvPr/>
-        </p:nvSpPr>
-        <p:spPr>
-          <a:xfrm>
-            <a:off x="365760" y="2514600"/>
-            <a:ext cx="8412480" cy="457200"/>
-          </a:xfrm>
-          <a:prstGeom prst="rect">
-            <a:avLst/>
-          </a:prstGeom>
-          <a:noFill/>
-          <a:ln/>
-        </p:spPr>
-        <p:txBody>
-          <a:bodyPr wrap="square" lIns="0" tIns="0" rIns="0" bIns="0" rtlCol="0" anchor="ctr"/>
-          <a:lstStyle/>
-          <a:p>
-            <a:pPr indent="0" marL="0">
-              <a:buNone/>
-            </a:pPr>
-            <a:r>
-              <a:rPr lang="en-US" sz="1500" i="1" dirty="0">
-                <a:solidFill>
-                  <a:srgbClr val="64748B"/>
-                </a:solidFill>
-                <a:latin typeface="Calibri" pitchFamily="34" charset="0"/>
-                <a:ea typeface="Calibri" pitchFamily="34" charset="-122"/>
-                <a:cs typeface="Calibri" pitchFamily="34" charset="-120"/>
-              </a:rPr>
-              <a:t>Which column does each word belong in?  Columns: Soft (/s/ or /j/)  |  Hard (/k/ or /g/)</a:t>
-            </a:r>
-            <a:endParaRPr lang="en-US" sz="1500" dirty="0"/>
+          <p:cNvPr id="9" name="Shape 7"/>
+          <p:cNvSpPr/>
+          <p:nvPr/>
+        </p:nvSpPr>
+        <p:spPr>
+          <a:xfrm>
+            <a:off x="365760" y="2258568"/>
+            <a:ext cx="8412480" cy="2587752"/>
+          </a:xfrm>
+          <a:prstGeom prst="roundRect">
+            <a:avLst>
+              <a:gd name="adj" fmla="val 3534"/>
+            </a:avLst>
+          </a:prstGeom>
+          <a:solidFill>
+            <a:srgbClr val="E8F8EF"/>
+          </a:solidFill>
+          <a:ln/>
+          <a:effectLst>
+            <a:outerShdw sx="100000" sy="100000" kx="0" ky="0" algn="bl" rotWithShape="0" blurRad="101600" dist="38100" dir="2700000">
+              <a:srgbClr val="000000">
+                <a:alpha val="12000"/>
+              </a:srgbClr>
+            </a:outerShdw>
+          </a:effectLst>
+        </p:spPr>
+      </p:sp>
+      <p:sp>
+        <p:nvSpPr>
+          <p:cNvPr id="10" name="Text 8"/>
+          <p:cNvSpPr/>
+          <p:nvPr/>
+        </p:nvSpPr>
+        <p:spPr>
+          <a:xfrm>
+            <a:off x="566928" y="2322576"/>
+            <a:ext cx="8229600" cy="237744"/>
+          </a:xfrm>
+          <a:prstGeom prst="rect">
+            <a:avLst/>
+          </a:prstGeom>
+          <a:noFill/>
+          <a:ln/>
+        </p:spPr>
+        <p:txBody>
+          <a:bodyPr wrap="square" lIns="0" tIns="0" rIns="0" bIns="0" rtlCol="0" anchor="ctr"/>
+          <a:lstStyle/>
+          <a:p>
+            <a:pPr indent="0" marL="0">
+              <a:buNone/>
+            </a:pPr>
+            <a:r>
+              <a:rPr lang="en-US" sz="1100" b="1" spc="100" kern="0" dirty="0">
+                <a:solidFill>
+                  <a:srgbClr val="34B76F"/>
+                </a:solidFill>
+                <a:latin typeface="Calibri" pitchFamily="34" charset="0"/>
+                <a:ea typeface="Calibri" pitchFamily="34" charset="-122"/>
+                <a:cs typeface="Calibri" pitchFamily="34" charset="-120"/>
+              </a:rPr>
+              <a:t>✅  THE PATTERN</a:t>
+            </a:r>
+            <a:endParaRPr lang="en-US" sz="1100" dirty="0"/>
+          </a:p>
+        </p:txBody>
+      </p:sp>
+      <p:sp>
+        <p:nvSpPr>
+          <p:cNvPr id="11" name="Text 9"/>
+          <p:cNvSpPr/>
+          <p:nvPr/>
+        </p:nvSpPr>
+        <p:spPr>
+          <a:xfrm>
+            <a:off x="566928" y="2578608"/>
+            <a:ext cx="8010144" cy="2130552"/>
+          </a:xfrm>
+          <a:prstGeom prst="rect">
+            <a:avLst/>
+          </a:prstGeom>
+          <a:noFill/>
+          <a:ln/>
+        </p:spPr>
+        <p:txBody>
+          <a:bodyPr wrap="square" lIns="0" tIns="0" rIns="0" bIns="0" rtlCol="0" anchor="t">
+            <a:normAutofit/>
+          </a:bodyPr>
+          <a:lstStyle/>
+          <a:p>
+            <a:pPr indent="0" marL="0">
+              <a:buNone/>
+            </a:pPr>
+            <a:r>
+              <a:rPr lang="en-US" sz="1300" dirty="0">
+                <a:solidFill>
+                  <a:srgbClr val="1E293B"/>
+                </a:solidFill>
+                <a:latin typeface="Calibri" pitchFamily="34" charset="0"/>
+                <a:ea typeface="Calibri" pitchFamily="34" charset="-122"/>
+                <a:cs typeface="Calibri" pitchFamily="34" charset="-120"/>
+              </a:rPr>
+              <a:t>Two adjectives: small describes the mouse, golden describes the thread. A sentence can carry as many adjectives as the writer needs.</a:t>
+            </a:r>
+            <a:endParaRPr lang="en-US" sz="1300" dirty="0"/>
           </a:p>
         </p:txBody>
       </p:sp>
@@ -4131,7 +4555,7 @@
             <a:avLst/>
           </a:prstGeom>
           <a:solidFill>
-            <a:srgbClr val="0E1C42"/>
+            <a:srgbClr val="C7922C"/>
           </a:solidFill>
           <a:ln/>
         </p:spPr>
@@ -4169,7 +4593,7 @@
                 <a:ea typeface="Calibri" pitchFamily="34" charset="-122"/>
                 <a:cs typeface="Calibri" pitchFamily="34" charset="-120"/>
               </a:rPr>
-              <a:t>🔠  Spelling</a:t>
+              <a:t>✏️  Grammar</a:t>
             </a:r>
             <a:endParaRPr lang="en-US" sz="2200" dirty="0"/>
           </a:p>
@@ -4202,13 +4626,13 @@
             <a:r>
               <a:rPr lang="en-US" sz="1100" b="1" spc="100" kern="0" dirty="0">
                 <a:solidFill>
-                  <a:srgbClr val="0E1C42"/>
-                </a:solidFill>
-                <a:latin typeface="Calibri" pitchFamily="34" charset="0"/>
-                <a:ea typeface="Calibri" pitchFamily="34" charset="-122"/>
-                <a:cs typeface="Calibri" pitchFamily="34" charset="-120"/>
-              </a:rPr>
-              <a:t>SOFT C AND SOFT G</a:t>
+                  <a:srgbClr val="C7922C"/>
+                </a:solidFill>
+                <a:latin typeface="Calibri" pitchFamily="34" charset="0"/>
+                <a:ea typeface="Calibri" pitchFamily="34" charset="-122"/>
+                <a:cs typeface="Calibri" pitchFamily="34" charset="-120"/>
+              </a:rPr>
+              <a:t>ADJECTIVES AND COMPARING</a:t>
             </a:r>
             <a:endParaRPr lang="en-US" sz="1100" dirty="0"/>
           </a:p>
@@ -4222,77 +4646,16 @@
         </p:nvSpPr>
         <p:spPr>
           <a:xfrm>
-            <a:off x="411480" y="1078992"/>
-            <a:ext cx="4114800" cy="457200"/>
+            <a:off x="365760" y="1078992"/>
+            <a:ext cx="8412480" cy="658368"/>
           </a:xfrm>
           <a:prstGeom prst="roundRect">
             <a:avLst>
-              <a:gd name="adj" fmla="val 16000"/>
+              <a:gd name="adj" fmla="val 13889"/>
             </a:avLst>
           </a:prstGeom>
           <a:solidFill>
-            <a:srgbClr val="0E1C42"/>
-          </a:solidFill>
-          <a:ln/>
-        </p:spPr>
-      </p:sp>
-      <p:sp>
-        <p:nvSpPr>
-          <p:cNvPr id="6" name="Text 4"/>
-          <p:cNvSpPr/>
-          <p:nvPr/>
-        </p:nvSpPr>
-        <p:spPr>
-          <a:xfrm>
-            <a:off x="457200" y="1133856"/>
-            <a:ext cx="4023360" cy="347472"/>
-          </a:xfrm>
-          <a:prstGeom prst="rect">
-            <a:avLst/>
-          </a:prstGeom>
-          <a:noFill/>
-          <a:ln/>
-        </p:spPr>
-        <p:txBody>
-          <a:bodyPr wrap="square" lIns="0" tIns="0" rIns="0" bIns="0" rtlCol="0" anchor="ctr"/>
-          <a:lstStyle/>
-          <a:p>
-            <a:pPr algn="ctr" indent="0" marL="0">
-              <a:buNone/>
-            </a:pPr>
-            <a:r>
-              <a:rPr lang="en-US" sz="1300" b="1" dirty="0">
-                <a:solidFill>
-                  <a:srgbClr val="FFFFFF"/>
-                </a:solidFill>
-                <a:latin typeface="Calibri" pitchFamily="34" charset="0"/>
-                <a:ea typeface="Calibri" pitchFamily="34" charset="-122"/>
-                <a:cs typeface="Calibri" pitchFamily="34" charset="-120"/>
-              </a:rPr>
-              <a:t>Soft (/s/ or /j/)</a:t>
-            </a:r>
-            <a:endParaRPr lang="en-US" sz="1300" dirty="0"/>
-          </a:p>
-        </p:txBody>
-      </p:sp>
-      <p:sp>
-        <p:nvSpPr>
-          <p:cNvPr id="7" name="Shape 5"/>
-          <p:cNvSpPr/>
-          <p:nvPr/>
-        </p:nvSpPr>
-        <p:spPr>
-          <a:xfrm>
-            <a:off x="411480" y="1591056"/>
-            <a:ext cx="4114800" cy="2103120"/>
-          </a:xfrm>
-          <a:prstGeom prst="roundRect">
-            <a:avLst>
-              <a:gd name="adj" fmla="val 4348"/>
-            </a:avLst>
-          </a:prstGeom>
-          <a:solidFill>
-            <a:srgbClr val="FFFFFF"/>
+            <a:srgbClr val="FEF6E8"/>
           </a:solidFill>
           <a:ln/>
           <a:effectLst>
@@ -4306,30 +4669,30 @@
       </p:sp>
       <p:sp>
         <p:nvSpPr>
-          <p:cNvPr id="8" name="Text 6"/>
-          <p:cNvSpPr/>
-          <p:nvPr/>
-        </p:nvSpPr>
-        <p:spPr>
-          <a:xfrm>
-            <a:off x="502920" y="1700784"/>
-            <a:ext cx="3931920" cy="1883664"/>
-          </a:xfrm>
-          <a:prstGeom prst="rect">
-            <a:avLst/>
-          </a:prstGeom>
-          <a:noFill/>
-          <a:ln/>
-        </p:spPr>
-        <p:txBody>
-          <a:bodyPr wrap="square" lIns="0" tIns="0" rIns="0" bIns="0" rtlCol="0" anchor="ctr"/>
-          <a:lstStyle/>
-          <a:p>
-            <a:pPr algn="ctr" indent="0" marL="0">
-              <a:buNone/>
-            </a:pPr>
-            <a:r>
-              <a:rPr lang="en-US" sz="1400" dirty="0">
+          <p:cNvPr id="6" name="Text 4"/>
+          <p:cNvSpPr/>
+          <p:nvPr/>
+        </p:nvSpPr>
+        <p:spPr>
+          <a:xfrm>
+            <a:off x="594360" y="1225296"/>
+            <a:ext cx="7863840" cy="402336"/>
+          </a:xfrm>
+          <a:prstGeom prst="rect">
+            <a:avLst/>
+          </a:prstGeom>
+          <a:noFill/>
+          <a:ln/>
+        </p:spPr>
+        <p:txBody>
+          <a:bodyPr wrap="square" lIns="0" tIns="0" rIns="0" bIns="0" rtlCol="0" anchor="ctr"/>
+          <a:lstStyle/>
+          <a:p>
+            <a:pPr indent="0" marL="0">
+              <a:buNone/>
+            </a:pPr>
+            <a:r>
+              <a:rPr lang="en-US" sz="1600" dirty="0">
                 <a:solidFill>
                   <a:srgbClr val="1E293B"/>
                 </a:solidFill>
@@ -4337,138 +4700,26 @@
                 <a:ea typeface="Calibri" pitchFamily="34" charset="-122"/>
                 <a:cs typeface="Calibri" pitchFamily="34" charset="-120"/>
               </a:rPr>
-              <a:t>mice</a:t>
-            </a:r>
-            <a:endParaRPr lang="en-US" sz="1400" dirty="0"/>
-          </a:p>
-          <a:p>
-            <a:pPr algn="ctr" indent="0" marL="0">
-              <a:buNone/>
-            </a:pPr>
-            <a:r>
-              <a:rPr lang="en-US" sz="1400" dirty="0">
-                <a:solidFill>
-                  <a:srgbClr val="1E293B"/>
-                </a:solidFill>
-                <a:latin typeface="Calibri" pitchFamily="34" charset="0"/>
-                <a:ea typeface="Calibri" pitchFamily="34" charset="-122"/>
-                <a:cs typeface="Calibri" pitchFamily="34" charset="-120"/>
-              </a:rPr>
-              <a:t>prince</a:t>
-            </a:r>
-            <a:endParaRPr lang="en-US" sz="1400" dirty="0"/>
-          </a:p>
-          <a:p>
-            <a:pPr algn="ctr" indent="0" marL="0">
-              <a:buNone/>
-            </a:pPr>
-            <a:r>
-              <a:rPr lang="en-US" sz="1400" dirty="0">
-                <a:solidFill>
-                  <a:srgbClr val="1E293B"/>
-                </a:solidFill>
-                <a:latin typeface="Calibri" pitchFamily="34" charset="0"/>
-                <a:ea typeface="Calibri" pitchFamily="34" charset="-122"/>
-                <a:cs typeface="Calibri" pitchFamily="34" charset="-120"/>
-              </a:rPr>
-              <a:t>magic</a:t>
-            </a:r>
-            <a:endParaRPr lang="en-US" sz="1400" dirty="0"/>
-          </a:p>
-          <a:p>
-            <a:pPr algn="ctr" indent="0" marL="0">
-              <a:buNone/>
-            </a:pPr>
-            <a:r>
-              <a:rPr lang="en-US" sz="1400" dirty="0">
-                <a:solidFill>
-                  <a:srgbClr val="1E293B"/>
-                </a:solidFill>
-                <a:latin typeface="Calibri" pitchFamily="34" charset="0"/>
-                <a:ea typeface="Calibri" pitchFamily="34" charset="-122"/>
-                <a:cs typeface="Calibri" pitchFamily="34" charset="-120"/>
-              </a:rPr>
-              <a:t>gentle</a:t>
-            </a:r>
-            <a:endParaRPr lang="en-US" sz="1400" dirty="0"/>
-          </a:p>
-        </p:txBody>
-      </p:sp>
-      <p:sp>
-        <p:nvSpPr>
-          <p:cNvPr id="9" name="Shape 7"/>
-          <p:cNvSpPr/>
-          <p:nvPr/>
-        </p:nvSpPr>
-        <p:spPr>
-          <a:xfrm>
-            <a:off x="4617720" y="1078992"/>
-            <a:ext cx="4114800" cy="457200"/>
+              <a:t>The small mouse carried a golden thread.</a:t>
+            </a:r>
+            <a:endParaRPr lang="en-US" sz="1600" dirty="0"/>
+          </a:p>
+        </p:txBody>
+      </p:sp>
+      <p:sp>
+        <p:nvSpPr>
+          <p:cNvPr id="7" name="Shape 5"/>
+          <p:cNvSpPr/>
+          <p:nvPr/>
+        </p:nvSpPr>
+        <p:spPr>
+          <a:xfrm>
+            <a:off x="365760" y="1810512"/>
+            <a:ext cx="8412480" cy="658368"/>
           </a:xfrm>
           <a:prstGeom prst="roundRect">
             <a:avLst>
-              <a:gd name="adj" fmla="val 16000"/>
-            </a:avLst>
-          </a:prstGeom>
-          <a:solidFill>
-            <a:srgbClr val="0E1C42"/>
-          </a:solidFill>
-          <a:ln/>
-        </p:spPr>
-      </p:sp>
-      <p:sp>
-        <p:nvSpPr>
-          <p:cNvPr id="10" name="Text 8"/>
-          <p:cNvSpPr/>
-          <p:nvPr/>
-        </p:nvSpPr>
-        <p:spPr>
-          <a:xfrm>
-            <a:off x="4663440" y="1133856"/>
-            <a:ext cx="4023360" cy="347472"/>
-          </a:xfrm>
-          <a:prstGeom prst="rect">
-            <a:avLst/>
-          </a:prstGeom>
-          <a:noFill/>
-          <a:ln/>
-        </p:spPr>
-        <p:txBody>
-          <a:bodyPr wrap="square" lIns="0" tIns="0" rIns="0" bIns="0" rtlCol="0" anchor="ctr"/>
-          <a:lstStyle/>
-          <a:p>
-            <a:pPr algn="ctr" indent="0" marL="0">
-              <a:buNone/>
-            </a:pPr>
-            <a:r>
-              <a:rPr lang="en-US" sz="1300" b="1" dirty="0">
-                <a:solidFill>
-                  <a:srgbClr val="FFFFFF"/>
-                </a:solidFill>
-                <a:latin typeface="Calibri" pitchFamily="34" charset="0"/>
-                <a:ea typeface="Calibri" pitchFamily="34" charset="-122"/>
-                <a:cs typeface="Calibri" pitchFamily="34" charset="-120"/>
-              </a:rPr>
-              <a:t>Hard (/k/ or /g/)</a:t>
-            </a:r>
-            <a:endParaRPr lang="en-US" sz="1300" dirty="0"/>
-          </a:p>
-        </p:txBody>
-      </p:sp>
-      <p:sp>
-        <p:nvSpPr>
-          <p:cNvPr id="11" name="Shape 9"/>
-          <p:cNvSpPr/>
-          <p:nvPr/>
-        </p:nvSpPr>
-        <p:spPr>
-          <a:xfrm>
-            <a:off x="4617720" y="1591056"/>
-            <a:ext cx="4114800" cy="2103120"/>
-          </a:xfrm>
-          <a:prstGeom prst="roundRect">
-            <a:avLst>
-              <a:gd name="adj" fmla="val 4348"/>
+              <a:gd name="adj" fmla="val 13889"/>
             </a:avLst>
           </a:prstGeom>
           <a:solidFill>
@@ -4486,30 +4737,166 @@
       </p:sp>
       <p:sp>
         <p:nvSpPr>
+          <p:cNvPr id="8" name="Text 6"/>
+          <p:cNvSpPr/>
+          <p:nvPr/>
+        </p:nvSpPr>
+        <p:spPr>
+          <a:xfrm>
+            <a:off x="594360" y="1956816"/>
+            <a:ext cx="7863840" cy="402336"/>
+          </a:xfrm>
+          <a:prstGeom prst="rect">
+            <a:avLst/>
+          </a:prstGeom>
+          <a:noFill/>
+          <a:ln/>
+        </p:spPr>
+        <p:txBody>
+          <a:bodyPr wrap="square" lIns="0" tIns="0" rIns="0" bIns="0" rtlCol="0" anchor="ctr"/>
+          <a:lstStyle/>
+          <a:p>
+            <a:pPr indent="0" marL="0">
+              <a:buNone/>
+            </a:pPr>
+            <a:r>
+              <a:rPr lang="en-US" sz="1600" dirty="0">
+                <a:solidFill>
+                  <a:srgbClr val="1E293B"/>
+                </a:solidFill>
+                <a:latin typeface="Calibri" pitchFamily="34" charset="0"/>
+                <a:ea typeface="Calibri" pitchFamily="34" charset="-122"/>
+                <a:cs typeface="Calibri" pitchFamily="34" charset="-120"/>
+              </a:rPr>
+              <a:t>Despereaux heard the sweet, low music.</a:t>
+            </a:r>
+            <a:endParaRPr lang="en-US" sz="1600" dirty="0"/>
+          </a:p>
+        </p:txBody>
+      </p:sp>
+      <p:sp>
+        <p:nvSpPr>
+          <p:cNvPr id="9" name="Shape 7"/>
+          <p:cNvSpPr/>
+          <p:nvPr/>
+        </p:nvSpPr>
+        <p:spPr>
+          <a:xfrm>
+            <a:off x="365760" y="2542032"/>
+            <a:ext cx="8412480" cy="658368"/>
+          </a:xfrm>
+          <a:prstGeom prst="roundRect">
+            <a:avLst>
+              <a:gd name="adj" fmla="val 13889"/>
+            </a:avLst>
+          </a:prstGeom>
+          <a:solidFill>
+            <a:srgbClr val="FEF6E8"/>
+          </a:solidFill>
+          <a:ln/>
+          <a:effectLst>
+            <a:outerShdw sx="100000" sy="100000" kx="0" ky="0" algn="bl" rotWithShape="0" blurRad="101600" dist="38100" dir="2700000">
+              <a:srgbClr val="000000">
+                <a:alpha val="12000"/>
+              </a:srgbClr>
+            </a:outerShdw>
+          </a:effectLst>
+        </p:spPr>
+      </p:sp>
+      <p:sp>
+        <p:nvSpPr>
+          <p:cNvPr id="10" name="Text 8"/>
+          <p:cNvSpPr/>
+          <p:nvPr/>
+        </p:nvSpPr>
+        <p:spPr>
+          <a:xfrm>
+            <a:off x="594360" y="2688336"/>
+            <a:ext cx="7863840" cy="402336"/>
+          </a:xfrm>
+          <a:prstGeom prst="rect">
+            <a:avLst/>
+          </a:prstGeom>
+          <a:noFill/>
+          <a:ln/>
+        </p:spPr>
+        <p:txBody>
+          <a:bodyPr wrap="square" lIns="0" tIns="0" rIns="0" bIns="0" rtlCol="0" anchor="ctr"/>
+          <a:lstStyle/>
+          <a:p>
+            <a:pPr indent="0" marL="0">
+              <a:buNone/>
+            </a:pPr>
+            <a:r>
+              <a:rPr lang="en-US" sz="1600" dirty="0">
+                <a:solidFill>
+                  <a:srgbClr val="1E293B"/>
+                </a:solidFill>
+                <a:latin typeface="Calibri" pitchFamily="34" charset="0"/>
+                <a:ea typeface="Calibri" pitchFamily="34" charset="-122"/>
+                <a:cs typeface="Calibri" pitchFamily="34" charset="-120"/>
+              </a:rPr>
+              <a:t>A dark tunnel led to the deep dungeon.</a:t>
+            </a:r>
+            <a:endParaRPr lang="en-US" sz="1600" dirty="0"/>
+          </a:p>
+        </p:txBody>
+      </p:sp>
+      <p:sp>
+        <p:nvSpPr>
+          <p:cNvPr id="11" name="Shape 9"/>
+          <p:cNvSpPr/>
+          <p:nvPr/>
+        </p:nvSpPr>
+        <p:spPr>
+          <a:xfrm>
+            <a:off x="365760" y="3273552"/>
+            <a:ext cx="8412480" cy="658368"/>
+          </a:xfrm>
+          <a:prstGeom prst="roundRect">
+            <a:avLst>
+              <a:gd name="adj" fmla="val 13889"/>
+            </a:avLst>
+          </a:prstGeom>
+          <a:solidFill>
+            <a:srgbClr val="FFFFFF"/>
+          </a:solidFill>
+          <a:ln/>
+          <a:effectLst>
+            <a:outerShdw sx="100000" sy="100000" kx="0" ky="0" algn="bl" rotWithShape="0" blurRad="101600" dist="38100" dir="2700000">
+              <a:srgbClr val="000000">
+                <a:alpha val="12000"/>
+              </a:srgbClr>
+            </a:outerShdw>
+          </a:effectLst>
+        </p:spPr>
+      </p:sp>
+      <p:sp>
+        <p:nvSpPr>
           <p:cNvPr id="12" name="Text 10"/>
           <p:cNvSpPr/>
           <p:nvPr/>
         </p:nvSpPr>
         <p:spPr>
           <a:xfrm>
-            <a:off x="4709160" y="1700784"/>
-            <a:ext cx="3931920" cy="1883664"/>
-          </a:xfrm>
-          <a:prstGeom prst="rect">
-            <a:avLst/>
-          </a:prstGeom>
-          <a:noFill/>
-          <a:ln/>
-        </p:spPr>
-        <p:txBody>
-          <a:bodyPr wrap="square" lIns="0" tIns="0" rIns="0" bIns="0" rtlCol="0" anchor="ctr"/>
-          <a:lstStyle/>
-          <a:p>
-            <a:pPr algn="ctr" indent="0" marL="0">
-              <a:buNone/>
-            </a:pPr>
-            <a:r>
-              <a:rPr lang="en-US" sz="1400" dirty="0">
+            <a:off x="594360" y="3419856"/>
+            <a:ext cx="7863840" cy="402336"/>
+          </a:xfrm>
+          <a:prstGeom prst="rect">
+            <a:avLst/>
+          </a:prstGeom>
+          <a:noFill/>
+          <a:ln/>
+        </p:spPr>
+        <p:txBody>
+          <a:bodyPr wrap="square" lIns="0" tIns="0" rIns="0" bIns="0" rtlCol="0" anchor="ctr"/>
+          <a:lstStyle/>
+          <a:p>
+            <a:pPr indent="0" marL="0">
+              <a:buNone/>
+            </a:pPr>
+            <a:r>
+              <a:rPr lang="en-US" sz="1600" dirty="0">
                 <a:solidFill>
                   <a:srgbClr val="1E293B"/>
                 </a:solidFill>
@@ -4517,60 +4904,48 @@
                 <a:ea typeface="Calibri" pitchFamily="34" charset="-122"/>
                 <a:cs typeface="Calibri" pitchFamily="34" charset="-120"/>
               </a:rPr>
-              <a:t>Cook</a:t>
-            </a:r>
-            <a:endParaRPr lang="en-US" sz="1400" dirty="0"/>
-          </a:p>
-          <a:p>
-            <a:pPr algn="ctr" indent="0" marL="0">
-              <a:buNone/>
-            </a:pPr>
-            <a:r>
-              <a:rPr lang="en-US" sz="1400" dirty="0">
-                <a:solidFill>
-                  <a:srgbClr val="1E293B"/>
-                </a:solidFill>
-                <a:latin typeface="Calibri" pitchFamily="34" charset="0"/>
-                <a:ea typeface="Calibri" pitchFamily="34" charset="-122"/>
-                <a:cs typeface="Calibri" pitchFamily="34" charset="-120"/>
-              </a:rPr>
-              <a:t>candle</a:t>
-            </a:r>
-            <a:endParaRPr lang="en-US" sz="1400" dirty="0"/>
-          </a:p>
-          <a:p>
-            <a:pPr algn="ctr" indent="0" marL="0">
-              <a:buNone/>
-            </a:pPr>
-            <a:r>
-              <a:rPr lang="en-US" sz="1400" dirty="0">
-                <a:solidFill>
-                  <a:srgbClr val="1E293B"/>
-                </a:solidFill>
-                <a:latin typeface="Calibri" pitchFamily="34" charset="0"/>
-                <a:ea typeface="Calibri" pitchFamily="34" charset="-122"/>
-                <a:cs typeface="Calibri" pitchFamily="34" charset="-120"/>
-              </a:rPr>
-              <a:t>gold</a:t>
-            </a:r>
-            <a:endParaRPr lang="en-US" sz="1400" dirty="0"/>
-          </a:p>
-          <a:p>
-            <a:pPr algn="ctr" indent="0" marL="0">
-              <a:buNone/>
-            </a:pPr>
-            <a:r>
-              <a:rPr lang="en-US" sz="1400" dirty="0">
-                <a:solidFill>
-                  <a:srgbClr val="1E293B"/>
-                </a:solidFill>
-                <a:latin typeface="Calibri" pitchFamily="34" charset="0"/>
-                <a:ea typeface="Calibri" pitchFamily="34" charset="-122"/>
-                <a:cs typeface="Calibri" pitchFamily="34" charset="-120"/>
-              </a:rPr>
-              <a:t>garlic</a:t>
-            </a:r>
-            <a:endParaRPr lang="en-US" sz="1400" dirty="0"/>
+              <a:t>The brave prisoner told a sad story.</a:t>
+            </a:r>
+            <a:endParaRPr lang="en-US" sz="1600" dirty="0"/>
+          </a:p>
+        </p:txBody>
+      </p:sp>
+      <p:sp>
+        <p:nvSpPr>
+          <p:cNvPr id="13" name="Text 11"/>
+          <p:cNvSpPr/>
+          <p:nvPr/>
+        </p:nvSpPr>
+        <p:spPr>
+          <a:xfrm>
+            <a:off x="365760" y="4050792"/>
+            <a:ext cx="8412480" cy="365760"/>
+          </a:xfrm>
+          <a:prstGeom prst="rect">
+            <a:avLst/>
+          </a:prstGeom>
+          <a:noFill/>
+          <a:ln/>
+        </p:spPr>
+        <p:txBody>
+          <a:bodyPr wrap="square" lIns="0" tIns="0" rIns="0" bIns="0" rtlCol="0" anchor="ctr"/>
+          <a:lstStyle/>
+          <a:p>
+            <a:pPr indent="0" marL="0">
+              <a:buNone/>
+            </a:pPr>
+            <a:r>
+              <a:rPr lang="en-US" sz="1500" i="1" dirty="0">
+                <a:solidFill>
+                  <a:srgbClr val="64748B"/>
+                </a:solidFill>
+                <a:latin typeface="Calibri" pitchFamily="34" charset="0"/>
+                <a:ea typeface="Calibri" pitchFamily="34" charset="-122"/>
+                <a:cs typeface="Calibri" pitchFamily="34" charset="-120"/>
+              </a:rPr>
+              <a:t>Your turn. Tap every adjective in each sentence — there is more than one. The sentence only finishes when you have found them all.</a:t>
+            </a:r>
+            <a:endParaRPr lang="en-US" sz="1500" dirty="0"/>
           </a:p>
         </p:txBody>
       </p:sp>
@@ -4585,6 +4960,2264 @@
 <file path=ppt/slides/slide15.xml><?xml version="1.0" encoding="utf-8"?>
 <p:sld xmlns:a="http://schemas.openxmlformats.org/drawingml/2006/main" xmlns:r="http://schemas.openxmlformats.org/officeDocument/2006/relationships" xmlns:p="http://schemas.openxmlformats.org/presentationml/2006/main">
   <p:cSld name="Slide 15">
+    <p:bg>
+      <p:bgPr>
+        <a:solidFill>
+          <a:srgbClr val="F8FAFC"/>
+        </a:solidFill>
+      </p:bgPr>
+    </p:bg>
+    <p:spTree>
+      <p:nvGrpSpPr>
+        <p:cNvPr id="1" name=""/>
+        <p:cNvGrpSpPr/>
+        <p:nvPr/>
+      </p:nvGrpSpPr>
+      <p:grpSpPr>
+        <a:xfrm>
+          <a:off x="0" y="0"/>
+          <a:ext cx="0" cy="0"/>
+          <a:chOff x="0" y="0"/>
+          <a:chExt cx="0" cy="0"/>
+        </a:xfrm>
+      </p:grpSpPr>
+      <p:sp>
+        <p:nvSpPr>
+          <p:cNvPr id="2" name="Shape 0"/>
+          <p:cNvSpPr/>
+          <p:nvPr/>
+        </p:nvSpPr>
+        <p:spPr>
+          <a:xfrm>
+            <a:off x="0" y="0"/>
+            <a:ext cx="9144000" cy="566928"/>
+          </a:xfrm>
+          <a:prstGeom prst="rect">
+            <a:avLst/>
+          </a:prstGeom>
+          <a:solidFill>
+            <a:srgbClr val="C7922C"/>
+          </a:solidFill>
+          <a:ln/>
+        </p:spPr>
+      </p:sp>
+      <p:sp>
+        <p:nvSpPr>
+          <p:cNvPr id="3" name="Text 1"/>
+          <p:cNvSpPr/>
+          <p:nvPr/>
+        </p:nvSpPr>
+        <p:spPr>
+          <a:xfrm>
+            <a:off x="365760" y="54864"/>
+            <a:ext cx="8412480" cy="457200"/>
+          </a:xfrm>
+          <a:prstGeom prst="rect">
+            <a:avLst/>
+          </a:prstGeom>
+          <a:noFill/>
+          <a:ln/>
+        </p:spPr>
+        <p:txBody>
+          <a:bodyPr wrap="square" lIns="0" tIns="0" rIns="0" bIns="0" rtlCol="0" anchor="ctr"/>
+          <a:lstStyle/>
+          <a:p>
+            <a:pPr indent="0" marL="0">
+              <a:buNone/>
+            </a:pPr>
+            <a:r>
+              <a:rPr lang="en-US" sz="2200" b="1" dirty="0">
+                <a:solidFill>
+                  <a:srgbClr val="FFFFFF"/>
+                </a:solidFill>
+                <a:latin typeface="Calibri" pitchFamily="34" charset="0"/>
+                <a:ea typeface="Calibri" pitchFamily="34" charset="-122"/>
+                <a:cs typeface="Calibri" pitchFamily="34" charset="-120"/>
+              </a:rPr>
+              <a:t>✏️  Grammar</a:t>
+            </a:r>
+            <a:endParaRPr lang="en-US" sz="2200" dirty="0"/>
+          </a:p>
+        </p:txBody>
+      </p:sp>
+      <p:sp>
+        <p:nvSpPr>
+          <p:cNvPr id="4" name="Text 2"/>
+          <p:cNvSpPr/>
+          <p:nvPr/>
+        </p:nvSpPr>
+        <p:spPr>
+          <a:xfrm>
+            <a:off x="365760" y="777240"/>
+            <a:ext cx="8229600" cy="237744"/>
+          </a:xfrm>
+          <a:prstGeom prst="rect">
+            <a:avLst/>
+          </a:prstGeom>
+          <a:noFill/>
+          <a:ln/>
+        </p:spPr>
+        <p:txBody>
+          <a:bodyPr wrap="square" lIns="0" tIns="0" rIns="0" bIns="0" rtlCol="0" anchor="ctr"/>
+          <a:lstStyle/>
+          <a:p>
+            <a:pPr indent="0" marL="0">
+              <a:buNone/>
+            </a:pPr>
+            <a:r>
+              <a:rPr lang="en-US" sz="1100" b="1" spc="100" kern="0" dirty="0">
+                <a:solidFill>
+                  <a:srgbClr val="C7922C"/>
+                </a:solidFill>
+                <a:latin typeface="Calibri" pitchFamily="34" charset="0"/>
+                <a:ea typeface="Calibri" pitchFamily="34" charset="-122"/>
+                <a:cs typeface="Calibri" pitchFamily="34" charset="-120"/>
+              </a:rPr>
+              <a:t>ADJECTIVES AND COMPARING</a:t>
+            </a:r>
+            <a:endParaRPr lang="en-US" sz="1100" dirty="0"/>
+          </a:p>
+        </p:txBody>
+      </p:sp>
+      <p:sp>
+        <p:nvSpPr>
+          <p:cNvPr id="5" name="Shape 3"/>
+          <p:cNvSpPr/>
+          <p:nvPr/>
+        </p:nvSpPr>
+        <p:spPr>
+          <a:xfrm>
+            <a:off x="365760" y="1078992"/>
+            <a:ext cx="8412480" cy="658368"/>
+          </a:xfrm>
+          <a:prstGeom prst="roundRect">
+            <a:avLst>
+              <a:gd name="adj" fmla="val 13889"/>
+            </a:avLst>
+          </a:prstGeom>
+          <a:solidFill>
+            <a:srgbClr val="FEF6E8"/>
+          </a:solidFill>
+          <a:ln/>
+          <a:effectLst>
+            <a:outerShdw sx="100000" sy="100000" kx="0" ky="0" algn="bl" rotWithShape="0" blurRad="101600" dist="38100" dir="2700000">
+              <a:srgbClr val="000000">
+                <a:alpha val="12000"/>
+              </a:srgbClr>
+            </a:outerShdw>
+          </a:effectLst>
+        </p:spPr>
+      </p:sp>
+      <p:sp>
+        <p:nvSpPr>
+          <p:cNvPr id="6" name="Text 4"/>
+          <p:cNvSpPr/>
+          <p:nvPr/>
+        </p:nvSpPr>
+        <p:spPr>
+          <a:xfrm>
+            <a:off x="594360" y="1225296"/>
+            <a:ext cx="7863840" cy="402336"/>
+          </a:xfrm>
+          <a:prstGeom prst="rect">
+            <a:avLst/>
+          </a:prstGeom>
+          <a:noFill/>
+          <a:ln/>
+        </p:spPr>
+        <p:txBody>
+          <a:bodyPr wrap="square" lIns="0" tIns="0" rIns="0" bIns="0" rtlCol="0" anchor="ctr"/>
+          <a:lstStyle/>
+          <a:p>
+            <a:pPr indent="0" marL="0">
+              <a:buNone/>
+            </a:pPr>
+            <a:r>
+              <a:rPr lang="en-US" sz="1600" dirty="0">
+                <a:solidFill>
+                  <a:srgbClr val="1E293B"/>
+                </a:solidFill>
+                <a:latin typeface="Calibri" pitchFamily="34" charset="0"/>
+                <a:ea typeface="Calibri" pitchFamily="34" charset="-122"/>
+                <a:cs typeface="Calibri" pitchFamily="34" charset="-120"/>
+              </a:rPr>
+              <a:t>The </a:t>
+            </a:r>
+            <a:pPr indent="0" marL="0">
+              <a:buNone/>
+            </a:pPr>
+            <a:r>
+              <a:rPr lang="en-US" sz="1600" b="1" dirty="0">
+                <a:solidFill>
+                  <a:srgbClr val="34B76F"/>
+                </a:solidFill>
+                <a:latin typeface="Calibri" pitchFamily="34" charset="0"/>
+                <a:ea typeface="Calibri" pitchFamily="34" charset="-122"/>
+                <a:cs typeface="Calibri" pitchFamily="34" charset="-120"/>
+              </a:rPr>
+              <a:t>small </a:t>
+            </a:r>
+            <a:pPr indent="0" marL="0">
+              <a:buNone/>
+            </a:pPr>
+            <a:r>
+              <a:rPr lang="en-US" sz="1600" dirty="0">
+                <a:solidFill>
+                  <a:srgbClr val="1E293B"/>
+                </a:solidFill>
+                <a:latin typeface="Calibri" pitchFamily="34" charset="0"/>
+                <a:ea typeface="Calibri" pitchFamily="34" charset="-122"/>
+                <a:cs typeface="Calibri" pitchFamily="34" charset="-120"/>
+              </a:rPr>
+              <a:t>mouse </a:t>
+            </a:r>
+            <a:pPr indent="0" marL="0">
+              <a:buNone/>
+            </a:pPr>
+            <a:r>
+              <a:rPr lang="en-US" sz="1600" dirty="0">
+                <a:solidFill>
+                  <a:srgbClr val="1E293B"/>
+                </a:solidFill>
+                <a:latin typeface="Calibri" pitchFamily="34" charset="0"/>
+                <a:ea typeface="Calibri" pitchFamily="34" charset="-122"/>
+                <a:cs typeface="Calibri" pitchFamily="34" charset="-120"/>
+              </a:rPr>
+              <a:t>carried </a:t>
+            </a:r>
+            <a:pPr indent="0" marL="0">
+              <a:buNone/>
+            </a:pPr>
+            <a:r>
+              <a:rPr lang="en-US" sz="1600" dirty="0">
+                <a:solidFill>
+                  <a:srgbClr val="1E293B"/>
+                </a:solidFill>
+                <a:latin typeface="Calibri" pitchFamily="34" charset="0"/>
+                <a:ea typeface="Calibri" pitchFamily="34" charset="-122"/>
+                <a:cs typeface="Calibri" pitchFamily="34" charset="-120"/>
+              </a:rPr>
+              <a:t>a </a:t>
+            </a:r>
+            <a:pPr indent="0" marL="0">
+              <a:buNone/>
+            </a:pPr>
+            <a:r>
+              <a:rPr lang="en-US" sz="1600" b="1" dirty="0">
+                <a:solidFill>
+                  <a:srgbClr val="34B76F"/>
+                </a:solidFill>
+                <a:latin typeface="Calibri" pitchFamily="34" charset="0"/>
+                <a:ea typeface="Calibri" pitchFamily="34" charset="-122"/>
+                <a:cs typeface="Calibri" pitchFamily="34" charset="-120"/>
+              </a:rPr>
+              <a:t>golden </a:t>
+            </a:r>
+            <a:pPr indent="0" marL="0">
+              <a:buNone/>
+            </a:pPr>
+            <a:r>
+              <a:rPr lang="en-US" sz="1600" dirty="0">
+                <a:solidFill>
+                  <a:srgbClr val="1E293B"/>
+                </a:solidFill>
+                <a:latin typeface="Calibri" pitchFamily="34" charset="0"/>
+                <a:ea typeface="Calibri" pitchFamily="34" charset="-122"/>
+                <a:cs typeface="Calibri" pitchFamily="34" charset="-120"/>
+              </a:rPr>
+              <a:t>thread.</a:t>
+            </a:r>
+            <a:endParaRPr lang="en-US" sz="1600" dirty="0"/>
+          </a:p>
+        </p:txBody>
+      </p:sp>
+      <p:sp>
+        <p:nvSpPr>
+          <p:cNvPr id="7" name="Shape 5"/>
+          <p:cNvSpPr/>
+          <p:nvPr/>
+        </p:nvSpPr>
+        <p:spPr>
+          <a:xfrm>
+            <a:off x="365760" y="1810512"/>
+            <a:ext cx="8412480" cy="658368"/>
+          </a:xfrm>
+          <a:prstGeom prst="roundRect">
+            <a:avLst>
+              <a:gd name="adj" fmla="val 13889"/>
+            </a:avLst>
+          </a:prstGeom>
+          <a:solidFill>
+            <a:srgbClr val="FFFFFF"/>
+          </a:solidFill>
+          <a:ln/>
+          <a:effectLst>
+            <a:outerShdw sx="100000" sy="100000" kx="0" ky="0" algn="bl" rotWithShape="0" blurRad="101600" dist="38100" dir="2700000">
+              <a:srgbClr val="000000">
+                <a:alpha val="12000"/>
+              </a:srgbClr>
+            </a:outerShdw>
+          </a:effectLst>
+        </p:spPr>
+      </p:sp>
+      <p:sp>
+        <p:nvSpPr>
+          <p:cNvPr id="8" name="Text 6"/>
+          <p:cNvSpPr/>
+          <p:nvPr/>
+        </p:nvSpPr>
+        <p:spPr>
+          <a:xfrm>
+            <a:off x="594360" y="1956816"/>
+            <a:ext cx="7863840" cy="402336"/>
+          </a:xfrm>
+          <a:prstGeom prst="rect">
+            <a:avLst/>
+          </a:prstGeom>
+          <a:noFill/>
+          <a:ln/>
+        </p:spPr>
+        <p:txBody>
+          <a:bodyPr wrap="square" lIns="0" tIns="0" rIns="0" bIns="0" rtlCol="0" anchor="ctr"/>
+          <a:lstStyle/>
+          <a:p>
+            <a:pPr indent="0" marL="0">
+              <a:buNone/>
+            </a:pPr>
+            <a:r>
+              <a:rPr lang="en-US" sz="1600" dirty="0">
+                <a:solidFill>
+                  <a:srgbClr val="1E293B"/>
+                </a:solidFill>
+                <a:latin typeface="Calibri" pitchFamily="34" charset="0"/>
+                <a:ea typeface="Calibri" pitchFamily="34" charset="-122"/>
+                <a:cs typeface="Calibri" pitchFamily="34" charset="-120"/>
+              </a:rPr>
+              <a:t>Despereaux </a:t>
+            </a:r>
+            <a:pPr indent="0" marL="0">
+              <a:buNone/>
+            </a:pPr>
+            <a:r>
+              <a:rPr lang="en-US" sz="1600" dirty="0">
+                <a:solidFill>
+                  <a:srgbClr val="1E293B"/>
+                </a:solidFill>
+                <a:latin typeface="Calibri" pitchFamily="34" charset="0"/>
+                <a:ea typeface="Calibri" pitchFamily="34" charset="-122"/>
+                <a:cs typeface="Calibri" pitchFamily="34" charset="-120"/>
+              </a:rPr>
+              <a:t>heard </a:t>
+            </a:r>
+            <a:pPr indent="0" marL="0">
+              <a:buNone/>
+            </a:pPr>
+            <a:r>
+              <a:rPr lang="en-US" sz="1600" dirty="0">
+                <a:solidFill>
+                  <a:srgbClr val="1E293B"/>
+                </a:solidFill>
+                <a:latin typeface="Calibri" pitchFamily="34" charset="0"/>
+                <a:ea typeface="Calibri" pitchFamily="34" charset="-122"/>
+                <a:cs typeface="Calibri" pitchFamily="34" charset="-120"/>
+              </a:rPr>
+              <a:t>the </a:t>
+            </a:r>
+            <a:pPr indent="0" marL="0">
+              <a:buNone/>
+            </a:pPr>
+            <a:r>
+              <a:rPr lang="en-US" sz="1600" b="1" dirty="0">
+                <a:solidFill>
+                  <a:srgbClr val="34B76F"/>
+                </a:solidFill>
+                <a:latin typeface="Calibri" pitchFamily="34" charset="0"/>
+                <a:ea typeface="Calibri" pitchFamily="34" charset="-122"/>
+                <a:cs typeface="Calibri" pitchFamily="34" charset="-120"/>
+              </a:rPr>
+              <a:t>sweet, </a:t>
+            </a:r>
+            <a:pPr indent="0" marL="0">
+              <a:buNone/>
+            </a:pPr>
+            <a:r>
+              <a:rPr lang="en-US" sz="1600" b="1" dirty="0">
+                <a:solidFill>
+                  <a:srgbClr val="34B76F"/>
+                </a:solidFill>
+                <a:latin typeface="Calibri" pitchFamily="34" charset="0"/>
+                <a:ea typeface="Calibri" pitchFamily="34" charset="-122"/>
+                <a:cs typeface="Calibri" pitchFamily="34" charset="-120"/>
+              </a:rPr>
+              <a:t>low </a:t>
+            </a:r>
+            <a:pPr indent="0" marL="0">
+              <a:buNone/>
+            </a:pPr>
+            <a:r>
+              <a:rPr lang="en-US" sz="1600" dirty="0">
+                <a:solidFill>
+                  <a:srgbClr val="1E293B"/>
+                </a:solidFill>
+                <a:latin typeface="Calibri" pitchFamily="34" charset="0"/>
+                <a:ea typeface="Calibri" pitchFamily="34" charset="-122"/>
+                <a:cs typeface="Calibri" pitchFamily="34" charset="-120"/>
+              </a:rPr>
+              <a:t>music.</a:t>
+            </a:r>
+            <a:endParaRPr lang="en-US" sz="1600" dirty="0"/>
+          </a:p>
+        </p:txBody>
+      </p:sp>
+      <p:sp>
+        <p:nvSpPr>
+          <p:cNvPr id="9" name="Shape 7"/>
+          <p:cNvSpPr/>
+          <p:nvPr/>
+        </p:nvSpPr>
+        <p:spPr>
+          <a:xfrm>
+            <a:off x="365760" y="2542032"/>
+            <a:ext cx="8412480" cy="658368"/>
+          </a:xfrm>
+          <a:prstGeom prst="roundRect">
+            <a:avLst>
+              <a:gd name="adj" fmla="val 13889"/>
+            </a:avLst>
+          </a:prstGeom>
+          <a:solidFill>
+            <a:srgbClr val="FEF6E8"/>
+          </a:solidFill>
+          <a:ln/>
+          <a:effectLst>
+            <a:outerShdw sx="100000" sy="100000" kx="0" ky="0" algn="bl" rotWithShape="0" blurRad="101600" dist="38100" dir="2700000">
+              <a:srgbClr val="000000">
+                <a:alpha val="12000"/>
+              </a:srgbClr>
+            </a:outerShdw>
+          </a:effectLst>
+        </p:spPr>
+      </p:sp>
+      <p:sp>
+        <p:nvSpPr>
+          <p:cNvPr id="10" name="Text 8"/>
+          <p:cNvSpPr/>
+          <p:nvPr/>
+        </p:nvSpPr>
+        <p:spPr>
+          <a:xfrm>
+            <a:off x="594360" y="2688336"/>
+            <a:ext cx="7863840" cy="402336"/>
+          </a:xfrm>
+          <a:prstGeom prst="rect">
+            <a:avLst/>
+          </a:prstGeom>
+          <a:noFill/>
+          <a:ln/>
+        </p:spPr>
+        <p:txBody>
+          <a:bodyPr wrap="square" lIns="0" tIns="0" rIns="0" bIns="0" rtlCol="0" anchor="ctr"/>
+          <a:lstStyle/>
+          <a:p>
+            <a:pPr indent="0" marL="0">
+              <a:buNone/>
+            </a:pPr>
+            <a:r>
+              <a:rPr lang="en-US" sz="1600" dirty="0">
+                <a:solidFill>
+                  <a:srgbClr val="1E293B"/>
+                </a:solidFill>
+                <a:latin typeface="Calibri" pitchFamily="34" charset="0"/>
+                <a:ea typeface="Calibri" pitchFamily="34" charset="-122"/>
+                <a:cs typeface="Calibri" pitchFamily="34" charset="-120"/>
+              </a:rPr>
+              <a:t>A </a:t>
+            </a:r>
+            <a:pPr indent="0" marL="0">
+              <a:buNone/>
+            </a:pPr>
+            <a:r>
+              <a:rPr lang="en-US" sz="1600" b="1" dirty="0">
+                <a:solidFill>
+                  <a:srgbClr val="34B76F"/>
+                </a:solidFill>
+                <a:latin typeface="Calibri" pitchFamily="34" charset="0"/>
+                <a:ea typeface="Calibri" pitchFamily="34" charset="-122"/>
+                <a:cs typeface="Calibri" pitchFamily="34" charset="-120"/>
+              </a:rPr>
+              <a:t>dark </a:t>
+            </a:r>
+            <a:pPr indent="0" marL="0">
+              <a:buNone/>
+            </a:pPr>
+            <a:r>
+              <a:rPr lang="en-US" sz="1600" dirty="0">
+                <a:solidFill>
+                  <a:srgbClr val="1E293B"/>
+                </a:solidFill>
+                <a:latin typeface="Calibri" pitchFamily="34" charset="0"/>
+                <a:ea typeface="Calibri" pitchFamily="34" charset="-122"/>
+                <a:cs typeface="Calibri" pitchFamily="34" charset="-120"/>
+              </a:rPr>
+              <a:t>tunnel </a:t>
+            </a:r>
+            <a:pPr indent="0" marL="0">
+              <a:buNone/>
+            </a:pPr>
+            <a:r>
+              <a:rPr lang="en-US" sz="1600" dirty="0">
+                <a:solidFill>
+                  <a:srgbClr val="1E293B"/>
+                </a:solidFill>
+                <a:latin typeface="Calibri" pitchFamily="34" charset="0"/>
+                <a:ea typeface="Calibri" pitchFamily="34" charset="-122"/>
+                <a:cs typeface="Calibri" pitchFamily="34" charset="-120"/>
+              </a:rPr>
+              <a:t>led </a:t>
+            </a:r>
+            <a:pPr indent="0" marL="0">
+              <a:buNone/>
+            </a:pPr>
+            <a:r>
+              <a:rPr lang="en-US" sz="1600" dirty="0">
+                <a:solidFill>
+                  <a:srgbClr val="1E293B"/>
+                </a:solidFill>
+                <a:latin typeface="Calibri" pitchFamily="34" charset="0"/>
+                <a:ea typeface="Calibri" pitchFamily="34" charset="-122"/>
+                <a:cs typeface="Calibri" pitchFamily="34" charset="-120"/>
+              </a:rPr>
+              <a:t>to </a:t>
+            </a:r>
+            <a:pPr indent="0" marL="0">
+              <a:buNone/>
+            </a:pPr>
+            <a:r>
+              <a:rPr lang="en-US" sz="1600" dirty="0">
+                <a:solidFill>
+                  <a:srgbClr val="1E293B"/>
+                </a:solidFill>
+                <a:latin typeface="Calibri" pitchFamily="34" charset="0"/>
+                <a:ea typeface="Calibri" pitchFamily="34" charset="-122"/>
+                <a:cs typeface="Calibri" pitchFamily="34" charset="-120"/>
+              </a:rPr>
+              <a:t>the </a:t>
+            </a:r>
+            <a:pPr indent="0" marL="0">
+              <a:buNone/>
+            </a:pPr>
+            <a:r>
+              <a:rPr lang="en-US" sz="1600" b="1" dirty="0">
+                <a:solidFill>
+                  <a:srgbClr val="34B76F"/>
+                </a:solidFill>
+                <a:latin typeface="Calibri" pitchFamily="34" charset="0"/>
+                <a:ea typeface="Calibri" pitchFamily="34" charset="-122"/>
+                <a:cs typeface="Calibri" pitchFamily="34" charset="-120"/>
+              </a:rPr>
+              <a:t>deep </a:t>
+            </a:r>
+            <a:pPr indent="0" marL="0">
+              <a:buNone/>
+            </a:pPr>
+            <a:r>
+              <a:rPr lang="en-US" sz="1600" dirty="0">
+                <a:solidFill>
+                  <a:srgbClr val="1E293B"/>
+                </a:solidFill>
+                <a:latin typeface="Calibri" pitchFamily="34" charset="0"/>
+                <a:ea typeface="Calibri" pitchFamily="34" charset="-122"/>
+                <a:cs typeface="Calibri" pitchFamily="34" charset="-120"/>
+              </a:rPr>
+              <a:t>dungeon.</a:t>
+            </a:r>
+            <a:endParaRPr lang="en-US" sz="1600" dirty="0"/>
+          </a:p>
+        </p:txBody>
+      </p:sp>
+      <p:sp>
+        <p:nvSpPr>
+          <p:cNvPr id="11" name="Shape 9"/>
+          <p:cNvSpPr/>
+          <p:nvPr/>
+        </p:nvSpPr>
+        <p:spPr>
+          <a:xfrm>
+            <a:off x="365760" y="3273552"/>
+            <a:ext cx="8412480" cy="658368"/>
+          </a:xfrm>
+          <a:prstGeom prst="roundRect">
+            <a:avLst>
+              <a:gd name="adj" fmla="val 13889"/>
+            </a:avLst>
+          </a:prstGeom>
+          <a:solidFill>
+            <a:srgbClr val="FFFFFF"/>
+          </a:solidFill>
+          <a:ln/>
+          <a:effectLst>
+            <a:outerShdw sx="100000" sy="100000" kx="0" ky="0" algn="bl" rotWithShape="0" blurRad="101600" dist="38100" dir="2700000">
+              <a:srgbClr val="000000">
+                <a:alpha val="12000"/>
+              </a:srgbClr>
+            </a:outerShdw>
+          </a:effectLst>
+        </p:spPr>
+      </p:sp>
+      <p:sp>
+        <p:nvSpPr>
+          <p:cNvPr id="12" name="Text 10"/>
+          <p:cNvSpPr/>
+          <p:nvPr/>
+        </p:nvSpPr>
+        <p:spPr>
+          <a:xfrm>
+            <a:off x="594360" y="3419856"/>
+            <a:ext cx="7863840" cy="402336"/>
+          </a:xfrm>
+          <a:prstGeom prst="rect">
+            <a:avLst/>
+          </a:prstGeom>
+          <a:noFill/>
+          <a:ln/>
+        </p:spPr>
+        <p:txBody>
+          <a:bodyPr wrap="square" lIns="0" tIns="0" rIns="0" bIns="0" rtlCol="0" anchor="ctr"/>
+          <a:lstStyle/>
+          <a:p>
+            <a:pPr indent="0" marL="0">
+              <a:buNone/>
+            </a:pPr>
+            <a:r>
+              <a:rPr lang="en-US" sz="1600" dirty="0">
+                <a:solidFill>
+                  <a:srgbClr val="1E293B"/>
+                </a:solidFill>
+                <a:latin typeface="Calibri" pitchFamily="34" charset="0"/>
+                <a:ea typeface="Calibri" pitchFamily="34" charset="-122"/>
+                <a:cs typeface="Calibri" pitchFamily="34" charset="-120"/>
+              </a:rPr>
+              <a:t>The </a:t>
+            </a:r>
+            <a:pPr indent="0" marL="0">
+              <a:buNone/>
+            </a:pPr>
+            <a:r>
+              <a:rPr lang="en-US" sz="1600" b="1" dirty="0">
+                <a:solidFill>
+                  <a:srgbClr val="34B76F"/>
+                </a:solidFill>
+                <a:latin typeface="Calibri" pitchFamily="34" charset="0"/>
+                <a:ea typeface="Calibri" pitchFamily="34" charset="-122"/>
+                <a:cs typeface="Calibri" pitchFamily="34" charset="-120"/>
+              </a:rPr>
+              <a:t>brave </a:t>
+            </a:r>
+            <a:pPr indent="0" marL="0">
+              <a:buNone/>
+            </a:pPr>
+            <a:r>
+              <a:rPr lang="en-US" sz="1600" dirty="0">
+                <a:solidFill>
+                  <a:srgbClr val="1E293B"/>
+                </a:solidFill>
+                <a:latin typeface="Calibri" pitchFamily="34" charset="0"/>
+                <a:ea typeface="Calibri" pitchFamily="34" charset="-122"/>
+                <a:cs typeface="Calibri" pitchFamily="34" charset="-120"/>
+              </a:rPr>
+              <a:t>prisoner </a:t>
+            </a:r>
+            <a:pPr indent="0" marL="0">
+              <a:buNone/>
+            </a:pPr>
+            <a:r>
+              <a:rPr lang="en-US" sz="1600" dirty="0">
+                <a:solidFill>
+                  <a:srgbClr val="1E293B"/>
+                </a:solidFill>
+                <a:latin typeface="Calibri" pitchFamily="34" charset="0"/>
+                <a:ea typeface="Calibri" pitchFamily="34" charset="-122"/>
+                <a:cs typeface="Calibri" pitchFamily="34" charset="-120"/>
+              </a:rPr>
+              <a:t>told </a:t>
+            </a:r>
+            <a:pPr indent="0" marL="0">
+              <a:buNone/>
+            </a:pPr>
+            <a:r>
+              <a:rPr lang="en-US" sz="1600" dirty="0">
+                <a:solidFill>
+                  <a:srgbClr val="1E293B"/>
+                </a:solidFill>
+                <a:latin typeface="Calibri" pitchFamily="34" charset="0"/>
+                <a:ea typeface="Calibri" pitchFamily="34" charset="-122"/>
+                <a:cs typeface="Calibri" pitchFamily="34" charset="-120"/>
+              </a:rPr>
+              <a:t>a </a:t>
+            </a:r>
+            <a:pPr indent="0" marL="0">
+              <a:buNone/>
+            </a:pPr>
+            <a:r>
+              <a:rPr lang="en-US" sz="1600" b="1" dirty="0">
+                <a:solidFill>
+                  <a:srgbClr val="34B76F"/>
+                </a:solidFill>
+                <a:latin typeface="Calibri" pitchFamily="34" charset="0"/>
+                <a:ea typeface="Calibri" pitchFamily="34" charset="-122"/>
+                <a:cs typeface="Calibri" pitchFamily="34" charset="-120"/>
+              </a:rPr>
+              <a:t>sad </a:t>
+            </a:r>
+            <a:pPr indent="0" marL="0">
+              <a:buNone/>
+            </a:pPr>
+            <a:r>
+              <a:rPr lang="en-US" sz="1600" dirty="0">
+                <a:solidFill>
+                  <a:srgbClr val="1E293B"/>
+                </a:solidFill>
+                <a:latin typeface="Calibri" pitchFamily="34" charset="0"/>
+                <a:ea typeface="Calibri" pitchFamily="34" charset="-122"/>
+                <a:cs typeface="Calibri" pitchFamily="34" charset="-120"/>
+              </a:rPr>
+              <a:t>story.</a:t>
+            </a:r>
+            <a:endParaRPr lang="en-US" sz="1600" dirty="0"/>
+          </a:p>
+        </p:txBody>
+      </p:sp>
+      <p:sp>
+        <p:nvSpPr>
+          <p:cNvPr id="13" name="Text 11"/>
+          <p:cNvSpPr/>
+          <p:nvPr/>
+        </p:nvSpPr>
+        <p:spPr>
+          <a:xfrm>
+            <a:off x="365760" y="4050792"/>
+            <a:ext cx="8412480" cy="365760"/>
+          </a:xfrm>
+          <a:prstGeom prst="rect">
+            <a:avLst/>
+          </a:prstGeom>
+          <a:noFill/>
+          <a:ln/>
+        </p:spPr>
+        <p:txBody>
+          <a:bodyPr wrap="square" lIns="0" tIns="0" rIns="0" bIns="0" rtlCol="0" anchor="ctr"/>
+          <a:lstStyle/>
+          <a:p>
+            <a:pPr indent="0" marL="0">
+              <a:buNone/>
+            </a:pPr>
+            <a:r>
+              <a:rPr lang="en-US" sz="1500" b="1" dirty="0">
+                <a:solidFill>
+                  <a:srgbClr val="34B76F"/>
+                </a:solidFill>
+                <a:latin typeface="Calibri" pitchFamily="34" charset="0"/>
+                <a:ea typeface="Calibri" pitchFamily="34" charset="-122"/>
+                <a:cs typeface="Calibri" pitchFamily="34" charset="-120"/>
+              </a:rPr>
+              <a:t>✅  Answers revealed</a:t>
+            </a:r>
+            <a:endParaRPr lang="en-US" sz="1500" dirty="0"/>
+          </a:p>
+        </p:txBody>
+      </p:sp>
+    </p:spTree>
+  </p:cSld>
+  <p:clrMapOvr>
+    <a:masterClrMapping/>
+  </p:clrMapOvr>
+</p:sld>
+</file>
+
+<file path=ppt/slides/slide16.xml><?xml version="1.0" encoding="utf-8"?>
+<p:sld xmlns:a="http://schemas.openxmlformats.org/drawingml/2006/main" xmlns:r="http://schemas.openxmlformats.org/officeDocument/2006/relationships" xmlns:p="http://schemas.openxmlformats.org/presentationml/2006/main">
+  <p:cSld name="Slide 16">
+    <p:bg>
+      <p:bgPr>
+        <a:solidFill>
+          <a:srgbClr val="F8FAFC"/>
+        </a:solidFill>
+      </p:bgPr>
+    </p:bg>
+    <p:spTree>
+      <p:nvGrpSpPr>
+        <p:cNvPr id="1" name=""/>
+        <p:cNvGrpSpPr/>
+        <p:nvPr/>
+      </p:nvGrpSpPr>
+      <p:grpSpPr>
+        <a:xfrm>
+          <a:off x="0" y="0"/>
+          <a:ext cx="0" cy="0"/>
+          <a:chOff x="0" y="0"/>
+          <a:chExt cx="0" cy="0"/>
+        </a:xfrm>
+      </p:grpSpPr>
+      <p:sp>
+        <p:nvSpPr>
+          <p:cNvPr id="2" name="Shape 0"/>
+          <p:cNvSpPr/>
+          <p:nvPr/>
+        </p:nvSpPr>
+        <p:spPr>
+          <a:xfrm>
+            <a:off x="0" y="0"/>
+            <a:ext cx="9144000" cy="566928"/>
+          </a:xfrm>
+          <a:prstGeom prst="rect">
+            <a:avLst/>
+          </a:prstGeom>
+          <a:solidFill>
+            <a:srgbClr val="0E1C42"/>
+          </a:solidFill>
+          <a:ln/>
+        </p:spPr>
+      </p:sp>
+      <p:sp>
+        <p:nvSpPr>
+          <p:cNvPr id="3" name="Text 1"/>
+          <p:cNvSpPr/>
+          <p:nvPr/>
+        </p:nvSpPr>
+        <p:spPr>
+          <a:xfrm>
+            <a:off x="365760" y="54864"/>
+            <a:ext cx="8412480" cy="457200"/>
+          </a:xfrm>
+          <a:prstGeom prst="rect">
+            <a:avLst/>
+          </a:prstGeom>
+          <a:noFill/>
+          <a:ln/>
+        </p:spPr>
+        <p:txBody>
+          <a:bodyPr wrap="square" lIns="0" tIns="0" rIns="0" bIns="0" rtlCol="0" anchor="ctr"/>
+          <a:lstStyle/>
+          <a:p>
+            <a:pPr indent="0" marL="0">
+              <a:buNone/>
+            </a:pPr>
+            <a:r>
+              <a:rPr lang="en-US" sz="2200" b="1" dirty="0">
+                <a:solidFill>
+                  <a:srgbClr val="FFFFFF"/>
+                </a:solidFill>
+                <a:latin typeface="Calibri" pitchFamily="34" charset="0"/>
+                <a:ea typeface="Calibri" pitchFamily="34" charset="-122"/>
+                <a:cs typeface="Calibri" pitchFamily="34" charset="-120"/>
+              </a:rPr>
+              <a:t>🔠  Spelling</a:t>
+            </a:r>
+            <a:endParaRPr lang="en-US" sz="2200" dirty="0"/>
+          </a:p>
+        </p:txBody>
+      </p:sp>
+      <p:sp>
+        <p:nvSpPr>
+          <p:cNvPr id="4" name="Text 2"/>
+          <p:cNvSpPr/>
+          <p:nvPr/>
+        </p:nvSpPr>
+        <p:spPr>
+          <a:xfrm>
+            <a:off x="365760" y="777240"/>
+            <a:ext cx="8229600" cy="237744"/>
+          </a:xfrm>
+          <a:prstGeom prst="rect">
+            <a:avLst/>
+          </a:prstGeom>
+          <a:noFill/>
+          <a:ln/>
+        </p:spPr>
+        <p:txBody>
+          <a:bodyPr wrap="square" lIns="0" tIns="0" rIns="0" bIns="0" rtlCol="0" anchor="ctr"/>
+          <a:lstStyle/>
+          <a:p>
+            <a:pPr indent="0" marL="0">
+              <a:buNone/>
+            </a:pPr>
+            <a:r>
+              <a:rPr lang="en-US" sz="1100" b="1" spc="100" kern="0" dirty="0">
+                <a:solidFill>
+                  <a:srgbClr val="0E1C42"/>
+                </a:solidFill>
+                <a:latin typeface="Calibri" pitchFamily="34" charset="0"/>
+                <a:ea typeface="Calibri" pitchFamily="34" charset="-122"/>
+                <a:cs typeface="Calibri" pitchFamily="34" charset="-120"/>
+              </a:rPr>
+              <a:t>CLOSED SYLLABLES</a:t>
+            </a:r>
+            <a:endParaRPr lang="en-US" sz="1100" dirty="0"/>
+          </a:p>
+        </p:txBody>
+      </p:sp>
+      <p:sp>
+        <p:nvSpPr>
+          <p:cNvPr id="5" name="Text 3"/>
+          <p:cNvSpPr/>
+          <p:nvPr/>
+        </p:nvSpPr>
+        <p:spPr>
+          <a:xfrm>
+            <a:off x="365760" y="1051560"/>
+            <a:ext cx="8229600" cy="237744"/>
+          </a:xfrm>
+          <a:prstGeom prst="rect">
+            <a:avLst/>
+          </a:prstGeom>
+          <a:noFill/>
+          <a:ln/>
+        </p:spPr>
+        <p:txBody>
+          <a:bodyPr wrap="square" lIns="0" tIns="0" rIns="0" bIns="0" rtlCol="0" anchor="ctr"/>
+          <a:lstStyle/>
+          <a:p>
+            <a:pPr indent="0" marL="0">
+              <a:buNone/>
+            </a:pPr>
+            <a:r>
+              <a:rPr lang="en-US" sz="1100" b="1" spc="100" kern="0" dirty="0">
+                <a:solidFill>
+                  <a:srgbClr val="C7922C"/>
+                </a:solidFill>
+                <a:latin typeface="Calibri" pitchFamily="34" charset="0"/>
+                <a:ea typeface="Calibri" pitchFamily="34" charset="-122"/>
+                <a:cs typeface="Calibri" pitchFamily="34" charset="-120"/>
+              </a:rPr>
+              <a:t>📖  THE RULE</a:t>
+            </a:r>
+            <a:endParaRPr lang="en-US" sz="1100" dirty="0"/>
+          </a:p>
+        </p:txBody>
+      </p:sp>
+      <p:sp>
+        <p:nvSpPr>
+          <p:cNvPr id="6" name="Shape 4"/>
+          <p:cNvSpPr/>
+          <p:nvPr/>
+        </p:nvSpPr>
+        <p:spPr>
+          <a:xfrm>
+            <a:off x="365760" y="1298448"/>
+            <a:ext cx="8412480" cy="960120"/>
+          </a:xfrm>
+          <a:prstGeom prst="roundRect">
+            <a:avLst>
+              <a:gd name="adj" fmla="val 9524"/>
+            </a:avLst>
+          </a:prstGeom>
+          <a:solidFill>
+            <a:srgbClr val="FEF6E8"/>
+          </a:solidFill>
+          <a:ln w="19050">
+            <a:solidFill>
+              <a:srgbClr val="C7922C"/>
+            </a:solidFill>
+            <a:prstDash val="solid"/>
+          </a:ln>
+          <a:effectLst>
+            <a:outerShdw sx="100000" sy="100000" kx="0" ky="0" algn="bl" rotWithShape="0" blurRad="101600" dist="38100" dir="2700000">
+              <a:srgbClr val="000000">
+                <a:alpha val="12000"/>
+              </a:srgbClr>
+            </a:outerShdw>
+          </a:effectLst>
+        </p:spPr>
+      </p:sp>
+      <p:sp>
+        <p:nvSpPr>
+          <p:cNvPr id="7" name="Text 5"/>
+          <p:cNvSpPr/>
+          <p:nvPr/>
+        </p:nvSpPr>
+        <p:spPr>
+          <a:xfrm>
+            <a:off x="594360" y="1426464"/>
+            <a:ext cx="7955280" cy="704088"/>
+          </a:xfrm>
+          <a:prstGeom prst="rect">
+            <a:avLst/>
+          </a:prstGeom>
+          <a:noFill/>
+          <a:ln/>
+        </p:spPr>
+        <p:txBody>
+          <a:bodyPr wrap="square" lIns="0" tIns="0" rIns="0" bIns="0" rtlCol="0" anchor="ctr"/>
+          <a:lstStyle/>
+          <a:p>
+            <a:pPr indent="0" marL="0">
+              <a:buNone/>
+            </a:pPr>
+            <a:r>
+              <a:rPr lang="en-US" sz="1700" dirty="0">
+                <a:solidFill>
+                  <a:srgbClr val="1E293B"/>
+                </a:solidFill>
+                <a:latin typeface="Calibri" pitchFamily="34" charset="0"/>
+                <a:ea typeface="Calibri" pitchFamily="34" charset="-122"/>
+                <a:cs typeface="Calibri" pitchFamily="34" charset="-120"/>
+              </a:rPr>
+              <a:t>A closed syllable ends in a consonant, and that consonant shuts the vowel in so it stays short: nap, kin. Long words are often just two closed syllables stuck together: nap·kin.</a:t>
+            </a:r>
+            <a:endParaRPr lang="en-US" sz="1700" dirty="0"/>
+          </a:p>
+        </p:txBody>
+      </p:sp>
+      <p:sp>
+        <p:nvSpPr>
+          <p:cNvPr id="8" name="Text 6"/>
+          <p:cNvSpPr/>
+          <p:nvPr/>
+        </p:nvSpPr>
+        <p:spPr>
+          <a:xfrm>
+            <a:off x="365760" y="2395728"/>
+            <a:ext cx="8412480" cy="411480"/>
+          </a:xfrm>
+          <a:prstGeom prst="rect">
+            <a:avLst/>
+          </a:prstGeom>
+          <a:noFill/>
+          <a:ln/>
+        </p:spPr>
+        <p:txBody>
+          <a:bodyPr wrap="square" lIns="0" tIns="0" rIns="0" bIns="0" rtlCol="0" anchor="ctr"/>
+          <a:lstStyle/>
+          <a:p>
+            <a:pPr indent="0" marL="0">
+              <a:buNone/>
+            </a:pPr>
+            <a:r>
+              <a:rPr lang="en-US" sz="1400" i="1" dirty="0">
+                <a:solidFill>
+                  <a:srgbClr val="64748B"/>
+                </a:solidFill>
+                <a:latin typeface="Calibri" pitchFamily="34" charset="0"/>
+                <a:ea typeface="Calibri" pitchFamily="34" charset="-122"/>
+                <a:cs typeface="Calibri" pitchFamily="34" charset="-120"/>
+              </a:rPr>
+              <a:t>Sound Detective! One word in each row is two closed syllables. Say them out loud and listen for two short vowels.</a:t>
+            </a:r>
+            <a:endParaRPr lang="en-US" sz="1400" dirty="0"/>
+          </a:p>
+        </p:txBody>
+      </p:sp>
+      <p:sp>
+        <p:nvSpPr>
+          <p:cNvPr id="9" name="Shape 7"/>
+          <p:cNvSpPr/>
+          <p:nvPr/>
+        </p:nvSpPr>
+        <p:spPr>
+          <a:xfrm>
+            <a:off x="365760" y="2852928"/>
+            <a:ext cx="8412480" cy="438912"/>
+          </a:xfrm>
+          <a:prstGeom prst="roundRect">
+            <a:avLst>
+              <a:gd name="adj" fmla="val 20833"/>
+            </a:avLst>
+          </a:prstGeom>
+          <a:solidFill>
+            <a:srgbClr val="F8FAFC"/>
+          </a:solidFill>
+          <a:ln/>
+          <a:effectLst>
+            <a:outerShdw sx="100000" sy="100000" kx="0" ky="0" algn="bl" rotWithShape="0" blurRad="101600" dist="38100" dir="2700000">
+              <a:srgbClr val="000000">
+                <a:alpha val="12000"/>
+              </a:srgbClr>
+            </a:outerShdw>
+          </a:effectLst>
+        </p:spPr>
+      </p:sp>
+      <p:sp>
+        <p:nvSpPr>
+          <p:cNvPr id="10" name="Text 8"/>
+          <p:cNvSpPr/>
+          <p:nvPr/>
+        </p:nvSpPr>
+        <p:spPr>
+          <a:xfrm>
+            <a:off x="594360" y="2916936"/>
+            <a:ext cx="7863840" cy="310896"/>
+          </a:xfrm>
+          <a:prstGeom prst="rect">
+            <a:avLst/>
+          </a:prstGeom>
+          <a:noFill/>
+          <a:ln/>
+        </p:spPr>
+        <p:txBody>
+          <a:bodyPr wrap="square" lIns="0" tIns="0" rIns="0" bIns="0" rtlCol="0" anchor="ctr"/>
+          <a:lstStyle/>
+          <a:p>
+            <a:pPr indent="0" marL="0">
+              <a:buNone/>
+            </a:pPr>
+            <a:r>
+              <a:rPr lang="en-US" sz="1500" dirty="0">
+                <a:solidFill>
+                  <a:srgbClr val="1E293B"/>
+                </a:solidFill>
+                <a:latin typeface="Calibri" pitchFamily="34" charset="0"/>
+                <a:ea typeface="Calibri" pitchFamily="34" charset="-122"/>
+                <a:cs typeface="Calibri" pitchFamily="34" charset="-120"/>
+              </a:rPr>
+              <a:t>napkin     ·     </a:t>
+            </a:r>
+            <a:pPr indent="0" marL="0">
+              <a:buNone/>
+            </a:pPr>
+            <a:r>
+              <a:rPr lang="en-US" sz="1500" dirty="0">
+                <a:solidFill>
+                  <a:srgbClr val="1E293B"/>
+                </a:solidFill>
+                <a:latin typeface="Calibri" pitchFamily="34" charset="0"/>
+                <a:ea typeface="Calibri" pitchFamily="34" charset="-122"/>
+                <a:cs typeface="Calibri" pitchFamily="34" charset="-120"/>
+              </a:rPr>
+              <a:t>table     ·     </a:t>
+            </a:r>
+            <a:pPr indent="0" marL="0">
+              <a:buNone/>
+            </a:pPr>
+            <a:r>
+              <a:rPr lang="en-US" sz="1500" dirty="0">
+                <a:solidFill>
+                  <a:srgbClr val="1E293B"/>
+                </a:solidFill>
+                <a:latin typeface="Calibri" pitchFamily="34" charset="0"/>
+                <a:ea typeface="Calibri" pitchFamily="34" charset="-122"/>
+                <a:cs typeface="Calibri" pitchFamily="34" charset="-120"/>
+              </a:rPr>
+              <a:t>paper     ·     </a:t>
+            </a:r>
+            <a:pPr indent="0" marL="0">
+              <a:buNone/>
+            </a:pPr>
+            <a:r>
+              <a:rPr lang="en-US" sz="1500" dirty="0">
+                <a:solidFill>
+                  <a:srgbClr val="1E293B"/>
+                </a:solidFill>
+                <a:latin typeface="Calibri" pitchFamily="34" charset="0"/>
+                <a:ea typeface="Calibri" pitchFamily="34" charset="-122"/>
+                <a:cs typeface="Calibri" pitchFamily="34" charset="-120"/>
+              </a:rPr>
+              <a:t>tiger</a:t>
+            </a:r>
+            <a:endParaRPr lang="en-US" sz="1500" dirty="0"/>
+          </a:p>
+        </p:txBody>
+      </p:sp>
+      <p:sp>
+        <p:nvSpPr>
+          <p:cNvPr id="11" name="Shape 9"/>
+          <p:cNvSpPr/>
+          <p:nvPr/>
+        </p:nvSpPr>
+        <p:spPr>
+          <a:xfrm>
+            <a:off x="365760" y="3337560"/>
+            <a:ext cx="8412480" cy="438912"/>
+          </a:xfrm>
+          <a:prstGeom prst="roundRect">
+            <a:avLst>
+              <a:gd name="adj" fmla="val 20833"/>
+            </a:avLst>
+          </a:prstGeom>
+          <a:solidFill>
+            <a:srgbClr val="FFFFFF"/>
+          </a:solidFill>
+          <a:ln/>
+          <a:effectLst>
+            <a:outerShdw sx="100000" sy="100000" kx="0" ky="0" algn="bl" rotWithShape="0" blurRad="101600" dist="38100" dir="2700000">
+              <a:srgbClr val="000000">
+                <a:alpha val="12000"/>
+              </a:srgbClr>
+            </a:outerShdw>
+          </a:effectLst>
+        </p:spPr>
+      </p:sp>
+      <p:sp>
+        <p:nvSpPr>
+          <p:cNvPr id="12" name="Text 10"/>
+          <p:cNvSpPr/>
+          <p:nvPr/>
+        </p:nvSpPr>
+        <p:spPr>
+          <a:xfrm>
+            <a:off x="594360" y="3401568"/>
+            <a:ext cx="7863840" cy="310896"/>
+          </a:xfrm>
+          <a:prstGeom prst="rect">
+            <a:avLst/>
+          </a:prstGeom>
+          <a:noFill/>
+          <a:ln/>
+        </p:spPr>
+        <p:txBody>
+          <a:bodyPr wrap="square" lIns="0" tIns="0" rIns="0" bIns="0" rtlCol="0" anchor="ctr"/>
+          <a:lstStyle/>
+          <a:p>
+            <a:pPr indent="0" marL="0">
+              <a:buNone/>
+            </a:pPr>
+            <a:r>
+              <a:rPr lang="en-US" sz="1500" dirty="0">
+                <a:solidFill>
+                  <a:srgbClr val="1E293B"/>
+                </a:solidFill>
+                <a:latin typeface="Calibri" pitchFamily="34" charset="0"/>
+                <a:ea typeface="Calibri" pitchFamily="34" charset="-122"/>
+                <a:cs typeface="Calibri" pitchFamily="34" charset="-120"/>
+              </a:rPr>
+              <a:t>open     ·     </a:t>
+            </a:r>
+            <a:pPr indent="0" marL="0">
+              <a:buNone/>
+            </a:pPr>
+            <a:r>
+              <a:rPr lang="en-US" sz="1500" dirty="0">
+                <a:solidFill>
+                  <a:srgbClr val="1E293B"/>
+                </a:solidFill>
+                <a:latin typeface="Calibri" pitchFamily="34" charset="0"/>
+                <a:ea typeface="Calibri" pitchFamily="34" charset="-122"/>
+                <a:cs typeface="Calibri" pitchFamily="34" charset="-120"/>
+              </a:rPr>
+              <a:t>rabbit     ·     </a:t>
+            </a:r>
+            <a:pPr indent="0" marL="0">
+              <a:buNone/>
+            </a:pPr>
+            <a:r>
+              <a:rPr lang="en-US" sz="1500" dirty="0">
+                <a:solidFill>
+                  <a:srgbClr val="1E293B"/>
+                </a:solidFill>
+                <a:latin typeface="Calibri" pitchFamily="34" charset="0"/>
+                <a:ea typeface="Calibri" pitchFamily="34" charset="-122"/>
+                <a:cs typeface="Calibri" pitchFamily="34" charset="-120"/>
+              </a:rPr>
+              <a:t>baby     ·     </a:t>
+            </a:r>
+            <a:pPr indent="0" marL="0">
+              <a:buNone/>
+            </a:pPr>
+            <a:r>
+              <a:rPr lang="en-US" sz="1500" dirty="0">
+                <a:solidFill>
+                  <a:srgbClr val="1E293B"/>
+                </a:solidFill>
+                <a:latin typeface="Calibri" pitchFamily="34" charset="0"/>
+                <a:ea typeface="Calibri" pitchFamily="34" charset="-122"/>
+                <a:cs typeface="Calibri" pitchFamily="34" charset="-120"/>
+              </a:rPr>
+              <a:t>music</a:t>
+            </a:r>
+            <a:endParaRPr lang="en-US" sz="1500" dirty="0"/>
+          </a:p>
+        </p:txBody>
+      </p:sp>
+      <p:sp>
+        <p:nvSpPr>
+          <p:cNvPr id="13" name="Shape 11"/>
+          <p:cNvSpPr/>
+          <p:nvPr/>
+        </p:nvSpPr>
+        <p:spPr>
+          <a:xfrm>
+            <a:off x="365760" y="3822192"/>
+            <a:ext cx="8412480" cy="438912"/>
+          </a:xfrm>
+          <a:prstGeom prst="roundRect">
+            <a:avLst>
+              <a:gd name="adj" fmla="val 20833"/>
+            </a:avLst>
+          </a:prstGeom>
+          <a:solidFill>
+            <a:srgbClr val="F8FAFC"/>
+          </a:solidFill>
+          <a:ln/>
+          <a:effectLst>
+            <a:outerShdw sx="100000" sy="100000" kx="0" ky="0" algn="bl" rotWithShape="0" blurRad="101600" dist="38100" dir="2700000">
+              <a:srgbClr val="000000">
+                <a:alpha val="12000"/>
+              </a:srgbClr>
+            </a:outerShdw>
+          </a:effectLst>
+        </p:spPr>
+      </p:sp>
+      <p:sp>
+        <p:nvSpPr>
+          <p:cNvPr id="14" name="Text 12"/>
+          <p:cNvSpPr/>
+          <p:nvPr/>
+        </p:nvSpPr>
+        <p:spPr>
+          <a:xfrm>
+            <a:off x="594360" y="3886200"/>
+            <a:ext cx="7863840" cy="310896"/>
+          </a:xfrm>
+          <a:prstGeom prst="rect">
+            <a:avLst/>
+          </a:prstGeom>
+          <a:noFill/>
+          <a:ln/>
+        </p:spPr>
+        <p:txBody>
+          <a:bodyPr wrap="square" lIns="0" tIns="0" rIns="0" bIns="0" rtlCol="0" anchor="ctr"/>
+          <a:lstStyle/>
+          <a:p>
+            <a:pPr indent="0" marL="0">
+              <a:buNone/>
+            </a:pPr>
+            <a:r>
+              <a:rPr lang="en-US" sz="1500" dirty="0">
+                <a:solidFill>
+                  <a:srgbClr val="1E293B"/>
+                </a:solidFill>
+                <a:latin typeface="Calibri" pitchFamily="34" charset="0"/>
+                <a:ea typeface="Calibri" pitchFamily="34" charset="-122"/>
+                <a:cs typeface="Calibri" pitchFamily="34" charset="-120"/>
+              </a:rPr>
+              <a:t>robot     ·     </a:t>
+            </a:r>
+            <a:pPr indent="0" marL="0">
+              <a:buNone/>
+            </a:pPr>
+            <a:r>
+              <a:rPr lang="en-US" sz="1500" dirty="0">
+                <a:solidFill>
+                  <a:srgbClr val="1E293B"/>
+                </a:solidFill>
+                <a:latin typeface="Calibri" pitchFamily="34" charset="0"/>
+                <a:ea typeface="Calibri" pitchFamily="34" charset="-122"/>
+                <a:cs typeface="Calibri" pitchFamily="34" charset="-120"/>
+              </a:rPr>
+              <a:t>final     ·     </a:t>
+            </a:r>
+            <a:pPr indent="0" marL="0">
+              <a:buNone/>
+            </a:pPr>
+            <a:r>
+              <a:rPr lang="en-US" sz="1500" dirty="0">
+                <a:solidFill>
+                  <a:srgbClr val="1E293B"/>
+                </a:solidFill>
+                <a:latin typeface="Calibri" pitchFamily="34" charset="0"/>
+                <a:ea typeface="Calibri" pitchFamily="34" charset="-122"/>
+                <a:cs typeface="Calibri" pitchFamily="34" charset="-120"/>
+              </a:rPr>
+              <a:t>basket     ·     </a:t>
+            </a:r>
+            <a:pPr indent="0" marL="0">
+              <a:buNone/>
+            </a:pPr>
+            <a:r>
+              <a:rPr lang="en-US" sz="1500" dirty="0">
+                <a:solidFill>
+                  <a:srgbClr val="1E293B"/>
+                </a:solidFill>
+                <a:latin typeface="Calibri" pitchFamily="34" charset="0"/>
+                <a:ea typeface="Calibri" pitchFamily="34" charset="-122"/>
+                <a:cs typeface="Calibri" pitchFamily="34" charset="-120"/>
+              </a:rPr>
+              <a:t>lion</a:t>
+            </a:r>
+            <a:endParaRPr lang="en-US" sz="1500" dirty="0"/>
+          </a:p>
+        </p:txBody>
+      </p:sp>
+      <p:sp>
+        <p:nvSpPr>
+          <p:cNvPr id="15" name="Shape 13"/>
+          <p:cNvSpPr/>
+          <p:nvPr/>
+        </p:nvSpPr>
+        <p:spPr>
+          <a:xfrm>
+            <a:off x="365760" y="4306824"/>
+            <a:ext cx="8412480" cy="438912"/>
+          </a:xfrm>
+          <a:prstGeom prst="roundRect">
+            <a:avLst>
+              <a:gd name="adj" fmla="val 20833"/>
+            </a:avLst>
+          </a:prstGeom>
+          <a:solidFill>
+            <a:srgbClr val="FFFFFF"/>
+          </a:solidFill>
+          <a:ln/>
+          <a:effectLst>
+            <a:outerShdw sx="100000" sy="100000" kx="0" ky="0" algn="bl" rotWithShape="0" blurRad="101600" dist="38100" dir="2700000">
+              <a:srgbClr val="000000">
+                <a:alpha val="12000"/>
+              </a:srgbClr>
+            </a:outerShdw>
+          </a:effectLst>
+        </p:spPr>
+      </p:sp>
+      <p:sp>
+        <p:nvSpPr>
+          <p:cNvPr id="16" name="Text 14"/>
+          <p:cNvSpPr/>
+          <p:nvPr/>
+        </p:nvSpPr>
+        <p:spPr>
+          <a:xfrm>
+            <a:off x="594360" y="4370832"/>
+            <a:ext cx="7863840" cy="310896"/>
+          </a:xfrm>
+          <a:prstGeom prst="rect">
+            <a:avLst/>
+          </a:prstGeom>
+          <a:noFill/>
+          <a:ln/>
+        </p:spPr>
+        <p:txBody>
+          <a:bodyPr wrap="square" lIns="0" tIns="0" rIns="0" bIns="0" rtlCol="0" anchor="ctr"/>
+          <a:lstStyle/>
+          <a:p>
+            <a:pPr indent="0" marL="0">
+              <a:buNone/>
+            </a:pPr>
+            <a:r>
+              <a:rPr lang="en-US" sz="1500" dirty="0">
+                <a:solidFill>
+                  <a:srgbClr val="1E293B"/>
+                </a:solidFill>
+                <a:latin typeface="Calibri" pitchFamily="34" charset="0"/>
+                <a:ea typeface="Calibri" pitchFamily="34" charset="-122"/>
+                <a:cs typeface="Calibri" pitchFamily="34" charset="-120"/>
+              </a:rPr>
+              <a:t>silent     ·     </a:t>
+            </a:r>
+            <a:pPr indent="0" marL="0">
+              <a:buNone/>
+            </a:pPr>
+            <a:r>
+              <a:rPr lang="en-US" sz="1500" dirty="0">
+                <a:solidFill>
+                  <a:srgbClr val="1E293B"/>
+                </a:solidFill>
+                <a:latin typeface="Calibri" pitchFamily="34" charset="0"/>
+                <a:ea typeface="Calibri" pitchFamily="34" charset="-122"/>
+                <a:cs typeface="Calibri" pitchFamily="34" charset="-120"/>
+              </a:rPr>
+              <a:t>pilot     ·     </a:t>
+            </a:r>
+            <a:pPr indent="0" marL="0">
+              <a:buNone/>
+            </a:pPr>
+            <a:r>
+              <a:rPr lang="en-US" sz="1500" dirty="0">
+                <a:solidFill>
+                  <a:srgbClr val="1E293B"/>
+                </a:solidFill>
+                <a:latin typeface="Calibri" pitchFamily="34" charset="0"/>
+                <a:ea typeface="Calibri" pitchFamily="34" charset="-122"/>
+                <a:cs typeface="Calibri" pitchFamily="34" charset="-120"/>
+              </a:rPr>
+              <a:t>crazy     ·     </a:t>
+            </a:r>
+            <a:pPr indent="0" marL="0">
+              <a:buNone/>
+            </a:pPr>
+            <a:r>
+              <a:rPr lang="en-US" sz="1500" dirty="0">
+                <a:solidFill>
+                  <a:srgbClr val="1E293B"/>
+                </a:solidFill>
+                <a:latin typeface="Calibri" pitchFamily="34" charset="0"/>
+                <a:ea typeface="Calibri" pitchFamily="34" charset="-122"/>
+                <a:cs typeface="Calibri" pitchFamily="34" charset="-120"/>
+              </a:rPr>
+              <a:t>contest</a:t>
+            </a:r>
+            <a:endParaRPr lang="en-US" sz="1500" dirty="0"/>
+          </a:p>
+        </p:txBody>
+      </p:sp>
+    </p:spTree>
+  </p:cSld>
+  <p:clrMapOvr>
+    <a:masterClrMapping/>
+  </p:clrMapOvr>
+</p:sld>
+</file>
+
+<file path=ppt/slides/slide17.xml><?xml version="1.0" encoding="utf-8"?>
+<p:sld xmlns:a="http://schemas.openxmlformats.org/drawingml/2006/main" xmlns:r="http://schemas.openxmlformats.org/officeDocument/2006/relationships" xmlns:p="http://schemas.openxmlformats.org/presentationml/2006/main">
+  <p:cSld name="Slide 17">
+    <p:bg>
+      <p:bgPr>
+        <a:solidFill>
+          <a:srgbClr val="F8FAFC"/>
+        </a:solidFill>
+      </p:bgPr>
+    </p:bg>
+    <p:spTree>
+      <p:nvGrpSpPr>
+        <p:cNvPr id="1" name=""/>
+        <p:cNvGrpSpPr/>
+        <p:nvPr/>
+      </p:nvGrpSpPr>
+      <p:grpSpPr>
+        <a:xfrm>
+          <a:off x="0" y="0"/>
+          <a:ext cx="0" cy="0"/>
+          <a:chOff x="0" y="0"/>
+          <a:chExt cx="0" cy="0"/>
+        </a:xfrm>
+      </p:grpSpPr>
+      <p:sp>
+        <p:nvSpPr>
+          <p:cNvPr id="2" name="Shape 0"/>
+          <p:cNvSpPr/>
+          <p:nvPr/>
+        </p:nvSpPr>
+        <p:spPr>
+          <a:xfrm>
+            <a:off x="0" y="0"/>
+            <a:ext cx="9144000" cy="566928"/>
+          </a:xfrm>
+          <a:prstGeom prst="rect">
+            <a:avLst/>
+          </a:prstGeom>
+          <a:solidFill>
+            <a:srgbClr val="0E1C42"/>
+          </a:solidFill>
+          <a:ln/>
+        </p:spPr>
+      </p:sp>
+      <p:sp>
+        <p:nvSpPr>
+          <p:cNvPr id="3" name="Text 1"/>
+          <p:cNvSpPr/>
+          <p:nvPr/>
+        </p:nvSpPr>
+        <p:spPr>
+          <a:xfrm>
+            <a:off x="365760" y="54864"/>
+            <a:ext cx="8412480" cy="457200"/>
+          </a:xfrm>
+          <a:prstGeom prst="rect">
+            <a:avLst/>
+          </a:prstGeom>
+          <a:noFill/>
+          <a:ln/>
+        </p:spPr>
+        <p:txBody>
+          <a:bodyPr wrap="square" lIns="0" tIns="0" rIns="0" bIns="0" rtlCol="0" anchor="ctr"/>
+          <a:lstStyle/>
+          <a:p>
+            <a:pPr indent="0" marL="0">
+              <a:buNone/>
+            </a:pPr>
+            <a:r>
+              <a:rPr lang="en-US" sz="2200" b="1" dirty="0">
+                <a:solidFill>
+                  <a:srgbClr val="FFFFFF"/>
+                </a:solidFill>
+                <a:latin typeface="Calibri" pitchFamily="34" charset="0"/>
+                <a:ea typeface="Calibri" pitchFamily="34" charset="-122"/>
+                <a:cs typeface="Calibri" pitchFamily="34" charset="-120"/>
+              </a:rPr>
+              <a:t>🔠  Spelling</a:t>
+            </a:r>
+            <a:endParaRPr lang="en-US" sz="2200" dirty="0"/>
+          </a:p>
+        </p:txBody>
+      </p:sp>
+      <p:sp>
+        <p:nvSpPr>
+          <p:cNvPr id="4" name="Text 2"/>
+          <p:cNvSpPr/>
+          <p:nvPr/>
+        </p:nvSpPr>
+        <p:spPr>
+          <a:xfrm>
+            <a:off x="365760" y="777240"/>
+            <a:ext cx="8229600" cy="237744"/>
+          </a:xfrm>
+          <a:prstGeom prst="rect">
+            <a:avLst/>
+          </a:prstGeom>
+          <a:noFill/>
+          <a:ln/>
+        </p:spPr>
+        <p:txBody>
+          <a:bodyPr wrap="square" lIns="0" tIns="0" rIns="0" bIns="0" rtlCol="0" anchor="ctr"/>
+          <a:lstStyle/>
+          <a:p>
+            <a:pPr indent="0" marL="0">
+              <a:buNone/>
+            </a:pPr>
+            <a:r>
+              <a:rPr lang="en-US" sz="1100" b="1" spc="100" kern="0" dirty="0">
+                <a:solidFill>
+                  <a:srgbClr val="0E1C42"/>
+                </a:solidFill>
+                <a:latin typeface="Calibri" pitchFamily="34" charset="0"/>
+                <a:ea typeface="Calibri" pitchFamily="34" charset="-122"/>
+                <a:cs typeface="Calibri" pitchFamily="34" charset="-120"/>
+              </a:rPr>
+              <a:t>CLOSED SYLLABLES</a:t>
+            </a:r>
+            <a:endParaRPr lang="en-US" sz="1100" dirty="0"/>
+          </a:p>
+        </p:txBody>
+      </p:sp>
+      <p:sp>
+        <p:nvSpPr>
+          <p:cNvPr id="5" name="Text 3"/>
+          <p:cNvSpPr/>
+          <p:nvPr/>
+        </p:nvSpPr>
+        <p:spPr>
+          <a:xfrm>
+            <a:off x="365760" y="1051560"/>
+            <a:ext cx="8229600" cy="237744"/>
+          </a:xfrm>
+          <a:prstGeom prst="rect">
+            <a:avLst/>
+          </a:prstGeom>
+          <a:noFill/>
+          <a:ln/>
+        </p:spPr>
+        <p:txBody>
+          <a:bodyPr wrap="square" lIns="0" tIns="0" rIns="0" bIns="0" rtlCol="0" anchor="ctr"/>
+          <a:lstStyle/>
+          <a:p>
+            <a:pPr indent="0" marL="0">
+              <a:buNone/>
+            </a:pPr>
+            <a:r>
+              <a:rPr lang="en-US" sz="1100" b="1" spc="100" kern="0" dirty="0">
+                <a:solidFill>
+                  <a:srgbClr val="C7922C"/>
+                </a:solidFill>
+                <a:latin typeface="Calibri" pitchFamily="34" charset="0"/>
+                <a:ea typeface="Calibri" pitchFamily="34" charset="-122"/>
+                <a:cs typeface="Calibri" pitchFamily="34" charset="-120"/>
+              </a:rPr>
+              <a:t>📖  THE RULE</a:t>
+            </a:r>
+            <a:endParaRPr lang="en-US" sz="1100" dirty="0"/>
+          </a:p>
+        </p:txBody>
+      </p:sp>
+      <p:sp>
+        <p:nvSpPr>
+          <p:cNvPr id="6" name="Shape 4"/>
+          <p:cNvSpPr/>
+          <p:nvPr/>
+        </p:nvSpPr>
+        <p:spPr>
+          <a:xfrm>
+            <a:off x="365760" y="1298448"/>
+            <a:ext cx="8412480" cy="960120"/>
+          </a:xfrm>
+          <a:prstGeom prst="roundRect">
+            <a:avLst>
+              <a:gd name="adj" fmla="val 9524"/>
+            </a:avLst>
+          </a:prstGeom>
+          <a:solidFill>
+            <a:srgbClr val="FEF6E8"/>
+          </a:solidFill>
+          <a:ln w="19050">
+            <a:solidFill>
+              <a:srgbClr val="C7922C"/>
+            </a:solidFill>
+            <a:prstDash val="solid"/>
+          </a:ln>
+          <a:effectLst>
+            <a:outerShdw sx="100000" sy="100000" kx="0" ky="0" algn="bl" rotWithShape="0" blurRad="101600" dist="38100" dir="2700000">
+              <a:srgbClr val="000000">
+                <a:alpha val="12000"/>
+              </a:srgbClr>
+            </a:outerShdw>
+          </a:effectLst>
+        </p:spPr>
+      </p:sp>
+      <p:sp>
+        <p:nvSpPr>
+          <p:cNvPr id="7" name="Text 5"/>
+          <p:cNvSpPr/>
+          <p:nvPr/>
+        </p:nvSpPr>
+        <p:spPr>
+          <a:xfrm>
+            <a:off x="594360" y="1426464"/>
+            <a:ext cx="7955280" cy="704088"/>
+          </a:xfrm>
+          <a:prstGeom prst="rect">
+            <a:avLst/>
+          </a:prstGeom>
+          <a:noFill/>
+          <a:ln/>
+        </p:spPr>
+        <p:txBody>
+          <a:bodyPr wrap="square" lIns="0" tIns="0" rIns="0" bIns="0" rtlCol="0" anchor="ctr"/>
+          <a:lstStyle/>
+          <a:p>
+            <a:pPr indent="0" marL="0">
+              <a:buNone/>
+            </a:pPr>
+            <a:r>
+              <a:rPr lang="en-US" sz="1700" dirty="0">
+                <a:solidFill>
+                  <a:srgbClr val="1E293B"/>
+                </a:solidFill>
+                <a:latin typeface="Calibri" pitchFamily="34" charset="0"/>
+                <a:ea typeface="Calibri" pitchFamily="34" charset="-122"/>
+                <a:cs typeface="Calibri" pitchFamily="34" charset="-120"/>
+              </a:rPr>
+              <a:t>A closed syllable ends in a consonant, and that consonant shuts the vowel in so it stays short: nap, kin. Long words are often just two closed syllables stuck together: nap·kin.</a:t>
+            </a:r>
+            <a:endParaRPr lang="en-US" sz="1700" dirty="0"/>
+          </a:p>
+        </p:txBody>
+      </p:sp>
+      <p:sp>
+        <p:nvSpPr>
+          <p:cNvPr id="8" name="Text 6"/>
+          <p:cNvSpPr/>
+          <p:nvPr/>
+        </p:nvSpPr>
+        <p:spPr>
+          <a:xfrm>
+            <a:off x="365760" y="2395728"/>
+            <a:ext cx="8412480" cy="411480"/>
+          </a:xfrm>
+          <a:prstGeom prst="rect">
+            <a:avLst/>
+          </a:prstGeom>
+          <a:noFill/>
+          <a:ln/>
+        </p:spPr>
+        <p:txBody>
+          <a:bodyPr wrap="square" lIns="0" tIns="0" rIns="0" bIns="0" rtlCol="0" anchor="ctr"/>
+          <a:lstStyle/>
+          <a:p>
+            <a:pPr indent="0" marL="0">
+              <a:buNone/>
+            </a:pPr>
+            <a:r>
+              <a:rPr lang="en-US" sz="1400" i="1" dirty="0">
+                <a:solidFill>
+                  <a:srgbClr val="64748B"/>
+                </a:solidFill>
+                <a:latin typeface="Calibri" pitchFamily="34" charset="0"/>
+                <a:ea typeface="Calibri" pitchFamily="34" charset="-122"/>
+                <a:cs typeface="Calibri" pitchFamily="34" charset="-120"/>
+              </a:rPr>
+              <a:t>Sound Detective! One word in each row is two closed syllables. Say them out loud and listen for two short vowels.</a:t>
+            </a:r>
+            <a:endParaRPr lang="en-US" sz="1400" dirty="0"/>
+          </a:p>
+        </p:txBody>
+      </p:sp>
+      <p:sp>
+        <p:nvSpPr>
+          <p:cNvPr id="9" name="Shape 7"/>
+          <p:cNvSpPr/>
+          <p:nvPr/>
+        </p:nvSpPr>
+        <p:spPr>
+          <a:xfrm>
+            <a:off x="365760" y="2852928"/>
+            <a:ext cx="8412480" cy="438912"/>
+          </a:xfrm>
+          <a:prstGeom prst="roundRect">
+            <a:avLst>
+              <a:gd name="adj" fmla="val 20833"/>
+            </a:avLst>
+          </a:prstGeom>
+          <a:solidFill>
+            <a:srgbClr val="F8FAFC"/>
+          </a:solidFill>
+          <a:ln/>
+          <a:effectLst>
+            <a:outerShdw sx="100000" sy="100000" kx="0" ky="0" algn="bl" rotWithShape="0" blurRad="101600" dist="38100" dir="2700000">
+              <a:srgbClr val="000000">
+                <a:alpha val="12000"/>
+              </a:srgbClr>
+            </a:outerShdw>
+          </a:effectLst>
+        </p:spPr>
+      </p:sp>
+      <p:sp>
+        <p:nvSpPr>
+          <p:cNvPr id="10" name="Text 8"/>
+          <p:cNvSpPr/>
+          <p:nvPr/>
+        </p:nvSpPr>
+        <p:spPr>
+          <a:xfrm>
+            <a:off x="594360" y="2916936"/>
+            <a:ext cx="7863840" cy="310896"/>
+          </a:xfrm>
+          <a:prstGeom prst="rect">
+            <a:avLst/>
+          </a:prstGeom>
+          <a:noFill/>
+          <a:ln/>
+        </p:spPr>
+        <p:txBody>
+          <a:bodyPr wrap="square" lIns="0" tIns="0" rIns="0" bIns="0" rtlCol="0" anchor="ctr"/>
+          <a:lstStyle/>
+          <a:p>
+            <a:pPr indent="0" marL="0">
+              <a:buNone/>
+            </a:pPr>
+            <a:r>
+              <a:rPr lang="en-US" sz="1500" b="1" dirty="0">
+                <a:solidFill>
+                  <a:srgbClr val="34B76F"/>
+                </a:solidFill>
+                <a:latin typeface="Calibri" pitchFamily="34" charset="0"/>
+                <a:ea typeface="Calibri" pitchFamily="34" charset="-122"/>
+                <a:cs typeface="Calibri" pitchFamily="34" charset="-120"/>
+              </a:rPr>
+              <a:t>napkin     ·     </a:t>
+            </a:r>
+            <a:pPr indent="0" marL="0">
+              <a:buNone/>
+            </a:pPr>
+            <a:r>
+              <a:rPr lang="en-US" sz="1500" dirty="0">
+                <a:solidFill>
+                  <a:srgbClr val="1E293B"/>
+                </a:solidFill>
+                <a:latin typeface="Calibri" pitchFamily="34" charset="0"/>
+                <a:ea typeface="Calibri" pitchFamily="34" charset="-122"/>
+                <a:cs typeface="Calibri" pitchFamily="34" charset="-120"/>
+              </a:rPr>
+              <a:t>table     ·     </a:t>
+            </a:r>
+            <a:pPr indent="0" marL="0">
+              <a:buNone/>
+            </a:pPr>
+            <a:r>
+              <a:rPr lang="en-US" sz="1500" dirty="0">
+                <a:solidFill>
+                  <a:srgbClr val="1E293B"/>
+                </a:solidFill>
+                <a:latin typeface="Calibri" pitchFamily="34" charset="0"/>
+                <a:ea typeface="Calibri" pitchFamily="34" charset="-122"/>
+                <a:cs typeface="Calibri" pitchFamily="34" charset="-120"/>
+              </a:rPr>
+              <a:t>paper     ·     </a:t>
+            </a:r>
+            <a:pPr indent="0" marL="0">
+              <a:buNone/>
+            </a:pPr>
+            <a:r>
+              <a:rPr lang="en-US" sz="1500" dirty="0">
+                <a:solidFill>
+                  <a:srgbClr val="1E293B"/>
+                </a:solidFill>
+                <a:latin typeface="Calibri" pitchFamily="34" charset="0"/>
+                <a:ea typeface="Calibri" pitchFamily="34" charset="-122"/>
+                <a:cs typeface="Calibri" pitchFamily="34" charset="-120"/>
+              </a:rPr>
+              <a:t>tiger</a:t>
+            </a:r>
+            <a:endParaRPr lang="en-US" sz="1500" dirty="0"/>
+          </a:p>
+        </p:txBody>
+      </p:sp>
+      <p:sp>
+        <p:nvSpPr>
+          <p:cNvPr id="11" name="Shape 9"/>
+          <p:cNvSpPr/>
+          <p:nvPr/>
+        </p:nvSpPr>
+        <p:spPr>
+          <a:xfrm>
+            <a:off x="365760" y="3337560"/>
+            <a:ext cx="8412480" cy="438912"/>
+          </a:xfrm>
+          <a:prstGeom prst="roundRect">
+            <a:avLst>
+              <a:gd name="adj" fmla="val 20833"/>
+            </a:avLst>
+          </a:prstGeom>
+          <a:solidFill>
+            <a:srgbClr val="FFFFFF"/>
+          </a:solidFill>
+          <a:ln/>
+          <a:effectLst>
+            <a:outerShdw sx="100000" sy="100000" kx="0" ky="0" algn="bl" rotWithShape="0" blurRad="101600" dist="38100" dir="2700000">
+              <a:srgbClr val="000000">
+                <a:alpha val="12000"/>
+              </a:srgbClr>
+            </a:outerShdw>
+          </a:effectLst>
+        </p:spPr>
+      </p:sp>
+      <p:sp>
+        <p:nvSpPr>
+          <p:cNvPr id="12" name="Text 10"/>
+          <p:cNvSpPr/>
+          <p:nvPr/>
+        </p:nvSpPr>
+        <p:spPr>
+          <a:xfrm>
+            <a:off x="594360" y="3401568"/>
+            <a:ext cx="7863840" cy="310896"/>
+          </a:xfrm>
+          <a:prstGeom prst="rect">
+            <a:avLst/>
+          </a:prstGeom>
+          <a:noFill/>
+          <a:ln/>
+        </p:spPr>
+        <p:txBody>
+          <a:bodyPr wrap="square" lIns="0" tIns="0" rIns="0" bIns="0" rtlCol="0" anchor="ctr"/>
+          <a:lstStyle/>
+          <a:p>
+            <a:pPr indent="0" marL="0">
+              <a:buNone/>
+            </a:pPr>
+            <a:r>
+              <a:rPr lang="en-US" sz="1500" dirty="0">
+                <a:solidFill>
+                  <a:srgbClr val="1E293B"/>
+                </a:solidFill>
+                <a:latin typeface="Calibri" pitchFamily="34" charset="0"/>
+                <a:ea typeface="Calibri" pitchFamily="34" charset="-122"/>
+                <a:cs typeface="Calibri" pitchFamily="34" charset="-120"/>
+              </a:rPr>
+              <a:t>open     ·     </a:t>
+            </a:r>
+            <a:pPr indent="0" marL="0">
+              <a:buNone/>
+            </a:pPr>
+            <a:r>
+              <a:rPr lang="en-US" sz="1500" b="1" dirty="0">
+                <a:solidFill>
+                  <a:srgbClr val="34B76F"/>
+                </a:solidFill>
+                <a:latin typeface="Calibri" pitchFamily="34" charset="0"/>
+                <a:ea typeface="Calibri" pitchFamily="34" charset="-122"/>
+                <a:cs typeface="Calibri" pitchFamily="34" charset="-120"/>
+              </a:rPr>
+              <a:t>rabbit     ·     </a:t>
+            </a:r>
+            <a:pPr indent="0" marL="0">
+              <a:buNone/>
+            </a:pPr>
+            <a:r>
+              <a:rPr lang="en-US" sz="1500" dirty="0">
+                <a:solidFill>
+                  <a:srgbClr val="1E293B"/>
+                </a:solidFill>
+                <a:latin typeface="Calibri" pitchFamily="34" charset="0"/>
+                <a:ea typeface="Calibri" pitchFamily="34" charset="-122"/>
+                <a:cs typeface="Calibri" pitchFamily="34" charset="-120"/>
+              </a:rPr>
+              <a:t>baby     ·     </a:t>
+            </a:r>
+            <a:pPr indent="0" marL="0">
+              <a:buNone/>
+            </a:pPr>
+            <a:r>
+              <a:rPr lang="en-US" sz="1500" dirty="0">
+                <a:solidFill>
+                  <a:srgbClr val="1E293B"/>
+                </a:solidFill>
+                <a:latin typeface="Calibri" pitchFamily="34" charset="0"/>
+                <a:ea typeface="Calibri" pitchFamily="34" charset="-122"/>
+                <a:cs typeface="Calibri" pitchFamily="34" charset="-120"/>
+              </a:rPr>
+              <a:t>music</a:t>
+            </a:r>
+            <a:endParaRPr lang="en-US" sz="1500" dirty="0"/>
+          </a:p>
+        </p:txBody>
+      </p:sp>
+      <p:sp>
+        <p:nvSpPr>
+          <p:cNvPr id="13" name="Shape 11"/>
+          <p:cNvSpPr/>
+          <p:nvPr/>
+        </p:nvSpPr>
+        <p:spPr>
+          <a:xfrm>
+            <a:off x="365760" y="3822192"/>
+            <a:ext cx="8412480" cy="438912"/>
+          </a:xfrm>
+          <a:prstGeom prst="roundRect">
+            <a:avLst>
+              <a:gd name="adj" fmla="val 20833"/>
+            </a:avLst>
+          </a:prstGeom>
+          <a:solidFill>
+            <a:srgbClr val="F8FAFC"/>
+          </a:solidFill>
+          <a:ln/>
+          <a:effectLst>
+            <a:outerShdw sx="100000" sy="100000" kx="0" ky="0" algn="bl" rotWithShape="0" blurRad="101600" dist="38100" dir="2700000">
+              <a:srgbClr val="000000">
+                <a:alpha val="12000"/>
+              </a:srgbClr>
+            </a:outerShdw>
+          </a:effectLst>
+        </p:spPr>
+      </p:sp>
+      <p:sp>
+        <p:nvSpPr>
+          <p:cNvPr id="14" name="Text 12"/>
+          <p:cNvSpPr/>
+          <p:nvPr/>
+        </p:nvSpPr>
+        <p:spPr>
+          <a:xfrm>
+            <a:off x="594360" y="3886200"/>
+            <a:ext cx="7863840" cy="310896"/>
+          </a:xfrm>
+          <a:prstGeom prst="rect">
+            <a:avLst/>
+          </a:prstGeom>
+          <a:noFill/>
+          <a:ln/>
+        </p:spPr>
+        <p:txBody>
+          <a:bodyPr wrap="square" lIns="0" tIns="0" rIns="0" bIns="0" rtlCol="0" anchor="ctr"/>
+          <a:lstStyle/>
+          <a:p>
+            <a:pPr indent="0" marL="0">
+              <a:buNone/>
+            </a:pPr>
+            <a:r>
+              <a:rPr lang="en-US" sz="1500" dirty="0">
+                <a:solidFill>
+                  <a:srgbClr val="1E293B"/>
+                </a:solidFill>
+                <a:latin typeface="Calibri" pitchFamily="34" charset="0"/>
+                <a:ea typeface="Calibri" pitchFamily="34" charset="-122"/>
+                <a:cs typeface="Calibri" pitchFamily="34" charset="-120"/>
+              </a:rPr>
+              <a:t>robot     ·     </a:t>
+            </a:r>
+            <a:pPr indent="0" marL="0">
+              <a:buNone/>
+            </a:pPr>
+            <a:r>
+              <a:rPr lang="en-US" sz="1500" dirty="0">
+                <a:solidFill>
+                  <a:srgbClr val="1E293B"/>
+                </a:solidFill>
+                <a:latin typeface="Calibri" pitchFamily="34" charset="0"/>
+                <a:ea typeface="Calibri" pitchFamily="34" charset="-122"/>
+                <a:cs typeface="Calibri" pitchFamily="34" charset="-120"/>
+              </a:rPr>
+              <a:t>final     ·     </a:t>
+            </a:r>
+            <a:pPr indent="0" marL="0">
+              <a:buNone/>
+            </a:pPr>
+            <a:r>
+              <a:rPr lang="en-US" sz="1500" b="1" dirty="0">
+                <a:solidFill>
+                  <a:srgbClr val="34B76F"/>
+                </a:solidFill>
+                <a:latin typeface="Calibri" pitchFamily="34" charset="0"/>
+                <a:ea typeface="Calibri" pitchFamily="34" charset="-122"/>
+                <a:cs typeface="Calibri" pitchFamily="34" charset="-120"/>
+              </a:rPr>
+              <a:t>basket     ·     </a:t>
+            </a:r>
+            <a:pPr indent="0" marL="0">
+              <a:buNone/>
+            </a:pPr>
+            <a:r>
+              <a:rPr lang="en-US" sz="1500" dirty="0">
+                <a:solidFill>
+                  <a:srgbClr val="1E293B"/>
+                </a:solidFill>
+                <a:latin typeface="Calibri" pitchFamily="34" charset="0"/>
+                <a:ea typeface="Calibri" pitchFamily="34" charset="-122"/>
+                <a:cs typeface="Calibri" pitchFamily="34" charset="-120"/>
+              </a:rPr>
+              <a:t>lion</a:t>
+            </a:r>
+            <a:endParaRPr lang="en-US" sz="1500" dirty="0"/>
+          </a:p>
+        </p:txBody>
+      </p:sp>
+      <p:sp>
+        <p:nvSpPr>
+          <p:cNvPr id="15" name="Shape 13"/>
+          <p:cNvSpPr/>
+          <p:nvPr/>
+        </p:nvSpPr>
+        <p:spPr>
+          <a:xfrm>
+            <a:off x="365760" y="4306824"/>
+            <a:ext cx="8412480" cy="438912"/>
+          </a:xfrm>
+          <a:prstGeom prst="roundRect">
+            <a:avLst>
+              <a:gd name="adj" fmla="val 20833"/>
+            </a:avLst>
+          </a:prstGeom>
+          <a:solidFill>
+            <a:srgbClr val="FFFFFF"/>
+          </a:solidFill>
+          <a:ln/>
+          <a:effectLst>
+            <a:outerShdw sx="100000" sy="100000" kx="0" ky="0" algn="bl" rotWithShape="0" blurRad="101600" dist="38100" dir="2700000">
+              <a:srgbClr val="000000">
+                <a:alpha val="12000"/>
+              </a:srgbClr>
+            </a:outerShdw>
+          </a:effectLst>
+        </p:spPr>
+      </p:sp>
+      <p:sp>
+        <p:nvSpPr>
+          <p:cNvPr id="16" name="Text 14"/>
+          <p:cNvSpPr/>
+          <p:nvPr/>
+        </p:nvSpPr>
+        <p:spPr>
+          <a:xfrm>
+            <a:off x="594360" y="4370832"/>
+            <a:ext cx="7863840" cy="310896"/>
+          </a:xfrm>
+          <a:prstGeom prst="rect">
+            <a:avLst/>
+          </a:prstGeom>
+          <a:noFill/>
+          <a:ln/>
+        </p:spPr>
+        <p:txBody>
+          <a:bodyPr wrap="square" lIns="0" tIns="0" rIns="0" bIns="0" rtlCol="0" anchor="ctr"/>
+          <a:lstStyle/>
+          <a:p>
+            <a:pPr indent="0" marL="0">
+              <a:buNone/>
+            </a:pPr>
+            <a:r>
+              <a:rPr lang="en-US" sz="1500" dirty="0">
+                <a:solidFill>
+                  <a:srgbClr val="1E293B"/>
+                </a:solidFill>
+                <a:latin typeface="Calibri" pitchFamily="34" charset="0"/>
+                <a:ea typeface="Calibri" pitchFamily="34" charset="-122"/>
+                <a:cs typeface="Calibri" pitchFamily="34" charset="-120"/>
+              </a:rPr>
+              <a:t>silent     ·     </a:t>
+            </a:r>
+            <a:pPr indent="0" marL="0">
+              <a:buNone/>
+            </a:pPr>
+            <a:r>
+              <a:rPr lang="en-US" sz="1500" dirty="0">
+                <a:solidFill>
+                  <a:srgbClr val="1E293B"/>
+                </a:solidFill>
+                <a:latin typeface="Calibri" pitchFamily="34" charset="0"/>
+                <a:ea typeface="Calibri" pitchFamily="34" charset="-122"/>
+                <a:cs typeface="Calibri" pitchFamily="34" charset="-120"/>
+              </a:rPr>
+              <a:t>pilot     ·     </a:t>
+            </a:r>
+            <a:pPr indent="0" marL="0">
+              <a:buNone/>
+            </a:pPr>
+            <a:r>
+              <a:rPr lang="en-US" sz="1500" dirty="0">
+                <a:solidFill>
+                  <a:srgbClr val="1E293B"/>
+                </a:solidFill>
+                <a:latin typeface="Calibri" pitchFamily="34" charset="0"/>
+                <a:ea typeface="Calibri" pitchFamily="34" charset="-122"/>
+                <a:cs typeface="Calibri" pitchFamily="34" charset="-120"/>
+              </a:rPr>
+              <a:t>crazy     ·     </a:t>
+            </a:r>
+            <a:pPr indent="0" marL="0">
+              <a:buNone/>
+            </a:pPr>
+            <a:r>
+              <a:rPr lang="en-US" sz="1500" b="1" dirty="0">
+                <a:solidFill>
+                  <a:srgbClr val="34B76F"/>
+                </a:solidFill>
+                <a:latin typeface="Calibri" pitchFamily="34" charset="0"/>
+                <a:ea typeface="Calibri" pitchFamily="34" charset="-122"/>
+                <a:cs typeface="Calibri" pitchFamily="34" charset="-120"/>
+              </a:rPr>
+              <a:t>contest</a:t>
+            </a:r>
+            <a:endParaRPr lang="en-US" sz="1500" dirty="0"/>
+          </a:p>
+        </p:txBody>
+      </p:sp>
+      <p:sp>
+        <p:nvSpPr>
+          <p:cNvPr id="17" name="Text 15"/>
+          <p:cNvSpPr/>
+          <p:nvPr/>
+        </p:nvSpPr>
+        <p:spPr>
+          <a:xfrm>
+            <a:off x="365760" y="4809744"/>
+            <a:ext cx="8412480" cy="274320"/>
+          </a:xfrm>
+          <a:prstGeom prst="rect">
+            <a:avLst/>
+          </a:prstGeom>
+          <a:noFill/>
+          <a:ln/>
+        </p:spPr>
+        <p:txBody>
+          <a:bodyPr wrap="square" lIns="0" tIns="0" rIns="0" bIns="0" rtlCol="0" anchor="ctr"/>
+          <a:lstStyle/>
+          <a:p>
+            <a:pPr indent="0" marL="0">
+              <a:buNone/>
+            </a:pPr>
+            <a:r>
+              <a:rPr lang="en-US" sz="1300" b="1" dirty="0">
+                <a:solidFill>
+                  <a:srgbClr val="34B76F"/>
+                </a:solidFill>
+                <a:latin typeface="Calibri" pitchFamily="34" charset="0"/>
+                <a:ea typeface="Calibri" pitchFamily="34" charset="-122"/>
+                <a:cs typeface="Calibri" pitchFamily="34" charset="-120"/>
+              </a:rPr>
+              <a:t>✅  Answers revealed</a:t>
+            </a:r>
+            <a:endParaRPr lang="en-US" sz="1300" dirty="0"/>
+          </a:p>
+        </p:txBody>
+      </p:sp>
+    </p:spTree>
+  </p:cSld>
+  <p:clrMapOvr>
+    <a:masterClrMapping/>
+  </p:clrMapOvr>
+</p:sld>
+</file>
+
+<file path=ppt/slides/slide18.xml><?xml version="1.0" encoding="utf-8"?>
+<p:sld xmlns:a="http://schemas.openxmlformats.org/drawingml/2006/main" xmlns:r="http://schemas.openxmlformats.org/officeDocument/2006/relationships" xmlns:p="http://schemas.openxmlformats.org/presentationml/2006/main">
+  <p:cSld name="Slide 18">
     <p:bg>
       <p:bgPr>
         <a:solidFill>
@@ -4919,9 +7552,9 @@
 </p:sld>
 </file>
 
-<file path=ppt/slides/slide16.xml><?xml version="1.0" encoding="utf-8"?>
+<file path=ppt/slides/slide19.xml><?xml version="1.0" encoding="utf-8"?>
 <p:sld xmlns:a="http://schemas.openxmlformats.org/drawingml/2006/main" xmlns:r="http://schemas.openxmlformats.org/officeDocument/2006/relationships" xmlns:p="http://schemas.openxmlformats.org/presentationml/2006/main">
-  <p:cSld name="Slide 16">
+  <p:cSld name="Slide 19">
     <p:bg>
       <p:bgPr>
         <a:solidFill>
@@ -6459,7 +9092,7 @@
                 <a:ea typeface="Calibri" pitchFamily="34" charset="-122"/>
                 <a:cs typeface="Calibri" pitchFamily="34" charset="-120"/>
               </a:rPr>
-              <a:t>Good readers look for theme clues . A theme is a lesson the whole story teaches.</a:t>
+              <a:t>Good readers look for theme clues. A theme is a lesson the whole story teaches.</a:t>
             </a:r>
             <a:endParaRPr lang="en-US" sz="1500" dirty="0"/>
           </a:p>
@@ -6479,7 +9112,7 @@
     <p:bg>
       <p:bgPr>
         <a:solidFill>
-          <a:srgbClr val="F8FAFC"/>
+          <a:srgbClr val="FFFFFF"/>
         </a:solidFill>
       </p:bgPr>
     </p:bg>
@@ -6564,7 +9197,7 @@
         </p:nvSpPr>
         <p:spPr>
           <a:xfrm>
-            <a:off x="365760" y="749808"/>
+            <a:off x="365760" y="804672"/>
             <a:ext cx="8229600" cy="237744"/>
           </a:xfrm>
           <a:prstGeom prst="rect">
@@ -6589,7 +9222,7 @@
                 <a:ea typeface="Calibri" pitchFamily="34" charset="-122"/>
                 <a:cs typeface="Calibri" pitchFamily="34" charset="-120"/>
               </a:rPr>
-              <a:t>FIX THESE SENTENCES</a:t>
+              <a:t>CORRECT MODEL — STUDY WHAT IS RIGHT</a:t>
             </a:r>
             <a:endParaRPr lang="en-US" sz="1100" dirty="0"/>
           </a:p>
@@ -6603,16 +9236,16 @@
         </p:nvSpPr>
         <p:spPr>
           <a:xfrm>
-            <a:off x="365760" y="1024128"/>
-            <a:ext cx="8412480" cy="777240"/>
+            <a:off x="365760" y="1078992"/>
+            <a:ext cx="8412480" cy="822960"/>
           </a:xfrm>
           <a:prstGeom prst="roundRect">
             <a:avLst>
-              <a:gd name="adj" fmla="val 11765"/>
+              <a:gd name="adj" fmla="val 11111"/>
             </a:avLst>
           </a:prstGeom>
           <a:solidFill>
-            <a:srgbClr val="FFFFFF"/>
+            <a:srgbClr val="E5F7FC"/>
           </a:solidFill>
           <a:ln w="19050">
             <a:solidFill>
@@ -6637,8 +9270,8 @@
         </p:nvSpPr>
         <p:spPr>
           <a:xfrm>
-            <a:off x="594360" y="1152144"/>
-            <a:ext cx="7955280" cy="521208"/>
+            <a:off x="594360" y="1207008"/>
+            <a:ext cx="7955280" cy="566928"/>
           </a:xfrm>
           <a:prstGeom prst="rect">
             <a:avLst/>
@@ -6662,7 +9295,7 @@
                 <a:ea typeface="Calibri" pitchFamily="34" charset="-122"/>
                 <a:cs typeface="Calibri" pitchFamily="34" charset="-120"/>
               </a:rPr>
-              <a:t>1. roscuro finally got what he had wanted most in the world but it tasted different than he expected</a:t>
+              <a:t>Roscuro reached the light at last, but the light did not make him happy.</a:t>
             </a:r>
             <a:endParaRPr lang="en-US" sz="1700" dirty="0"/>
           </a:p>
@@ -6670,37 +9303,42 @@
       </p:sp>
       <p:sp>
         <p:nvSpPr>
-          <p:cNvPr id="7" name="Shape 5"/>
-          <p:cNvSpPr/>
-          <p:nvPr/>
-        </p:nvSpPr>
-        <p:spPr>
-          <a:xfrm>
-            <a:off x="365760" y="1874520"/>
-            <a:ext cx="8412480" cy="777240"/>
-          </a:xfrm>
-          <a:prstGeom prst="roundRect">
-            <a:avLst>
-              <a:gd name="adj" fmla="val 11765"/>
-            </a:avLst>
-          </a:prstGeom>
-          <a:solidFill>
-            <a:srgbClr val="FFFFFF"/>
-          </a:solidFill>
-          <a:ln w="19050">
-            <a:solidFill>
-              <a:srgbClr val="55C8E8"/>
-            </a:solidFill>
-            <a:prstDash val="solid"/>
-          </a:ln>
-          <a:effectLst>
-            <a:outerShdw sx="100000" sy="100000" kx="0" ky="0" algn="bl" rotWithShape="0" blurRad="101600" dist="38100" dir="2700000">
-              <a:srgbClr val="000000">
-                <a:alpha val="12000"/>
-              </a:srgbClr>
-            </a:outerShdw>
-          </a:effectLst>
-        </p:spPr>
+          <p:cNvPr id="7" name="Text 5"/>
+          <p:cNvSpPr/>
+          <p:nvPr/>
+        </p:nvSpPr>
+        <p:spPr>
+          <a:xfrm>
+            <a:off x="365760" y="2103120"/>
+            <a:ext cx="8229600" cy="237744"/>
+          </a:xfrm>
+          <a:prstGeom prst="rect">
+            <a:avLst/>
+          </a:prstGeom>
+          <a:noFill/>
+          <a:ln/>
+        </p:spPr>
+        <p:txBody>
+          <a:bodyPr wrap="square" lIns="0" tIns="0" rIns="0" bIns="0" rtlCol="0" anchor="ctr"/>
+          <a:lstStyle/>
+          <a:p>
+            <a:pPr indent="0" marL="0">
+              <a:buNone/>
+            </a:pPr>
+            <a:r>
+              <a:rPr lang="en-US" sz="1100" b="1" spc="100" kern="0" dirty="0">
+                <a:solidFill>
+                  <a:srgbClr val="55C8E8"/>
+                </a:solidFill>
+                <a:latin typeface="Calibri" pitchFamily="34" charset="0"/>
+                <a:ea typeface="Calibri" pitchFamily="34" charset="-122"/>
+                <a:cs typeface="Calibri" pitchFamily="34" charset="-120"/>
+              </a:rPr>
+              <a:t>NOTICE</a:t>
+            </a:r>
+            <a:endParaRPr lang="en-US" sz="1100" dirty="0"/>
+          </a:p>
+        </p:txBody>
       </p:sp>
       <p:sp>
         <p:nvSpPr>
@@ -6710,24 +9348,24 @@
         </p:nvSpPr>
         <p:spPr>
           <a:xfrm>
-            <a:off x="594360" y="2002536"/>
-            <a:ext cx="7955280" cy="521208"/>
-          </a:xfrm>
-          <a:prstGeom prst="rect">
-            <a:avLst/>
-          </a:prstGeom>
-          <a:noFill/>
-          <a:ln/>
-        </p:spPr>
-        <p:txBody>
-          <a:bodyPr wrap="square" lIns="0" tIns="0" rIns="0" bIns="0" rtlCol="0" anchor="ctr"/>
-          <a:lstStyle/>
-          <a:p>
-            <a:pPr indent="0" marL="0">
-              <a:buNone/>
-            </a:pPr>
-            <a:r>
-              <a:rPr lang="en-US" sz="1700" dirty="0">
+            <a:off x="365760" y="2359152"/>
+            <a:ext cx="8412480" cy="1097280"/>
+          </a:xfrm>
+          <a:prstGeom prst="rect">
+            <a:avLst/>
+          </a:prstGeom>
+          <a:noFill/>
+          <a:ln/>
+        </p:spPr>
+        <p:txBody>
+          <a:bodyPr wrap="square" lIns="0" tIns="0" rIns="0" bIns="0" rtlCol="0" anchor="t"/>
+          <a:lstStyle/>
+          <a:p>
+            <a:pPr indent="0" marL="0">
+              <a:buNone/>
+            </a:pPr>
+            <a:r>
+              <a:rPr lang="en-US" sz="1500" dirty="0">
                 <a:solidFill>
                   <a:srgbClr val="1E293B"/>
                 </a:solidFill>
@@ -6735,48 +9373,9 @@
                 <a:ea typeface="Calibri" pitchFamily="34" charset="-122"/>
                 <a:cs typeface="Calibri" pitchFamily="34" charset="-120"/>
               </a:rPr>
-              <a:t>2. the princess quietly and graciously gave him something he had never expected to receive</a:t>
-            </a:r>
-            <a:endParaRPr lang="en-US" sz="1700" dirty="0"/>
-          </a:p>
-        </p:txBody>
-      </p:sp>
-      <p:sp>
-        <p:nvSpPr>
-          <p:cNvPr id="9" name="Text 7"/>
-          <p:cNvSpPr/>
-          <p:nvPr/>
-        </p:nvSpPr>
-        <p:spPr>
-          <a:xfrm>
-            <a:off x="365760" y="2788920"/>
-            <a:ext cx="8412480" cy="365760"/>
-          </a:xfrm>
-          <a:prstGeom prst="rect">
-            <a:avLst/>
-          </a:prstGeom>
-          <a:noFill/>
-          <a:ln/>
-        </p:spPr>
-        <p:txBody>
-          <a:bodyPr wrap="square" lIns="0" tIns="0" rIns="0" bIns="0" rtlCol="0" anchor="ctr"/>
-          <a:lstStyle/>
-          <a:p>
-            <a:pPr indent="0" marL="0">
-              <a:buNone/>
-            </a:pPr>
-            <a:r>
-              <a:rPr lang="en-US" sz="1600" b="1" dirty="0">
-                <a:solidFill>
-                  <a:srgbClr val="0E1C42"/>
-                </a:solidFill>
-                <a:latin typeface="Calibri" pitchFamily="34" charset="0"/>
-                <a:ea typeface="Calibri" pitchFamily="34" charset="-122"/>
-                <a:cs typeface="Calibri" pitchFamily="34" charset="-120"/>
-              </a:rPr>
-              <a:t>Rewrite both sentences correctly in your notebook.</a:t>
-            </a:r>
-            <a:endParaRPr lang="en-US" sz="1600" dirty="0"/>
+              <a:t>a comma comes before but because it joins two complete sentences. Roscuro is a name and starts with a capital letter. A period ends the sentence.</a:t>
+            </a:r>
+            <a:endParaRPr lang="en-US" sz="1500" dirty="0"/>
           </a:p>
         </p:txBody>
       </p:sp>
@@ -6904,7 +9503,7 @@
                 <a:ea typeface="Calibri" pitchFamily="34" charset="-122"/>
                 <a:cs typeface="Calibri" pitchFamily="34" charset="-120"/>
               </a:rPr>
-              <a:t>FIX THESE SENTENCES</a:t>
+              <a:t>NOW FIX THIS ONE</a:t>
             </a:r>
             <a:endParaRPr lang="en-US" sz="1100" dirty="0"/>
           </a:p>
@@ -6977,7 +9576,7 @@
                 <a:ea typeface="Calibri" pitchFamily="34" charset="-122"/>
                 <a:cs typeface="Calibri" pitchFamily="34" charset="-120"/>
               </a:rPr>
-              <a:t>1. roscuro finally got what he had wanted most in the world but it tasted different than he expected</a:t>
+              <a:t>roscuro finally got what he had wanted most in the world but it tasted different than he expected</a:t>
             </a:r>
             <a:endParaRPr lang="en-US" sz="1700" dirty="0"/>
           </a:p>
@@ -6985,226 +9584,40 @@
       </p:sp>
       <p:sp>
         <p:nvSpPr>
-          <p:cNvPr id="7" name="Shape 5"/>
-          <p:cNvSpPr/>
-          <p:nvPr/>
-        </p:nvSpPr>
-        <p:spPr>
-          <a:xfrm>
-            <a:off x="365760" y="1874520"/>
-            <a:ext cx="8412480" cy="777240"/>
-          </a:xfrm>
-          <a:prstGeom prst="roundRect">
-            <a:avLst>
-              <a:gd name="adj" fmla="val 11765"/>
-            </a:avLst>
-          </a:prstGeom>
-          <a:solidFill>
-            <a:srgbClr val="FFFFFF"/>
-          </a:solidFill>
-          <a:ln w="19050">
-            <a:solidFill>
-              <a:srgbClr val="55C8E8"/>
-            </a:solidFill>
-            <a:prstDash val="solid"/>
-          </a:ln>
-          <a:effectLst>
-            <a:outerShdw sx="100000" sy="100000" kx="0" ky="0" algn="bl" rotWithShape="0" blurRad="101600" dist="38100" dir="2700000">
-              <a:srgbClr val="000000">
-                <a:alpha val="12000"/>
-              </a:srgbClr>
-            </a:outerShdw>
-          </a:effectLst>
-        </p:spPr>
-      </p:sp>
-      <p:sp>
-        <p:nvSpPr>
-          <p:cNvPr id="8" name="Text 6"/>
-          <p:cNvSpPr/>
-          <p:nvPr/>
-        </p:nvSpPr>
-        <p:spPr>
-          <a:xfrm>
-            <a:off x="594360" y="2002536"/>
-            <a:ext cx="7955280" cy="521208"/>
-          </a:xfrm>
-          <a:prstGeom prst="rect">
-            <a:avLst/>
-          </a:prstGeom>
-          <a:noFill/>
-          <a:ln/>
-        </p:spPr>
-        <p:txBody>
-          <a:bodyPr wrap="square" lIns="0" tIns="0" rIns="0" bIns="0" rtlCol="0" anchor="ctr"/>
-          <a:lstStyle/>
-          <a:p>
-            <a:pPr indent="0" marL="0">
-              <a:buNone/>
-            </a:pPr>
-            <a:r>
-              <a:rPr lang="en-US" sz="1700" dirty="0">
-                <a:solidFill>
-                  <a:srgbClr val="1E293B"/>
-                </a:solidFill>
-                <a:latin typeface="Calibri" pitchFamily="34" charset="0"/>
-                <a:ea typeface="Calibri" pitchFamily="34" charset="-122"/>
-                <a:cs typeface="Calibri" pitchFamily="34" charset="-120"/>
-              </a:rPr>
-              <a:t>2. the princess quietly and graciously gave him something he had never expected to receive</a:t>
-            </a:r>
-            <a:endParaRPr lang="en-US" sz="1700" dirty="0"/>
-          </a:p>
-        </p:txBody>
-      </p:sp>
-      <p:sp>
-        <p:nvSpPr>
-          <p:cNvPr id="9" name="Shape 7"/>
-          <p:cNvSpPr/>
-          <p:nvPr/>
-        </p:nvSpPr>
-        <p:spPr>
-          <a:xfrm>
-            <a:off x="365760" y="2743200"/>
-            <a:ext cx="8412480" cy="1417320"/>
-          </a:xfrm>
-          <a:prstGeom prst="roundRect">
-            <a:avLst>
-              <a:gd name="adj" fmla="val 6452"/>
-            </a:avLst>
-          </a:prstGeom>
-          <a:solidFill>
-            <a:srgbClr val="E8F8EF"/>
-          </a:solidFill>
-          <a:ln/>
-          <a:effectLst>
-            <a:outerShdw sx="100000" sy="100000" kx="0" ky="0" algn="bl" rotWithShape="0" blurRad="101600" dist="38100" dir="2700000">
-              <a:srgbClr val="000000">
-                <a:alpha val="12000"/>
-              </a:srgbClr>
-            </a:outerShdw>
-          </a:effectLst>
-        </p:spPr>
-      </p:sp>
-      <p:sp>
-        <p:nvSpPr>
-          <p:cNvPr id="10" name="Text 8"/>
-          <p:cNvSpPr/>
-          <p:nvPr/>
-        </p:nvSpPr>
-        <p:spPr>
-          <a:xfrm>
-            <a:off x="566928" y="2816352"/>
-            <a:ext cx="8229600" cy="237744"/>
-          </a:xfrm>
-          <a:prstGeom prst="rect">
-            <a:avLst/>
-          </a:prstGeom>
-          <a:noFill/>
-          <a:ln/>
-        </p:spPr>
-        <p:txBody>
-          <a:bodyPr wrap="square" lIns="0" tIns="0" rIns="0" bIns="0" rtlCol="0" anchor="ctr"/>
-          <a:lstStyle/>
-          <a:p>
-            <a:pPr indent="0" marL="0">
-              <a:buNone/>
-            </a:pPr>
-            <a:r>
-              <a:rPr lang="en-US" sz="1100" b="1" spc="100" kern="0" dirty="0">
-                <a:solidFill>
-                  <a:srgbClr val="34B76F"/>
-                </a:solidFill>
-                <a:latin typeface="Calibri" pitchFamily="34" charset="0"/>
-                <a:ea typeface="Calibri" pitchFamily="34" charset="-122"/>
-                <a:cs typeface="Calibri" pitchFamily="34" charset="-120"/>
-              </a:rPr>
-              <a:t>✅  CORRECTED</a:t>
-            </a:r>
-            <a:endParaRPr lang="en-US" sz="1100" dirty="0"/>
-          </a:p>
-        </p:txBody>
-      </p:sp>
-      <p:sp>
-        <p:nvSpPr>
-          <p:cNvPr id="11" name="Text 9"/>
-          <p:cNvSpPr/>
-          <p:nvPr/>
-        </p:nvSpPr>
-        <p:spPr>
-          <a:xfrm>
-            <a:off x="566928" y="3072384"/>
-            <a:ext cx="8010144" cy="685800"/>
-          </a:xfrm>
-          <a:prstGeom prst="rect">
-            <a:avLst/>
-          </a:prstGeom>
-          <a:noFill/>
-          <a:ln/>
-        </p:spPr>
-        <p:txBody>
-          <a:bodyPr wrap="square" lIns="0" tIns="0" rIns="0" bIns="0" rtlCol="0" anchor="ctr"/>
-          <a:lstStyle/>
-          <a:p>
-            <a:pPr indent="0" marL="0">
-              <a:buNone/>
-            </a:pPr>
-            <a:endParaRPr lang="en-US" sz="1400" dirty="0"/>
-          </a:p>
-          <a:p>
-            <a:pPr indent="0" marL="0">
-              <a:buNone/>
-            </a:pPr>
-            <a:r>
-              <a:rPr lang="en-US" sz="1400" i="1" dirty="0">
-                <a:solidFill>
-                  <a:srgbClr val="1E293B"/>
-                </a:solidFill>
-                <a:latin typeface="Calibri" pitchFamily="34" charset="0"/>
-                <a:ea typeface="Calibri" pitchFamily="34" charset="-122"/>
-                <a:cs typeface="Calibri" pitchFamily="34" charset="-120"/>
-              </a:rPr>
-              <a:t>1. Roscuro finally got what he had wanted most in the world , but it tasted different than he expected.</a:t>
-            </a:r>
-            <a:endParaRPr lang="en-US" sz="1400" dirty="0"/>
-          </a:p>
-        </p:txBody>
-      </p:sp>
-      <p:sp>
-        <p:nvSpPr>
-          <p:cNvPr id="12" name="Text 10"/>
-          <p:cNvSpPr/>
-          <p:nvPr/>
-        </p:nvSpPr>
-        <p:spPr>
-          <a:xfrm>
-            <a:off x="566928" y="3767328"/>
-            <a:ext cx="8010144" cy="320040"/>
-          </a:xfrm>
-          <a:prstGeom prst="rect">
-            <a:avLst/>
-          </a:prstGeom>
-          <a:noFill/>
-          <a:ln/>
-        </p:spPr>
-        <p:txBody>
-          <a:bodyPr wrap="square" lIns="0" tIns="0" rIns="0" bIns="0" rtlCol="0" anchor="ctr"/>
-          <a:lstStyle/>
-          <a:p>
-            <a:pPr indent="0" marL="0">
-              <a:buNone/>
-            </a:pPr>
-            <a:r>
-              <a:rPr lang="en-US" sz="1200" dirty="0">
-                <a:solidFill>
-                  <a:srgbClr val="64748B"/>
-                </a:solidFill>
-                <a:latin typeface="Calibri" pitchFamily="34" charset="0"/>
-                <a:ea typeface="Calibri" pitchFamily="34" charset="-122"/>
-                <a:cs typeface="Calibri" pitchFamily="34" charset="-120"/>
-              </a:rPr>
-              <a:t>Did you catch the proper nouns (Roscuro, princess), the -ly adverbs (quietly, graciously), the comma before "but," and capital letters?</a:t>
-            </a:r>
-            <a:endParaRPr lang="en-US" sz="1200" dirty="0"/>
+          <p:cNvPr id="7" name="Text 5"/>
+          <p:cNvSpPr/>
+          <p:nvPr/>
+        </p:nvSpPr>
+        <p:spPr>
+          <a:xfrm>
+            <a:off x="365760" y="2788920"/>
+            <a:ext cx="8412480" cy="365760"/>
+          </a:xfrm>
+          <a:prstGeom prst="rect">
+            <a:avLst/>
+          </a:prstGeom>
+          <a:noFill/>
+          <a:ln/>
+        </p:spPr>
+        <p:txBody>
+          <a:bodyPr wrap="square" lIns="0" tIns="0" rIns="0" bIns="0" rtlCol="0" anchor="ctr"/>
+          <a:lstStyle/>
+          <a:p>
+            <a:pPr indent="0" marL="0">
+              <a:buNone/>
+            </a:pPr>
+            <a:r>
+              <a:rPr lang="en-US" sz="1600" b="1" dirty="0">
+                <a:solidFill>
+                  <a:srgbClr val="0E1C42"/>
+                </a:solidFill>
+                <a:latin typeface="Calibri" pitchFamily="34" charset="0"/>
+                <a:ea typeface="Calibri" pitchFamily="34" charset="-122"/>
+                <a:cs typeface="Calibri" pitchFamily="34" charset="-120"/>
+              </a:rPr>
+              <a:t>Rewrite the sentence correctly in your notebook.</a:t>
+            </a:r>
+            <a:endParaRPr lang="en-US" sz="1600" dirty="0"/>
           </a:p>
         </p:txBody>
       </p:sp>
@@ -7222,7 +9635,7 @@
     <p:bg>
       <p:bgPr>
         <a:solidFill>
-          <a:srgbClr val="FFFFFF"/>
+          <a:srgbClr val="F8FAFC"/>
         </a:solidFill>
       </p:bgPr>
     </p:bg>
@@ -7255,7 +9668,7 @@
             <a:avLst/>
           </a:prstGeom>
           <a:solidFill>
-            <a:srgbClr val="8B6FC0"/>
+            <a:srgbClr val="55C8E8"/>
           </a:solidFill>
           <a:ln/>
         </p:spPr>
@@ -7293,7 +9706,7 @@
                 <a:ea typeface="Calibri" pitchFamily="34" charset="-122"/>
                 <a:cs typeface="Calibri" pitchFamily="34" charset="-120"/>
               </a:rPr>
-              <a:t>🌱  Morphology</a:t>
+              <a:t>✏️  Daily Oral Language</a:t>
             </a:r>
             <a:endParaRPr lang="en-US" sz="2200" dirty="0"/>
           </a:p>
@@ -7307,7 +9720,7 @@
         </p:nvSpPr>
         <p:spPr>
           <a:xfrm>
-            <a:off x="365760" y="804672"/>
+            <a:off x="365760" y="749808"/>
             <a:ext cx="8229600" cy="237744"/>
           </a:xfrm>
           <a:prstGeom prst="rect">
@@ -7326,13 +9739,13 @@
             <a:r>
               <a:rPr lang="en-US" sz="1100" b="1" spc="100" kern="0" dirty="0">
                 <a:solidFill>
-                  <a:srgbClr val="8B6FC0"/>
-                </a:solidFill>
-                <a:latin typeface="Calibri" pitchFamily="34" charset="0"/>
-                <a:ea typeface="Calibri" pitchFamily="34" charset="-122"/>
-                <a:cs typeface="Calibri" pitchFamily="34" charset="-120"/>
-              </a:rPr>
-              <a:t>-TION</a:t>
+                  <a:srgbClr val="55C8E8"/>
+                </a:solidFill>
+                <a:latin typeface="Calibri" pitchFamily="34" charset="0"/>
+                <a:ea typeface="Calibri" pitchFamily="34" charset="-122"/>
+                <a:cs typeface="Calibri" pitchFamily="34" charset="-120"/>
+              </a:rPr>
+              <a:t>NOW FIX THIS ONE</a:t>
             </a:r>
             <a:endParaRPr lang="en-US" sz="1100" dirty="0"/>
           </a:p>
@@ -7346,18 +9759,23 @@
         </p:nvSpPr>
         <p:spPr>
           <a:xfrm>
-            <a:off x="365760" y="1097280"/>
-            <a:ext cx="8412480" cy="621792"/>
+            <a:off x="365760" y="1024128"/>
+            <a:ext cx="8412480" cy="777240"/>
           </a:xfrm>
           <a:prstGeom prst="roundRect">
             <a:avLst>
-              <a:gd name="adj" fmla="val 14706"/>
+              <a:gd name="adj" fmla="val 11765"/>
             </a:avLst>
           </a:prstGeom>
           <a:solidFill>
-            <a:srgbClr val="F0E8FF"/>
+            <a:srgbClr val="FFFFFF"/>
           </a:solidFill>
-          <a:ln/>
+          <a:ln w="19050">
+            <a:solidFill>
+              <a:srgbClr val="55C8E8"/>
+            </a:solidFill>
+            <a:prstDash val="solid"/>
+          </a:ln>
           <a:effectLst>
             <a:outerShdw sx="100000" sy="100000" kx="0" ky="0" algn="bl" rotWithShape="0" blurRad="101600" dist="38100" dir="2700000">
               <a:srgbClr val="000000">
@@ -7375,24 +9793,24 @@
         </p:nvSpPr>
         <p:spPr>
           <a:xfrm>
-            <a:off x="594360" y="1216152"/>
-            <a:ext cx="7863840" cy="384048"/>
-          </a:xfrm>
-          <a:prstGeom prst="rect">
-            <a:avLst/>
-          </a:prstGeom>
-          <a:noFill/>
-          <a:ln/>
-        </p:spPr>
-        <p:txBody>
-          <a:bodyPr wrap="square" lIns="0" tIns="0" rIns="0" bIns="0" rtlCol="0" anchor="ctr"/>
-          <a:lstStyle/>
-          <a:p>
-            <a:pPr indent="0" marL="0">
-              <a:buNone/>
-            </a:pPr>
-            <a:r>
-              <a:rPr lang="en-US" sz="1500" dirty="0">
+            <a:off x="594360" y="1152144"/>
+            <a:ext cx="7955280" cy="521208"/>
+          </a:xfrm>
+          <a:prstGeom prst="rect">
+            <a:avLst/>
+          </a:prstGeom>
+          <a:noFill/>
+          <a:ln/>
+        </p:spPr>
+        <p:txBody>
+          <a:bodyPr wrap="square" lIns="0" tIns="0" rIns="0" bIns="0" rtlCol="0" anchor="ctr"/>
+          <a:lstStyle/>
+          <a:p>
+            <a:pPr indent="0" marL="0">
+              <a:buNone/>
+            </a:pPr>
+            <a:r>
+              <a:rPr lang="en-US" sz="1700" dirty="0">
                 <a:solidFill>
                   <a:srgbClr val="1E293B"/>
                 </a:solidFill>
@@ -7400,9 +9818,9 @@
                 <a:ea typeface="Calibri" pitchFamily="34" charset="-122"/>
                 <a:cs typeface="Calibri" pitchFamily="34" charset="-120"/>
               </a:rPr>
-              <a:t>🌱  action — base word: act</a:t>
-            </a:r>
-            <a:endParaRPr lang="en-US" sz="1500" dirty="0"/>
+              <a:t>roscuro finally got what he had wanted most in the world but it tasted different than he expected</a:t>
+            </a:r>
+            <a:endParaRPr lang="en-US" sz="1700" dirty="0"/>
           </a:p>
         </p:txBody>
       </p:sp>
@@ -7414,16 +9832,16 @@
         </p:nvSpPr>
         <p:spPr>
           <a:xfrm>
-            <a:off x="365760" y="1792224"/>
-            <a:ext cx="8412480" cy="621792"/>
+            <a:off x="365760" y="2743200"/>
+            <a:ext cx="8412480" cy="1417320"/>
           </a:xfrm>
           <a:prstGeom prst="roundRect">
             <a:avLst>
-              <a:gd name="adj" fmla="val 14706"/>
+              <a:gd name="adj" fmla="val 6452"/>
             </a:avLst>
           </a:prstGeom>
           <a:solidFill>
-            <a:srgbClr val="F8F4FF"/>
+            <a:srgbClr val="E8F8EF"/>
           </a:solidFill>
           <a:ln/>
           <a:effectLst>
@@ -7443,24 +9861,63 @@
         </p:nvSpPr>
         <p:spPr>
           <a:xfrm>
-            <a:off x="594360" y="1911096"/>
-            <a:ext cx="7863840" cy="384048"/>
-          </a:xfrm>
-          <a:prstGeom prst="rect">
-            <a:avLst/>
-          </a:prstGeom>
-          <a:noFill/>
-          <a:ln/>
-        </p:spPr>
-        <p:txBody>
-          <a:bodyPr wrap="square" lIns="0" tIns="0" rIns="0" bIns="0" rtlCol="0" anchor="ctr"/>
-          <a:lstStyle/>
-          <a:p>
-            <a:pPr indent="0" marL="0">
-              <a:buNone/>
-            </a:pPr>
-            <a:r>
-              <a:rPr lang="en-US" sz="1500" dirty="0">
+            <a:off x="566928" y="2816352"/>
+            <a:ext cx="8229600" cy="237744"/>
+          </a:xfrm>
+          <a:prstGeom prst="rect">
+            <a:avLst/>
+          </a:prstGeom>
+          <a:noFill/>
+          <a:ln/>
+        </p:spPr>
+        <p:txBody>
+          <a:bodyPr wrap="square" lIns="0" tIns="0" rIns="0" bIns="0" rtlCol="0" anchor="ctr"/>
+          <a:lstStyle/>
+          <a:p>
+            <a:pPr indent="0" marL="0">
+              <a:buNone/>
+            </a:pPr>
+            <a:r>
+              <a:rPr lang="en-US" sz="1100" b="1" spc="100" kern="0" dirty="0">
+                <a:solidFill>
+                  <a:srgbClr val="34B76F"/>
+                </a:solidFill>
+                <a:latin typeface="Calibri" pitchFamily="34" charset="0"/>
+                <a:ea typeface="Calibri" pitchFamily="34" charset="-122"/>
+                <a:cs typeface="Calibri" pitchFamily="34" charset="-120"/>
+              </a:rPr>
+              <a:t>✅  CORRECTED</a:t>
+            </a:r>
+            <a:endParaRPr lang="en-US" sz="1100" dirty="0"/>
+          </a:p>
+        </p:txBody>
+      </p:sp>
+      <p:sp>
+        <p:nvSpPr>
+          <p:cNvPr id="9" name="Text 7"/>
+          <p:cNvSpPr/>
+          <p:nvPr/>
+        </p:nvSpPr>
+        <p:spPr>
+          <a:xfrm>
+            <a:off x="566928" y="3072384"/>
+            <a:ext cx="8010144" cy="685800"/>
+          </a:xfrm>
+          <a:prstGeom prst="rect">
+            <a:avLst/>
+          </a:prstGeom>
+          <a:noFill/>
+          <a:ln/>
+        </p:spPr>
+        <p:txBody>
+          <a:bodyPr wrap="square" lIns="0" tIns="0" rIns="0" bIns="0" rtlCol="0" anchor="ctr"/>
+          <a:lstStyle/>
+          <a:p>
+            <a:pPr indent="0" marL="0">
+              <a:buNone/>
+            </a:pPr>
+            <a:r>
+              <a:rPr lang="en-US" sz="1400" i="1" dirty="0">
                 <a:solidFill>
                   <a:srgbClr val="1E293B"/>
                 </a:solidFill>
@@ -7468,145 +9925,15 @@
                 <a:ea typeface="Calibri" pitchFamily="34" charset="-122"/>
                 <a:cs typeface="Calibri" pitchFamily="34" charset="-120"/>
               </a:rPr>
-              <a:t>🌱  direction — base word: direct</a:t>
-            </a:r>
-            <a:endParaRPr lang="en-US" sz="1500" dirty="0"/>
-          </a:p>
-        </p:txBody>
-      </p:sp>
-      <p:sp>
-        <p:nvSpPr>
-          <p:cNvPr id="9" name="Shape 7"/>
-          <p:cNvSpPr/>
-          <p:nvPr/>
-        </p:nvSpPr>
-        <p:spPr>
-          <a:xfrm>
-            <a:off x="365760" y="2487168"/>
-            <a:ext cx="8412480" cy="621792"/>
-          </a:xfrm>
-          <a:prstGeom prst="roundRect">
-            <a:avLst>
-              <a:gd name="adj" fmla="val 14706"/>
-            </a:avLst>
-          </a:prstGeom>
-          <a:solidFill>
-            <a:srgbClr val="F0E8FF"/>
-          </a:solidFill>
-          <a:ln/>
-          <a:effectLst>
-            <a:outerShdw sx="100000" sy="100000" kx="0" ky="0" algn="bl" rotWithShape="0" blurRad="101600" dist="38100" dir="2700000">
-              <a:srgbClr val="000000">
-                <a:alpha val="12000"/>
-              </a:srgbClr>
-            </a:outerShdw>
-          </a:effectLst>
-        </p:spPr>
-      </p:sp>
-      <p:sp>
-        <p:nvSpPr>
-          <p:cNvPr id="10" name="Text 8"/>
-          <p:cNvSpPr/>
-          <p:nvPr/>
-        </p:nvSpPr>
-        <p:spPr>
-          <a:xfrm>
-            <a:off x="594360" y="2606040"/>
-            <a:ext cx="7863840" cy="384048"/>
-          </a:xfrm>
-          <a:prstGeom prst="rect">
-            <a:avLst/>
-          </a:prstGeom>
-          <a:noFill/>
-          <a:ln/>
-        </p:spPr>
-        <p:txBody>
-          <a:bodyPr wrap="square" lIns="0" tIns="0" rIns="0" bIns="0" rtlCol="0" anchor="ctr"/>
-          <a:lstStyle/>
-          <a:p>
-            <a:pPr indent="0" marL="0">
-              <a:buNone/>
-            </a:pPr>
-            <a:r>
-              <a:rPr lang="en-US" sz="1500" dirty="0">
-                <a:solidFill>
-                  <a:srgbClr val="1E293B"/>
-                </a:solidFill>
-                <a:latin typeface="Calibri" pitchFamily="34" charset="0"/>
-                <a:ea typeface="Calibri" pitchFamily="34" charset="-122"/>
-                <a:cs typeface="Calibri" pitchFamily="34" charset="-120"/>
-              </a:rPr>
-              <a:t>🌱  celebration — base word: celebrate</a:t>
-            </a:r>
-            <a:endParaRPr lang="en-US" sz="1500" dirty="0"/>
-          </a:p>
-        </p:txBody>
-      </p:sp>
-      <p:sp>
-        <p:nvSpPr>
-          <p:cNvPr id="11" name="Shape 9"/>
-          <p:cNvSpPr/>
-          <p:nvPr/>
-        </p:nvSpPr>
-        <p:spPr>
-          <a:xfrm>
-            <a:off x="365760" y="3182112"/>
-            <a:ext cx="8412480" cy="621792"/>
-          </a:xfrm>
-          <a:prstGeom prst="roundRect">
-            <a:avLst>
-              <a:gd name="adj" fmla="val 14706"/>
-            </a:avLst>
-          </a:prstGeom>
-          <a:solidFill>
-            <a:srgbClr val="F8F4FF"/>
-          </a:solidFill>
-          <a:ln/>
-          <a:effectLst>
-            <a:outerShdw sx="100000" sy="100000" kx="0" ky="0" algn="bl" rotWithShape="0" blurRad="101600" dist="38100" dir="2700000">
-              <a:srgbClr val="000000">
-                <a:alpha val="12000"/>
-              </a:srgbClr>
-            </a:outerShdw>
-          </a:effectLst>
-        </p:spPr>
-      </p:sp>
-      <p:sp>
-        <p:nvSpPr>
-          <p:cNvPr id="12" name="Text 10"/>
-          <p:cNvSpPr/>
-          <p:nvPr/>
-        </p:nvSpPr>
-        <p:spPr>
-          <a:xfrm>
-            <a:off x="594360" y="3300984"/>
-            <a:ext cx="7863840" cy="384048"/>
-          </a:xfrm>
-          <a:prstGeom prst="rect">
-            <a:avLst/>
-          </a:prstGeom>
-          <a:noFill/>
-          <a:ln/>
-        </p:spPr>
-        <p:txBody>
-          <a:bodyPr wrap="square" lIns="0" tIns="0" rIns="0" bIns="0" rtlCol="0" anchor="ctr"/>
-          <a:lstStyle/>
-          <a:p>
-            <a:pPr indent="0" marL="0">
-              <a:buNone/>
-            </a:pPr>
-            <a:r>
-              <a:rPr lang="en-US" sz="1500" dirty="0">
-                <a:solidFill>
-                  <a:srgbClr val="1E293B"/>
-                </a:solidFill>
-                <a:latin typeface="Calibri" pitchFamily="34" charset="0"/>
-                <a:ea typeface="Calibri" pitchFamily="34" charset="-122"/>
-                <a:cs typeface="Calibri" pitchFamily="34" charset="-120"/>
-              </a:rPr>
-              <a:t>🌱  invention — base word: invent</a:t>
-            </a:r>
-            <a:endParaRPr lang="en-US" sz="1500" dirty="0"/>
+              <a:t>Roscuro finally got what he had wanted most in the world, but it tasted different than he expected.</a:t>
+            </a:r>
+            <a:endParaRPr lang="en-US" sz="1400" dirty="0"/>
+          </a:p>
+          <a:p>
+            <a:pPr indent="0" marL="0">
+              <a:buNone/>
+            </a:pPr>
+            <a:endParaRPr lang="en-US" sz="1400" dirty="0"/>
           </a:p>
         </p:txBody>
       </p:sp>
